--- a/outputs/paparan_ispu_dki_jakarta.pptx
+++ b/outputs/paparan_ispu_dki_jakarta.pptx
@@ -4,6 +4,9 @@
   <p:sldMasterIdLst>
     <p:sldMasterId id="2147483648" r:id="rId1"/>
   </p:sldMasterIdLst>
+  <p:notesMasterIdLst>
+    <p:notesMasterId r:id="rId12"/>
+  </p:notesMasterIdLst>
   <p:sldIdLst>
     <p:sldId id="256" r:id="rId2"/>
     <p:sldId id="257" r:id="rId3"/>
@@ -16,11 +19,8 @@
     <p:sldId id="264" r:id="rId10"/>
     <p:sldId id="265" r:id="rId11"/>
   </p:sldIdLst>
-  <p:notesMasterIdLst>
-    <p:notesMasterId r:id="rId12"/>
-  </p:notesMasterIdLst>
-  <p:sldSz cx="12191695" cy="6858000"/>
-  <p:notesSz cx="6858000" cy="12191695"/>
+  <p:sldSz cx="12192000" cy="6858000"/>
+  <p:notesSz cx="6858000" cy="12192000"/>
   <p:defaultTextStyle>
     <a:lvl1pPr marL="0" algn="l" defTabSz="914400" rtl="0" eaLnBrk="1" latinLnBrk="0" hangingPunct="1">
       <a:defRPr sz="1800" kern="1200">
@@ -113,13 +113,20 @@
       </a:defRPr>
     </a:lvl9pPr>
   </p:defaultTextStyle>
+  <p:extLst>
+    <p:ext uri="{EFAFB233-063F-42B5-8137-9DF3F51BA10A}">
+      <p15:sldGuideLst xmlns:p15="http://schemas.microsoft.com/office/powerpoint/2012/main"/>
+    </p:ext>
+  </p:extLst>
 </p:presentation>
 </file>
 
 <file path=ppt/charts/chart1.xml><?xml version="1.0" encoding="utf-8"?>
-<c:chartSpace xmlns:c="http://schemas.openxmlformats.org/drawingml/2006/chart" xmlns:a="http://schemas.openxmlformats.org/drawingml/2006/main" xmlns:r="http://schemas.openxmlformats.org/officeDocument/2006/relationships">
+<c:chartSpace xmlns:c="http://schemas.openxmlformats.org/drawingml/2006/chart" xmlns:a="http://schemas.openxmlformats.org/drawingml/2006/main" xmlns:r="http://schemas.openxmlformats.org/officeDocument/2006/relationships" xmlns:c16r2="http://schemas.microsoft.com/office/drawing/2015/06/chart">
   <c:date1904 val="0"/>
+  <c:lang val="en-US"/>
   <c:roundedCorners val="1"/>
+  <c:style val="2"/>
   <c:chart>
     <c:autoTitleDeleted val="1"/>
     <c:plotArea>
@@ -149,54 +156,28 @@
             <a:effectLst/>
           </c:spPr>
           <c:invertIfNegative val="0"/>
-          <c:dLbls>
-            <c:numFmt formatCode="#,##0" sourceLinked="0"/>
-            <c:txPr>
-              <a:bodyPr/>
-              <a:lstStyle/>
-              <a:p>
-                <a:pPr>
-                  <a:defRPr b="0" i="0" strike="noStrike" sz="1200" u="none">
-                    <a:solidFill>
-                      <a:srgbClr val="000000"/>
-                    </a:solidFill>
-                    <a:latin typeface="Arial"/>
-                  </a:defRPr>
-                </a:pPr>
-              </a:p>
-            </c:txPr>
-            <c:showLegendKey val="0"/>
-            <c:showVal val="0"/>
-            <c:showCatName val="0"/>
-            <c:showSerName val="0"/>
-            <c:showPercent val="0"/>
-            <c:showBubbleSize val="0"/>
-            <c:showLeaderLines val="0"/>
-          </c:dLbls>
           <c:cat>
-            <c:multiLvlStrRef>
+            <c:strRef>
               <c:f>Sheet1!$A$2:$A$6</c:f>
-              <c:multiLvlStrCache>
+              <c:strCache>
                 <c:ptCount val="5"/>
-                <c:lvl>
-                  <c:pt idx="0">
-                    <c:v>PM2.5 missing</c:v>
-                  </c:pt>
-                  <c:pt idx="1">
-                    <c:v>Max mismatch</c:v>
-                  </c:pt>
-                  <c:pt idx="2">
-                    <c:v>Critical mismatch</c:v>
-                  </c:pt>
-                  <c:pt idx="3">
-                    <c:v>Tanggal-periode mismatch</c:v>
-                  </c:pt>
-                  <c:pt idx="4">
-                    <c:v>Duplikat kunci harian-stasiun</c:v>
-                  </c:pt>
-                </c:lvl>
-              </c:multiLvlStrCache>
-            </c:multiLvlStrRef>
+                <c:pt idx="0">
+                  <c:v>PM2.5 missing</c:v>
+                </c:pt>
+                <c:pt idx="1">
+                  <c:v>Max mismatch</c:v>
+                </c:pt>
+                <c:pt idx="2">
+                  <c:v>Critical mismatch</c:v>
+                </c:pt>
+                <c:pt idx="3">
+                  <c:v>Tanggal-periode mismatch</c:v>
+                </c:pt>
+                <c:pt idx="4">
+                  <c:v>Duplikat kunci harian-stasiun</c:v>
+                </c:pt>
+              </c:strCache>
+            </c:strRef>
           </c:cat>
           <c:val>
             <c:numRef>
@@ -222,36 +203,23 @@
               </c:numCache>
             </c:numRef>
           </c:val>
+          <c:extLst>
+            <c:ext xmlns:c16="http://schemas.microsoft.com/office/drawing/2014/chart" uri="{C3380CC4-5D6E-409C-BE32-E72D297353CC}">
+              <c16:uniqueId val="{00000000-65BD-437D-AFBE-4080FC02F4CC}"/>
+            </c:ext>
+          </c:extLst>
         </c:ser>
         <c:dLbls>
-          <c:numFmt formatCode="#,##0" sourceLinked="0"/>
-          <c:txPr>
-            <a:bodyPr/>
-            <a:lstStyle/>
-            <a:p>
-              <a:pPr>
-                <a:defRPr b="0" i="0" strike="noStrike" sz="1200" u="none">
-                  <a:solidFill>
-                    <a:srgbClr val="000000"/>
-                  </a:solidFill>
-                  <a:latin typeface="Arial"/>
-                </a:defRPr>
-              </a:pPr>
-            </a:p>
-          </c:txPr>
           <c:showLegendKey val="0"/>
           <c:showVal val="0"/>
           <c:showCatName val="0"/>
           <c:showSerName val="0"/>
           <c:showPercent val="0"/>
           <c:showBubbleSize val="0"/>
-          <c:showLeaderLines val="0"/>
         </c:dLbls>
         <c:gapWidth val="150"/>
-        <c:overlap val="0"/>
         <c:axId val="2094734554"/>
         <c:axId val="2094734552"/>
-        <c:axId val="2094734556"/>
       </c:barChart>
       <c:catAx>
         <c:axId val="2094734554"/>
@@ -278,7 +246,7 @@
           <a:lstStyle/>
           <a:p>
             <a:pPr>
-              <a:defRPr sz="650" b="0" i="0" u="none" strike="noStrike">
+              <a:defRPr sz="1100" b="0" i="0" u="none" strike="noStrike">
                 <a:solidFill>
                   <a:srgbClr val="000000"/>
                 </a:solidFill>
@@ -292,6 +260,7 @@
         <c:crosses val="autoZero"/>
         <c:auto val="1"/>
         <c:lblAlgn val="ctr"/>
+        <c:lblOffset val="100"/>
         <c:noMultiLvlLbl val="1"/>
       </c:catAx>
       <c:valAx>
@@ -356,6 +325,7 @@
     </c:plotArea>
     <c:plotVisOnly val="1"/>
     <c:dispBlanksAs val="span"/>
+    <c:showDLblsOverMax val="1"/>
   </c:chart>
   <c:spPr>
     <a:noFill/>
@@ -371,9 +341,11 @@
 </file>
 
 <file path=ppt/charts/chart2.xml><?xml version="1.0" encoding="utf-8"?>
-<c:chartSpace xmlns:c="http://schemas.openxmlformats.org/drawingml/2006/chart" xmlns:a="http://schemas.openxmlformats.org/drawingml/2006/main" xmlns:r="http://schemas.openxmlformats.org/officeDocument/2006/relationships">
+<c:chartSpace xmlns:c="http://schemas.openxmlformats.org/drawingml/2006/chart" xmlns:a="http://schemas.openxmlformats.org/drawingml/2006/main" xmlns:r="http://schemas.openxmlformats.org/officeDocument/2006/relationships" xmlns:c16r2="http://schemas.microsoft.com/office/drawing/2015/06/chart">
   <c:date1904 val="0"/>
+  <c:lang val="en-US"/>
   <c:roundedCorners val="1"/>
+  <c:style val="2"/>
   <c:chart>
     <c:autoTitleDeleted val="1"/>
     <c:plotArea>
@@ -403,59 +375,33 @@
             <a:effectLst/>
           </c:spPr>
           <c:invertIfNegative val="0"/>
-          <c:dLbls>
-            <c:numFmt formatCode="#,##0" sourceLinked="0"/>
-            <c:txPr>
-              <a:bodyPr/>
-              <a:lstStyle/>
-              <a:p>
-                <a:pPr>
-                  <a:defRPr b="0" i="0" strike="noStrike" sz="1200" u="none">
-                    <a:solidFill>
-                      <a:srgbClr val="000000"/>
-                    </a:solidFill>
-                    <a:latin typeface="Arial"/>
-                  </a:defRPr>
-                </a:pPr>
-              </a:p>
-            </c:txPr>
-            <c:showLegendKey val="0"/>
-            <c:showVal val="0"/>
-            <c:showCatName val="0"/>
-            <c:showSerName val="0"/>
-            <c:showPercent val="0"/>
-            <c:showBubbleSize val="0"/>
-            <c:showLeaderLines val="0"/>
-          </c:dLbls>
           <c:cat>
-            <c:multiLvlStrRef>
+            <c:strRef>
               <c:f>Sheet1!$A$2:$A$6</c:f>
-              <c:multiLvlStrCache>
+              <c:strCache>
                 <c:ptCount val="5"/>
-                <c:lvl>
-                  <c:pt idx="0">
-                    <c:v>DKI2
+                <c:pt idx="0">
+                  <c:v>DKI2
 Kelapa Gading</c:v>
-                  </c:pt>
-                  <c:pt idx="1">
-                    <c:v>DKI5
+                </c:pt>
+                <c:pt idx="1">
+                  <c:v>DKI5
 Kebon Jeruk</c:v>
-                  </c:pt>
-                  <c:pt idx="2">
-                    <c:v>DKI4
+                </c:pt>
+                <c:pt idx="2">
+                  <c:v>DKI4
 Lubang Buaya</c:v>
-                  </c:pt>
-                  <c:pt idx="3">
-                    <c:v>DKI3
+                </c:pt>
+                <c:pt idx="3">
+                  <c:v>DKI3
 Jagakarsa</c:v>
-                  </c:pt>
-                  <c:pt idx="4">
-                    <c:v>DKI1
+                </c:pt>
+                <c:pt idx="4">
+                  <c:v>DKI1
 Bunderan HI</c:v>
-                  </c:pt>
-                </c:lvl>
-              </c:multiLvlStrCache>
-            </c:multiLvlStrRef>
+                </c:pt>
+              </c:strCache>
+            </c:strRef>
           </c:cat>
           <c:val>
             <c:numRef>
@@ -481,36 +427,23 @@
               </c:numCache>
             </c:numRef>
           </c:val>
+          <c:extLst>
+            <c:ext xmlns:c16="http://schemas.microsoft.com/office/drawing/2014/chart" uri="{C3380CC4-5D6E-409C-BE32-E72D297353CC}">
+              <c16:uniqueId val="{00000000-09BA-4ECC-A778-CEB0A42D4F4E}"/>
+            </c:ext>
+          </c:extLst>
         </c:ser>
         <c:dLbls>
-          <c:numFmt formatCode="#,##0" sourceLinked="0"/>
-          <c:txPr>
-            <a:bodyPr/>
-            <a:lstStyle/>
-            <a:p>
-              <a:pPr>
-                <a:defRPr b="0" i="0" strike="noStrike" sz="1200" u="none">
-                  <a:solidFill>
-                    <a:srgbClr val="000000"/>
-                  </a:solidFill>
-                  <a:latin typeface="Arial"/>
-                </a:defRPr>
-              </a:pPr>
-            </a:p>
-          </c:txPr>
           <c:showLegendKey val="0"/>
           <c:showVal val="0"/>
           <c:showCatName val="0"/>
           <c:showSerName val="0"/>
           <c:showPercent val="0"/>
           <c:showBubbleSize val="0"/>
-          <c:showLeaderLines val="0"/>
         </c:dLbls>
         <c:gapWidth val="150"/>
-        <c:overlap val="0"/>
         <c:axId val="2094734554"/>
         <c:axId val="2094734552"/>
-        <c:axId val="2094734556"/>
       </c:barChart>
       <c:catAx>
         <c:axId val="2094734554"/>
@@ -551,6 +484,7 @@
         <c:crosses val="autoZero"/>
         <c:auto val="1"/>
         <c:lblAlgn val="ctr"/>
+        <c:lblOffset val="100"/>
         <c:noMultiLvlLbl val="1"/>
       </c:catAx>
       <c:valAx>
@@ -615,6 +549,7 @@
     </c:plotArea>
     <c:plotVisOnly val="1"/>
     <c:dispBlanksAs val="span"/>
+    <c:showDLblsOverMax val="1"/>
   </c:chart>
   <c:spPr>
     <a:noFill/>
@@ -630,14 +565,17 @@
 </file>
 
 <file path=ppt/charts/chart3.xml><?xml version="1.0" encoding="utf-8"?>
-<c:chartSpace xmlns:c="http://schemas.openxmlformats.org/drawingml/2006/chart" xmlns:a="http://schemas.openxmlformats.org/drawingml/2006/main" xmlns:r="http://schemas.openxmlformats.org/officeDocument/2006/relationships">
+<c:chartSpace xmlns:c="http://schemas.openxmlformats.org/drawingml/2006/chart" xmlns:a="http://schemas.openxmlformats.org/drawingml/2006/main" xmlns:r="http://schemas.openxmlformats.org/officeDocument/2006/relationships" xmlns:c16r2="http://schemas.microsoft.com/office/drawing/2015/06/chart">
   <c:date1904 val="0"/>
+  <c:lang val="en-US"/>
   <c:roundedCorners val="1"/>
+  <c:style val="2"/>
   <c:chart>
     <c:autoTitleDeleted val="1"/>
     <c:plotArea>
       <c:layout/>
       <c:lineChart>
+        <c:grouping val="standard"/>
         <c:varyColors val="0"/>
         <c:ser>
           <c:idx val="0"/>
@@ -654,9 +592,6 @@
             </c:strRef>
           </c:tx>
           <c:spPr>
-            <a:solidFill>
-              <a:srgbClr val="D68A00"/>
-            </a:solidFill>
             <a:ln w="25400" cap="flat">
               <a:solidFill>
                 <a:srgbClr val="D68A00"/>
@@ -666,31 +601,6 @@
             </a:ln>
             <a:effectLst/>
           </c:spPr>
-          <c:invertIfNegative val="0"/>
-          <c:dLbls>
-            <c:numFmt formatCode="#,##0" sourceLinked="0"/>
-            <c:txPr>
-              <a:bodyPr/>
-              <a:lstStyle/>
-              <a:p>
-                <a:pPr>
-                  <a:defRPr b="0" i="0" strike="noStrike" sz="1200" u="none">
-                    <a:solidFill>
-                      <a:srgbClr val="000000"/>
-                    </a:solidFill>
-                    <a:latin typeface="Arial"/>
-                  </a:defRPr>
-                </a:pPr>
-              </a:p>
-            </c:txPr>
-            <c:showLegendKey val="0"/>
-            <c:showVal val="0"/>
-            <c:showCatName val="0"/>
-            <c:showSerName val="0"/>
-            <c:showPercent val="0"/>
-            <c:showBubbleSize val="0"/>
-            <c:showLeaderLines val="0"/>
-          </c:dLbls>
           <c:marker>
             <c:symbol val="circle"/>
             <c:size val="6"/>
@@ -709,50 +619,48 @@
             </c:spPr>
           </c:marker>
           <c:cat>
-            <c:multiLvlStrRef>
+            <c:strRef>
               <c:f>Sheet1!$A$2:$A$13</c:f>
-              <c:multiLvlStrCache>
+              <c:strCache>
                 <c:ptCount val="12"/>
-                <c:lvl>
-                  <c:pt idx="0">
-                    <c:v>Jan</c:v>
-                  </c:pt>
-                  <c:pt idx="1">
-                    <c:v>Feb</c:v>
-                  </c:pt>
-                  <c:pt idx="2">
-                    <c:v>Mar</c:v>
-                  </c:pt>
-                  <c:pt idx="3">
-                    <c:v>Apr</c:v>
-                  </c:pt>
-                  <c:pt idx="4">
-                    <c:v>Mei</c:v>
-                  </c:pt>
-                  <c:pt idx="5">
-                    <c:v>Jun</c:v>
-                  </c:pt>
-                  <c:pt idx="6">
-                    <c:v>Jul</c:v>
-                  </c:pt>
-                  <c:pt idx="7">
-                    <c:v>Agu</c:v>
-                  </c:pt>
-                  <c:pt idx="8">
-                    <c:v>Sep</c:v>
-                  </c:pt>
-                  <c:pt idx="9">
-                    <c:v>Okt</c:v>
-                  </c:pt>
-                  <c:pt idx="10">
-                    <c:v>Nov</c:v>
-                  </c:pt>
-                  <c:pt idx="11">
-                    <c:v>Des</c:v>
-                  </c:pt>
-                </c:lvl>
-              </c:multiLvlStrCache>
-            </c:multiLvlStrRef>
+                <c:pt idx="0">
+                  <c:v>Jan</c:v>
+                </c:pt>
+                <c:pt idx="1">
+                  <c:v>Feb</c:v>
+                </c:pt>
+                <c:pt idx="2">
+                  <c:v>Mar</c:v>
+                </c:pt>
+                <c:pt idx="3">
+                  <c:v>Apr</c:v>
+                </c:pt>
+                <c:pt idx="4">
+                  <c:v>Mei</c:v>
+                </c:pt>
+                <c:pt idx="5">
+                  <c:v>Jun</c:v>
+                </c:pt>
+                <c:pt idx="6">
+                  <c:v>Jul</c:v>
+                </c:pt>
+                <c:pt idx="7">
+                  <c:v>Agu</c:v>
+                </c:pt>
+                <c:pt idx="8">
+                  <c:v>Sep</c:v>
+                </c:pt>
+                <c:pt idx="9">
+                  <c:v>Okt</c:v>
+                </c:pt>
+                <c:pt idx="10">
+                  <c:v>Nov</c:v>
+                </c:pt>
+                <c:pt idx="11">
+                  <c:v>Des</c:v>
+                </c:pt>
+              </c:strCache>
+            </c:strRef>
           </c:cat>
           <c:val>
             <c:numRef>
@@ -794,41 +702,30 @@
                   <c:v>84.7</c:v>
                 </c:pt>
                 <c:pt idx="11">
-                  <c:v>65.1</c:v>
+                  <c:v>65.099999999999994</c:v>
                 </c:pt>
               </c:numCache>
             </c:numRef>
           </c:val>
           <c:smooth val="0"/>
+          <c:extLst>
+            <c:ext xmlns:c16="http://schemas.microsoft.com/office/drawing/2014/chart" uri="{C3380CC4-5D6E-409C-BE32-E72D297353CC}">
+              <c16:uniqueId val="{00000000-DED6-4F15-95C9-1AD42B1072BE}"/>
+            </c:ext>
+          </c:extLst>
         </c:ser>
         <c:dLbls>
-          <c:numFmt formatCode="#,##0" sourceLinked="0"/>
-          <c:txPr>
-            <a:bodyPr/>
-            <a:lstStyle/>
-            <a:p>
-              <a:pPr>
-                <a:defRPr b="0" i="0" strike="noStrike" sz="1200" u="none">
-                  <a:solidFill>
-                    <a:srgbClr val="000000"/>
-                  </a:solidFill>
-                  <a:latin typeface="Arial"/>
-                </a:defRPr>
-              </a:pPr>
-            </a:p>
-          </c:txPr>
           <c:showLegendKey val="0"/>
           <c:showVal val="0"/>
           <c:showCatName val="0"/>
           <c:showSerName val="0"/>
           <c:showPercent val="0"/>
           <c:showBubbleSize val="0"/>
-          <c:showLeaderLines val="0"/>
         </c:dLbls>
         <c:marker val="1"/>
+        <c:smooth val="0"/>
         <c:axId val="2094734554"/>
         <c:axId val="2094734552"/>
-        <c:axId val="2094734556"/>
       </c:lineChart>
       <c:catAx>
         <c:axId val="2094734554"/>
@@ -869,6 +766,7 @@
         <c:crosses val="autoZero"/>
         <c:auto val="1"/>
         <c:lblAlgn val="ctr"/>
+        <c:lblOffset val="100"/>
         <c:noMultiLvlLbl val="1"/>
       </c:catAx>
       <c:valAx>
@@ -933,6 +831,7 @@
     </c:plotArea>
     <c:plotVisOnly val="1"/>
     <c:dispBlanksAs val="span"/>
+    <c:showDLblsOverMax val="1"/>
   </c:chart>
   <c:spPr>
     <a:noFill/>
@@ -969,234 +868,10 @@
           <a:chExt cx="0" cy="0"/>
         </a:xfrm>
       </p:grpSpPr>
-      <p:sp>
-        <p:nvSpPr>
-          <p:cNvPr id="2" name="Header Placeholder 1"/>
-          <p:cNvSpPr>
-            <a:spLocks noGrp="1"/>
-          </p:cNvSpPr>
-          <p:nvPr>
-            <p:ph type="hdr" sz="quarter"/>
-          </p:nvPr>
-        </p:nvSpPr>
-        <p:spPr>
-          <a:xfrm>
-            <a:off x="0" y="0"/>
-            <a:ext cx="2971800" cy="458788"/>
-          </a:xfrm>
-          <a:prstGeom prst="rect">
-            <a:avLst/>
-          </a:prstGeom>
-        </p:spPr>
-        <p:txBody>
-          <a:bodyPr vert="horz" lIns="91440" tIns="45720" rIns="91440" bIns="45720" rtlCol="0"/>
-          <a:lstStyle>
-            <a:lvl1pPr algn="l">
-              <a:defRPr sz="1200"/>
-            </a:lvl1pPr>
-          </a:lstStyle>
-          <a:p>
-            <a:endParaRPr lang="en-US"/>
-          </a:p>
-        </p:txBody>
-      </p:sp>
-      <p:sp>
-        <p:nvSpPr>
-          <p:cNvPr id="3" name="Date Placeholder 2"/>
-          <p:cNvSpPr>
-            <a:spLocks noGrp="1"/>
-          </p:cNvSpPr>
-          <p:nvPr>
-            <p:ph type="dt" idx="1"/>
-          </p:nvPr>
-        </p:nvSpPr>
-        <p:spPr>
-          <a:xfrm>
-            <a:off x="3884613" y="0"/>
-            <a:ext cx="2971800" cy="458788"/>
-          </a:xfrm>
-          <a:prstGeom prst="rect">
-            <a:avLst/>
-          </a:prstGeom>
-        </p:spPr>
-        <p:txBody>
-          <a:bodyPr vert="horz" lIns="91440" tIns="45720" rIns="91440" bIns="45720" rtlCol="0"/>
-          <a:lstStyle>
-            <a:lvl1pPr algn="r">
-              <a:defRPr sz="1200"/>
-            </a:lvl1pPr>
-          </a:lstStyle>
-          <a:p>
-            <a:fld id="{5282F153-3F37-0F45-9E97-73ACFA13230C}" type="datetimeFigureOut">
-              <a:rPr lang="en-US"/>
-              <a:t>7/23/19</a:t>
-            </a:fld>
-            <a:endParaRPr lang="en-US"/>
-          </a:p>
-        </p:txBody>
-      </p:sp>
-      <p:sp>
-        <p:nvSpPr>
-          <p:cNvPr id="4" name="Slide Image Placeholder 3"/>
-          <p:cNvSpPr>
-            <a:spLocks noGrp="1" noRot="1" noChangeAspect="1"/>
-          </p:cNvSpPr>
-          <p:nvPr>
-            <p:ph type="sldImg" idx="2"/>
-          </p:nvPr>
-        </p:nvSpPr>
-        <p:spPr>
-          <a:xfrm>
-            <a:off x="685800" y="1143000"/>
-            <a:ext cx="5486400" cy="3086100"/>
-          </a:xfrm>
-          <a:prstGeom prst="rect">
-            <a:avLst/>
-          </a:prstGeom>
-          <a:noFill/>
-          <a:ln w="12700">
-            <a:solidFill>
-              <a:prstClr val="black"/>
-            </a:solidFill>
-          </a:ln>
-        </p:spPr>
-        <p:txBody>
-          <a:bodyPr vert="horz" lIns="91440" tIns="45720" rIns="91440" bIns="45720" rtlCol="0" anchor="ctr"/>
-          <a:lstStyle/>
-          <a:p>
-            <a:endParaRPr lang="en-US"/>
-          </a:p>
-        </p:txBody>
-      </p:sp>
-      <p:sp>
-        <p:nvSpPr>
-          <p:cNvPr id="5" name="Notes Placeholder 4"/>
-          <p:cNvSpPr>
-            <a:spLocks noGrp="1"/>
-          </p:cNvSpPr>
-          <p:nvPr>
-            <p:ph type="body" sz="quarter" idx="3"/>
-          </p:nvPr>
-        </p:nvSpPr>
-        <p:spPr>
-          <a:xfrm>
-            <a:off x="685800" y="4400550"/>
-            <a:ext cx="5486400" cy="3600450"/>
-          </a:xfrm>
-          <a:prstGeom prst="rect">
-            <a:avLst/>
-          </a:prstGeom>
-        </p:spPr>
-        <p:txBody>
-          <a:bodyPr vert="horz" lIns="91440" tIns="45720" rIns="91440" bIns="45720" rtlCol="0"/>
-          <a:lstStyle/>
-          <a:p>
-            <a:pPr lvl="0"/>
-            <a:r>
-              <a:rPr lang="en-US"/>
-              <a:t>Click to edit Master text styles</a:t>
-            </a:r>
-          </a:p>
-          <a:p>
-            <a:pPr lvl="1"/>
-            <a:r>
-              <a:rPr lang="en-US"/>
-              <a:t>Second level</a:t>
-            </a:r>
-          </a:p>
-          <a:p>
-            <a:pPr lvl="2"/>
-            <a:r>
-              <a:rPr lang="en-US"/>
-              <a:t>Third level</a:t>
-            </a:r>
-          </a:p>
-          <a:p>
-            <a:pPr lvl="3"/>
-            <a:r>
-              <a:rPr lang="en-US"/>
-              <a:t>Fourth level</a:t>
-            </a:r>
-          </a:p>
-          <a:p>
-            <a:pPr lvl="4"/>
-            <a:r>
-              <a:rPr lang="en-US"/>
-              <a:t>Fifth level</a:t>
-            </a:r>
-          </a:p>
-        </p:txBody>
-      </p:sp>
-      <p:sp>
-        <p:nvSpPr>
-          <p:cNvPr id="6" name="Footer Placeholder 5"/>
-          <p:cNvSpPr>
-            <a:spLocks noGrp="1"/>
-          </p:cNvSpPr>
-          <p:nvPr>
-            <p:ph type="ftr" sz="quarter" idx="4"/>
-          </p:nvPr>
-        </p:nvSpPr>
-        <p:spPr>
-          <a:xfrm>
-            <a:off x="0" y="8685213"/>
-            <a:ext cx="2971800" cy="458787"/>
-          </a:xfrm>
-          <a:prstGeom prst="rect">
-            <a:avLst/>
-          </a:prstGeom>
-        </p:spPr>
-        <p:txBody>
-          <a:bodyPr vert="horz" lIns="91440" tIns="45720" rIns="91440" bIns="45720" rtlCol="0" anchor="b"/>
-          <a:lstStyle>
-            <a:lvl1pPr algn="l">
-              <a:defRPr sz="1200"/>
-            </a:lvl1pPr>
-          </a:lstStyle>
-          <a:p>
-            <a:endParaRPr lang="en-US"/>
-          </a:p>
-        </p:txBody>
-      </p:sp>
-      <p:sp>
-        <p:nvSpPr>
-          <p:cNvPr id="7" name="Slide Number Placeholder 6"/>
-          <p:cNvSpPr>
-            <a:spLocks noGrp="1"/>
-          </p:cNvSpPr>
-          <p:nvPr>
-            <p:ph type="sldNum" sz="quarter" idx="5"/>
-          </p:nvPr>
-        </p:nvSpPr>
-        <p:spPr>
-          <a:xfrm>
-            <a:off x="3884613" y="8685213"/>
-            <a:ext cx="2971800" cy="458787"/>
-          </a:xfrm>
-          <a:prstGeom prst="rect">
-            <a:avLst/>
-          </a:prstGeom>
-        </p:spPr>
-        <p:txBody>
-          <a:bodyPr vert="horz" lIns="91440" tIns="45720" rIns="91440" bIns="45720" rtlCol="0" anchor="b"/>
-          <a:lstStyle>
-            <a:lvl1pPr algn="r">
-              <a:defRPr sz="1200"/>
-            </a:lvl1pPr>
-          </a:lstStyle>
-          <a:p>
-            <a:fld id="{CE5E9CC1-C706-0F49-92D6-E571CC5EEA8F}" type="slidenum">
-              <a:rPr lang="en-US"/>
-              <a:t>‹#›</a:t>
-            </a:fld>
-            <a:endParaRPr lang="en-US"/>
-          </a:p>
-        </p:txBody>
-      </p:sp>
     </p:spTree>
     <p:extLst>
       <p:ext uri="{BB962C8B-B14F-4D97-AF65-F5344CB8AC3E}">
-        <p14:creationId xmlns:p14="http://schemas.microsoft.com/office/powerpoint/2010/main" val="1024086991"/>
+        <p14:creationId xmlns:p14="http://schemas.microsoft.com/office/powerpoint/2010/main" val="2850237628"/>
       </p:ext>
     </p:extLst>
   </p:cSld>
@@ -1340,10 +1015,6 @@
           <a:bodyPr/>
           <a:lstStyle/>
           <a:p>
-            <a:r>
-              <a:rPr lang="en-US" dirty="0"/>
-              <a:t/>
-            </a:r>
             <a:endParaRPr lang="en-US" dirty="0"/>
           </a:p>
         </p:txBody>
@@ -1428,10 +1099,6 @@
           <a:bodyPr/>
           <a:lstStyle/>
           <a:p>
-            <a:r>
-              <a:rPr lang="en-US" dirty="0"/>
-              <a:t/>
-            </a:r>
             <a:endParaRPr lang="en-US" dirty="0"/>
           </a:p>
         </p:txBody>
@@ -1516,10 +1183,6 @@
           <a:bodyPr/>
           <a:lstStyle/>
           <a:p>
-            <a:r>
-              <a:rPr lang="en-US" dirty="0"/>
-              <a:t/>
-            </a:r>
             <a:endParaRPr lang="en-US" dirty="0"/>
           </a:p>
         </p:txBody>
@@ -1604,10 +1267,6 @@
           <a:bodyPr/>
           <a:lstStyle/>
           <a:p>
-            <a:r>
-              <a:rPr lang="en-US" dirty="0"/>
-              <a:t/>
-            </a:r>
             <a:endParaRPr lang="en-US" dirty="0"/>
           </a:p>
         </p:txBody>
@@ -1692,10 +1351,6 @@
           <a:bodyPr/>
           <a:lstStyle/>
           <a:p>
-            <a:r>
-              <a:rPr lang="en-US" dirty="0"/>
-              <a:t/>
-            </a:r>
             <a:endParaRPr lang="en-US" dirty="0"/>
           </a:p>
         </p:txBody>
@@ -1780,10 +1435,6 @@
           <a:bodyPr/>
           <a:lstStyle/>
           <a:p>
-            <a:r>
-              <a:rPr lang="en-US" dirty="0"/>
-              <a:t/>
-            </a:r>
             <a:endParaRPr lang="en-US" dirty="0"/>
           </a:p>
         </p:txBody>
@@ -1868,10 +1519,6 @@
           <a:bodyPr/>
           <a:lstStyle/>
           <a:p>
-            <a:r>
-              <a:rPr lang="en-US" dirty="0"/>
-              <a:t/>
-            </a:r>
             <a:endParaRPr lang="en-US" dirty="0"/>
           </a:p>
         </p:txBody>
@@ -1956,10 +1603,6 @@
           <a:bodyPr/>
           <a:lstStyle/>
           <a:p>
-            <a:r>
-              <a:rPr lang="en-US" dirty="0"/>
-              <a:t/>
-            </a:r>
             <a:endParaRPr lang="en-US" dirty="0"/>
           </a:p>
         </p:txBody>
@@ -2044,10 +1687,6 @@
           <a:bodyPr/>
           <a:lstStyle/>
           <a:p>
-            <a:r>
-              <a:rPr lang="en-US" dirty="0"/>
-              <a:t/>
-            </a:r>
             <a:endParaRPr lang="en-US" dirty="0"/>
           </a:p>
         </p:txBody>
@@ -2132,10 +1771,6 @@
           <a:bodyPr/>
           <a:lstStyle/>
           <a:p>
-            <a:r>
-              <a:rPr lang="en-US" dirty="0"/>
-              <a:t/>
-            </a:r>
             <a:endParaRPr lang="en-US" dirty="0"/>
           </a:p>
         </p:txBody>
@@ -2214,6 +1849,7 @@
         <a:solidFill>
           <a:srgbClr val="F7FAF8"/>
         </a:solidFill>
+        <a:effectLst/>
       </p:bgPr>
     </p:bg>
     <p:spTree>
@@ -2274,7 +1910,7 @@
           <a:bodyPr wrap="square" lIns="0" tIns="0" rIns="0" bIns="0" rtlCol="0" anchor="ctr"/>
           <a:lstStyle/>
           <a:p>
-            <a:pPr indent="0" marL="0">
+            <a:pPr marL="0" indent="0">
               <a:buNone/>
             </a:pPr>
             <a:r>
@@ -2313,7 +1949,7 @@
           <a:bodyPr wrap="square" lIns="0" tIns="0" rIns="0" bIns="0" rtlCol="0" anchor="ctr"/>
           <a:lstStyle/>
           <a:p>
-            <a:pPr algn="r" indent="0" marL="0">
+            <a:pPr marL="0" indent="0" algn="r">
               <a:buNone/>
             </a:pPr>
             <a:r>
@@ -2351,7 +1987,7 @@
           </a:prstGeom>
           <a:extLst>
             <a:ext uri="{C572A759-6A51-4108-AA02-DFA0A04FC94B}">
-              <ma14:wrappingTextBoxFlag xmlns:ma14="http://schemas.microsoft.com/office/mac/drawingml/2011/main" val="0"/>
+              <ma14:wrappingTextBoxFlag xmlns:ma14="http://schemas.microsoft.com/office/mac/drawingml/2011/main" xmlns="" val="0"/>
             </a:ext>
           </a:extLst>
         </p:spPr>
@@ -2372,8 +2008,8 @@
           <a:p>
             <a:pPr algn="l"/>
             <a:fld id="{F7021451-1387-4CA6-816F-3879F97B5CBC}" type="slidenum">
-              <a:rPr b="0" lang="en-US"/>
-              <a:t>1002</a:t>
+              <a:rPr lang="en-US" b="0"/>
+              <a:t>‹#›</a:t>
             </a:fld>
             <a:endParaRPr lang="en-US"/>
           </a:p>
@@ -2390,6 +2026,11 @@
 <file path=ppt/slideMasters/slideMaster1.xml><?xml version="1.0" encoding="utf-8"?>
 <p:sldMaster xmlns:a="http://schemas.openxmlformats.org/drawingml/2006/main" xmlns:r="http://schemas.openxmlformats.org/officeDocument/2006/relationships" xmlns:p="http://schemas.openxmlformats.org/presentationml/2006/main">
   <p:cSld>
+    <p:bg>
+      <p:bgRef idx="1001">
+        <a:schemeClr val="bg1"/>
+      </p:bgRef>
+    </p:bg>
     <p:spTree>
       <p:nvGrpSpPr>
         <p:cNvPr id="1" name=""/>
@@ -2424,7 +2065,7 @@
           </a:prstGeom>
           <a:extLst>
             <a:ext uri="{C572A759-6A51-4108-AA02-DFA0A04FC94B}">
-              <ma14:wrappingTextBoxFlag xmlns:ma14="http://schemas.microsoft.com/office/mac/drawingml/2011/main" val="0"/>
+              <ma14:wrappingTextBoxFlag xmlns:ma14="http://schemas.microsoft.com/office/mac/drawingml/2011/main" xmlns="" val="0"/>
             </a:ext>
           </a:extLst>
         </p:spPr>
@@ -2445,8 +2086,8 @@
           <a:p>
             <a:pPr algn="l"/>
             <a:fld id="{F7021451-1387-4CA6-816F-3879F97B5CBC}" type="slidenum">
-              <a:rPr b="0" lang="en-US"/>
-              <a:t>null</a:t>
+              <a:rPr lang="en-US" b="0"/>
+              <a:t>‹#›</a:t>
             </a:fld>
             <a:endParaRPr lang="en-US"/>
           </a:p>
@@ -2721,6 +2362,7 @@
         <a:solidFill>
           <a:srgbClr val="0E2B24"/>
         </a:solidFill>
+        <a:effectLst/>
       </p:bgPr>
     </p:bg>
     <p:spTree>
@@ -2745,7 +2387,7 @@
         </p:nvSpPr>
         <p:spPr>
           <a:xfrm>
-            <a:off x="731520" y="1005840"/>
+            <a:off x="731520" y="1426465"/>
             <a:ext cx="7223760" cy="868680"/>
           </a:xfrm>
           <a:prstGeom prst="rect">
@@ -2756,11 +2398,11 @@
         </p:spPr>
         <p:txBody>
           <a:bodyPr wrap="square" lIns="0" tIns="0" rIns="0" bIns="0" rtlCol="0" anchor="ctr">
-            <a:normAutofit/>
+            <a:normAutofit fontScale="92500"/>
           </a:bodyPr>
           <a:lstStyle/>
           <a:p>
-            <a:pPr indent="0" marL="0">
+            <a:pPr marL="0" indent="0">
               <a:buNone/>
             </a:pPr>
             <a:r>
@@ -2775,47 +2417,6 @@
               <a:t>Analisis Kualitas Udara ISPU DKI Jakarta</a:t>
             </a:r>
             <a:endParaRPr lang="en-US" sz="3400" dirty="0"/>
-          </a:p>
-        </p:txBody>
-      </p:sp>
-      <p:sp>
-        <p:nvSpPr>
-          <p:cNvPr id="3" name="Text 1"/>
-          <p:cNvSpPr/>
-          <p:nvPr/>
-        </p:nvSpPr>
-        <p:spPr>
-          <a:xfrm>
-            <a:off x="749808" y="2011680"/>
-            <a:ext cx="6858000" cy="292608"/>
-          </a:xfrm>
-          <a:prstGeom prst="rect">
-            <a:avLst/>
-          </a:prstGeom>
-          <a:noFill/>
-          <a:ln/>
-        </p:spPr>
-        <p:txBody>
-          <a:bodyPr wrap="square" lIns="0" tIns="0" rIns="0" bIns="0" rtlCol="0" anchor="ctr">
-            <a:normAutofit/>
-          </a:bodyPr>
-          <a:lstStyle/>
-          <a:p>
-            <a:pPr indent="0" marL="0">
-              <a:buNone/>
-            </a:pPr>
-            <a:r>
-              <a:rPr lang="en-US" sz="1450" dirty="0">
-                <a:solidFill>
-                  <a:srgbClr val="DFF2EA"/>
-                </a:solidFill>
-                <a:latin typeface="Aptos" pitchFamily="34" charset="0"/>
-                <a:ea typeface="Aptos" pitchFamily="34" charset="-122"/>
-                <a:cs typeface="Aptos" pitchFamily="34" charset="-120"/>
-              </a:rPr>
-              <a:t>Paparan Dashboard Business Intelligence berbasis data bersih 2010–2023</a:t>
-            </a:r>
-            <a:endParaRPr lang="en-US" sz="1450" dirty="0"/>
           </a:p>
         </p:txBody>
       </p:sp>
@@ -2865,7 +2466,7 @@
           </a:bodyPr>
           <a:lstStyle/>
           <a:p>
-            <a:pPr indent="0" marL="0">
+            <a:pPr marL="0" indent="0">
               <a:buNone/>
             </a:pPr>
             <a:r>
@@ -2909,7 +2510,7 @@
             <a:prstDash val="solid"/>
           </a:ln>
           <a:effectLst>
-            <a:outerShdw sx="100000" sy="100000" kx="0" ky="0" algn="bl" rotWithShape="0" blurRad="12700" dist="12700" dir="2700000">
+            <a:outerShdw blurRad="12700" dist="12700" dir="2700000" algn="bl" rotWithShape="0">
               <a:srgbClr val="86958E">
                 <a:alpha val="10000"/>
               </a:srgbClr>
@@ -2938,11 +2539,11 @@
           <a:bodyPr wrap="square" lIns="0" tIns="0" rIns="0" bIns="0" rtlCol="0" anchor="ctr"/>
           <a:lstStyle/>
           <a:p>
-            <a:pPr algn="ctr" indent="0" marL="0">
-              <a:buNone/>
-            </a:pPr>
-            <a:r>
-              <a:rPr lang="en-US" sz="800" b="1" dirty="0">
+            <a:pPr marL="0" indent="0" algn="ctr">
+              <a:buNone/>
+            </a:pPr>
+            <a:r>
+              <a:rPr lang="en-US" sz="1200" b="1" dirty="0">
                 <a:solidFill>
                   <a:srgbClr val="197A5D"/>
                 </a:solidFill>
@@ -2952,7 +2553,7 @@
               </a:rPr>
               <a:t>DATA BERSIH</a:t>
             </a:r>
-            <a:endParaRPr lang="en-US" sz="800" dirty="0"/>
+            <a:endParaRPr lang="en-US" sz="1200" dirty="0"/>
           </a:p>
         </p:txBody>
       </p:sp>
@@ -2977,7 +2578,7 @@
           <a:bodyPr wrap="square" lIns="0" tIns="0" rIns="0" bIns="0" rtlCol="0" anchor="ctr"/>
           <a:lstStyle/>
           <a:p>
-            <a:pPr algn="ctr" indent="0" marL="0">
+            <a:pPr marL="0" indent="0" algn="ctr">
               <a:buNone/>
             </a:pPr>
             <a:r>
@@ -3016,7 +2617,7 @@
           <a:bodyPr wrap="square" lIns="0" tIns="0" rIns="0" bIns="0" rtlCol="0" anchor="ctr"/>
           <a:lstStyle/>
           <a:p>
-            <a:pPr algn="ctr" indent="0" marL="0">
+            <a:pPr marL="0" indent="0" algn="ctr">
               <a:buNone/>
             </a:pPr>
             <a:r>
@@ -3078,7 +2679,7 @@
           <a:bodyPr wrap="square" lIns="0" tIns="0" rIns="0" bIns="0" rtlCol="0" anchor="ctr"/>
           <a:lstStyle/>
           <a:p>
-            <a:pPr algn="ctr" indent="0" marL="0">
+            <a:pPr marL="0" indent="0" algn="ctr">
               <a:buNone/>
             </a:pPr>
             <a:r>
@@ -3119,11 +2720,11 @@
           </a:bodyPr>
           <a:lstStyle/>
           <a:p>
-            <a:pPr algn="ctr" indent="0" marL="0">
-              <a:buNone/>
-            </a:pPr>
-            <a:r>
-              <a:rPr lang="en-US" sz="850" dirty="0">
+            <a:pPr marL="0" indent="0" algn="ctr">
+              <a:buNone/>
+            </a:pPr>
+            <a:r>
+              <a:rPr lang="en-US" sz="1100" dirty="0">
                 <a:solidFill>
                   <a:srgbClr val="58706A"/>
                 </a:solidFill>
@@ -3133,7 +2734,7 @@
               </a:rPr>
               <a:t>01 Jan 2010 – 30 Nov 2023</a:t>
             </a:r>
-            <a:endParaRPr lang="en-US" sz="850" dirty="0"/>
+            <a:endParaRPr lang="en-US" sz="1100" dirty="0"/>
           </a:p>
         </p:txBody>
       </p:sp>
@@ -3158,11 +2759,11 @@
           <a:bodyPr wrap="square" lIns="0" tIns="0" rIns="0" bIns="0" rtlCol="0" anchor="ctr"/>
           <a:lstStyle/>
           <a:p>
-            <a:pPr indent="0" marL="0">
-              <a:buNone/>
-            </a:pPr>
-            <a:r>
-              <a:rPr lang="en-US" sz="1100" b="1" dirty="0">
+            <a:pPr marL="0" indent="0">
+              <a:buNone/>
+            </a:pPr>
+            <a:r>
+              <a:rPr lang="en-US" sz="1400" b="1" dirty="0">
                 <a:solidFill>
                   <a:srgbClr val="E8F4EF"/>
                 </a:solidFill>
@@ -3170,9 +2771,53 @@
                 <a:ea typeface="Aptos" pitchFamily="34" charset="-122"/>
                 <a:cs typeface="Aptos" pitchFamily="34" charset="-120"/>
               </a:rPr>
-              <a:t>Nama Asesi: Raihan Ferdyanza</a:t>
-            </a:r>
-            <a:endParaRPr lang="en-US" sz="1100" dirty="0"/>
+              <a:t>Nama Asesi: </a:t>
+            </a:r>
+            <a:r>
+              <a:rPr lang="en-US" sz="1400" b="1" dirty="0" err="1">
+                <a:solidFill>
+                  <a:srgbClr val="E8F4EF"/>
+                </a:solidFill>
+                <a:latin typeface="Aptos" pitchFamily="34" charset="0"/>
+                <a:ea typeface="Aptos" pitchFamily="34" charset="-122"/>
+                <a:cs typeface="Aptos" pitchFamily="34" charset="-120"/>
+              </a:rPr>
+              <a:t>Fahryandi</a:t>
+            </a:r>
+            <a:r>
+              <a:rPr lang="en-US" sz="1400" b="1" dirty="0">
+                <a:solidFill>
+                  <a:srgbClr val="E8F4EF"/>
+                </a:solidFill>
+                <a:latin typeface="Aptos" pitchFamily="34" charset="0"/>
+                <a:ea typeface="Aptos" pitchFamily="34" charset="-122"/>
+                <a:cs typeface="Aptos" pitchFamily="34" charset="-120"/>
+              </a:rPr>
+              <a:t> </a:t>
+            </a:r>
+            <a:r>
+              <a:rPr lang="en-US" sz="1400" b="1" dirty="0" err="1">
+                <a:solidFill>
+                  <a:srgbClr val="E8F4EF"/>
+                </a:solidFill>
+                <a:latin typeface="Aptos" pitchFamily="34" charset="0"/>
+                <a:ea typeface="Aptos" pitchFamily="34" charset="-122"/>
+                <a:cs typeface="Aptos" pitchFamily="34" charset="-120"/>
+              </a:rPr>
+              <a:t>Herlasmara</a:t>
+            </a:r>
+            <a:r>
+              <a:rPr lang="en-US" sz="1400" b="1" dirty="0">
+                <a:solidFill>
+                  <a:srgbClr val="E8F4EF"/>
+                </a:solidFill>
+                <a:latin typeface="Aptos" pitchFamily="34" charset="0"/>
+                <a:ea typeface="Aptos" pitchFamily="34" charset="-122"/>
+                <a:cs typeface="Aptos" pitchFamily="34" charset="-120"/>
+              </a:rPr>
+              <a:t> Putra</a:t>
+            </a:r>
+            <a:endParaRPr lang="en-US" sz="1400" dirty="0"/>
           </a:p>
         </p:txBody>
       </p:sp>
@@ -3197,7 +2842,7 @@
           <a:bodyPr wrap="square" lIns="0" tIns="0" rIns="0" bIns="0" rtlCol="0" anchor="ctr"/>
           <a:lstStyle/>
           <a:p>
-            <a:pPr indent="0" marL="0">
+            <a:pPr marL="0" indent="0">
               <a:buNone/>
             </a:pPr>
             <a:r>
@@ -3209,7 +2854,7 @@
                 <a:ea typeface="Aptos" pitchFamily="34" charset="-122"/>
                 <a:cs typeface="Aptos" pitchFamily="34" charset="-120"/>
               </a:rPr>
-              <a:t>Tanggal Presentasi: 11 Juni 2026</a:t>
+              <a:t>Tanggal Presentasi: 12 Juni 2026</a:t>
             </a:r>
             <a:endParaRPr lang="en-US" sz="1100" dirty="0"/>
           </a:p>
@@ -3236,7 +2881,7 @@
           <a:bodyPr wrap="square" lIns="0" tIns="0" rIns="0" bIns="0" rtlCol="0" anchor="ctr"/>
           <a:lstStyle/>
           <a:p>
-            <a:pPr indent="0" marL="0">
+            <a:pPr marL="0" indent="0">
               <a:buNone/>
             </a:pPr>
             <a:r>
@@ -3248,7 +2893,73 @@
                 <a:ea typeface="Aptos" pitchFamily="34" charset="-122"/>
                 <a:cs typeface="Aptos" pitchFamily="34" charset="-120"/>
               </a:rPr>
-              <a:t>Pusdatin KLH/BPLH</a:t>
+              <a:t>Kementerian </a:t>
+            </a:r>
+            <a:r>
+              <a:rPr lang="en-US" sz="850" dirty="0" err="1">
+                <a:solidFill>
+                  <a:srgbClr val="B9D3C9"/>
+                </a:solidFill>
+                <a:latin typeface="Aptos" pitchFamily="34" charset="0"/>
+                <a:ea typeface="Aptos" pitchFamily="34" charset="-122"/>
+                <a:cs typeface="Aptos" pitchFamily="34" charset="-120"/>
+              </a:rPr>
+              <a:t>Lingkungan</a:t>
+            </a:r>
+            <a:r>
+              <a:rPr lang="en-US" sz="850" dirty="0">
+                <a:solidFill>
+                  <a:srgbClr val="B9D3C9"/>
+                </a:solidFill>
+                <a:latin typeface="Aptos" pitchFamily="34" charset="0"/>
+                <a:ea typeface="Aptos" pitchFamily="34" charset="-122"/>
+                <a:cs typeface="Aptos" pitchFamily="34" charset="-120"/>
+              </a:rPr>
+              <a:t> Hidup/Badan </a:t>
+            </a:r>
+            <a:r>
+              <a:rPr lang="en-US" sz="850" dirty="0" err="1">
+                <a:solidFill>
+                  <a:srgbClr val="B9D3C9"/>
+                </a:solidFill>
+                <a:latin typeface="Aptos" pitchFamily="34" charset="0"/>
+                <a:ea typeface="Aptos" pitchFamily="34" charset="-122"/>
+                <a:cs typeface="Aptos" pitchFamily="34" charset="-120"/>
+              </a:rPr>
+              <a:t>Pengendalian</a:t>
+            </a:r>
+            <a:r>
+              <a:rPr lang="en-US" sz="850" dirty="0">
+                <a:solidFill>
+                  <a:srgbClr val="B9D3C9"/>
+                </a:solidFill>
+                <a:latin typeface="Aptos" pitchFamily="34" charset="0"/>
+                <a:ea typeface="Aptos" pitchFamily="34" charset="-122"/>
+                <a:cs typeface="Aptos" pitchFamily="34" charset="-120"/>
+              </a:rPr>
+              <a:t> </a:t>
+            </a:r>
+            <a:r>
+              <a:rPr lang="en-US" sz="850" dirty="0" err="1">
+                <a:solidFill>
+                  <a:srgbClr val="B9D3C9"/>
+                </a:solidFill>
+                <a:latin typeface="Aptos" pitchFamily="34" charset="0"/>
+                <a:ea typeface="Aptos" pitchFamily="34" charset="-122"/>
+                <a:cs typeface="Aptos" pitchFamily="34" charset="-120"/>
+              </a:rPr>
+              <a:t>Lingkungan</a:t>
+            </a:r>
+            <a:r>
+              <a:rPr lang="en-US" sz="850" dirty="0">
+                <a:solidFill>
+                  <a:srgbClr val="B9D3C9"/>
+                </a:solidFill>
+                <a:latin typeface="Aptos" pitchFamily="34" charset="0"/>
+                <a:ea typeface="Aptos" pitchFamily="34" charset="-122"/>
+                <a:cs typeface="Aptos" pitchFamily="34" charset="-120"/>
+              </a:rPr>
+              <a:t> Hidup</a:t>
             </a:r>
             <a:endParaRPr lang="en-US" sz="850" dirty="0"/>
           </a:p>
@@ -3270,6 +2981,7 @@
         <a:solidFill>
           <a:srgbClr val="F7FAF8"/>
         </a:solidFill>
+        <a:effectLst/>
       </p:bgPr>
     </p:bg>
     <p:spTree>
@@ -3307,7 +3019,7 @@
           <a:bodyPr wrap="square" lIns="0" tIns="0" rIns="0" bIns="0" rtlCol="0" anchor="ctr"/>
           <a:lstStyle/>
           <a:p>
-            <a:pPr indent="0" marL="0">
+            <a:pPr marL="0" indent="0">
               <a:buNone/>
             </a:pPr>
             <a:r>
@@ -3348,7 +3060,7 @@
           </a:bodyPr>
           <a:lstStyle/>
           <a:p>
-            <a:pPr indent="0" marL="0">
+            <a:pPr marL="0" indent="0">
               <a:buNone/>
             </a:pPr>
             <a:r>
@@ -3408,15 +3120,15 @@
         </p:spPr>
         <p:txBody>
           <a:bodyPr wrap="square" lIns="0" tIns="0" rIns="0" bIns="0" rtlCol="0" anchor="ctr">
-            <a:normAutofit/>
+            <a:noAutofit/>
           </a:bodyPr>
           <a:lstStyle/>
           <a:p>
-            <a:pPr indent="0" marL="0">
-              <a:buNone/>
-            </a:pPr>
-            <a:r>
-              <a:rPr lang="en-US" sz="720" b="1" dirty="0">
+            <a:pPr marL="0" indent="0">
+              <a:buNone/>
+            </a:pPr>
+            <a:r>
+              <a:rPr lang="en-US" sz="1400" b="1" dirty="0">
                 <a:solidFill>
                   <a:srgbClr val="197A5D"/>
                 </a:solidFill>
@@ -3426,7 +3138,7 @@
               </a:rPr>
               <a:t>INSIGHT UTAMA BERBASIS DATA</a:t>
             </a:r>
-            <a:endParaRPr lang="en-US" sz="720" dirty="0"/>
+            <a:endParaRPr lang="en-US" sz="1400" dirty="0"/>
           </a:p>
         </p:txBody>
       </p:sp>
@@ -3456,7 +3168,7 @@
             <a:prstDash val="solid"/>
           </a:ln>
           <a:effectLst>
-            <a:outerShdw sx="100000" sy="100000" kx="0" ky="0" algn="bl" rotWithShape="0" blurRad="12700" dist="12700" dir="2700000">
+            <a:outerShdw blurRad="12700" dist="12700" dir="2700000" algn="bl" rotWithShape="0">
               <a:srgbClr val="86958E">
                 <a:alpha val="10000"/>
               </a:srgbClr>
@@ -3487,11 +3199,11 @@
           </a:bodyPr>
           <a:lstStyle/>
           <a:p>
-            <a:pPr indent="0" marL="0">
-              <a:buNone/>
-            </a:pPr>
-            <a:r>
-              <a:rPr lang="en-US" sz="2100" b="1" dirty="0">
+            <a:pPr marL="0" indent="0">
+              <a:buNone/>
+            </a:pPr>
+            <a:r>
+              <a:rPr lang="en-US" sz="2400" b="1" dirty="0">
                 <a:solidFill>
                   <a:srgbClr val="C34632"/>
                 </a:solidFill>
@@ -3501,7 +3213,7 @@
               </a:rPr>
               <a:t>17.6%</a:t>
             </a:r>
-            <a:endParaRPr lang="en-US" sz="2100" dirty="0"/>
+            <a:endParaRPr lang="en-US" sz="2400" dirty="0"/>
           </a:p>
         </p:txBody>
       </p:sp>
@@ -3528,11 +3240,11 @@
           </a:bodyPr>
           <a:lstStyle/>
           <a:p>
-            <a:pPr indent="0" marL="0">
-              <a:buNone/>
-            </a:pPr>
-            <a:r>
-              <a:rPr lang="en-US" sz="870" b="1" dirty="0">
+            <a:pPr marL="0" indent="0">
+              <a:buNone/>
+            </a:pPr>
+            <a:r>
+              <a:rPr lang="en-US" sz="1000" b="1" dirty="0">
                 <a:solidFill>
                   <a:srgbClr val="14342C"/>
                 </a:solidFill>
@@ -3542,7 +3254,7 @@
               </a:rPr>
               <a:t>hari tidak sehat</a:t>
             </a:r>
-            <a:endParaRPr lang="en-US" sz="870" dirty="0"/>
+            <a:endParaRPr lang="en-US" sz="1000" dirty="0"/>
           </a:p>
         </p:txBody>
       </p:sp>
@@ -3565,15 +3277,15 @@
         </p:spPr>
         <p:txBody>
           <a:bodyPr wrap="square" lIns="0" tIns="0" rIns="0" bIns="0" rtlCol="0" anchor="ctr">
-            <a:normAutofit/>
+            <a:noAutofit/>
           </a:bodyPr>
           <a:lstStyle/>
           <a:p>
-            <a:pPr indent="0" marL="0">
-              <a:buNone/>
-            </a:pPr>
-            <a:r>
-              <a:rPr lang="en-US" sz="680" dirty="0">
+            <a:pPr marL="0" indent="0">
+              <a:buNone/>
+            </a:pPr>
+            <a:r>
+              <a:rPr lang="en-US" sz="800" dirty="0">
                 <a:solidFill>
                   <a:srgbClr val="58706A"/>
                 </a:solidFill>
@@ -3583,7 +3295,7 @@
               </a:rPr>
               <a:t>Kategori TIDAK SEHAT atau lebih buruk masih signifikan.</a:t>
             </a:r>
-            <a:endParaRPr lang="en-US" sz="680" dirty="0"/>
+            <a:endParaRPr lang="en-US" sz="800" dirty="0"/>
           </a:p>
         </p:txBody>
       </p:sp>
@@ -3613,7 +3325,7 @@
             <a:prstDash val="solid"/>
           </a:ln>
           <a:effectLst>
-            <a:outerShdw sx="100000" sy="100000" kx="0" ky="0" algn="bl" rotWithShape="0" blurRad="12700" dist="12700" dir="2700000">
+            <a:outerShdw blurRad="12700" dist="12700" dir="2700000" algn="bl" rotWithShape="0">
               <a:srgbClr val="86958E">
                 <a:alpha val="10000"/>
               </a:srgbClr>
@@ -3644,11 +3356,11 @@
           </a:bodyPr>
           <a:lstStyle/>
           <a:p>
-            <a:pPr indent="0" marL="0">
-              <a:buNone/>
-            </a:pPr>
-            <a:r>
-              <a:rPr lang="en-US" sz="2100" b="1" dirty="0">
+            <a:pPr marL="0" indent="0">
+              <a:buNone/>
+            </a:pPr>
+            <a:r>
+              <a:rPr lang="en-US" sz="2400" b="1" dirty="0">
                 <a:solidFill>
                   <a:srgbClr val="197A5D"/>
                 </a:solidFill>
@@ -3658,7 +3370,7 @@
               </a:rPr>
               <a:t>88.2</a:t>
             </a:r>
-            <a:endParaRPr lang="en-US" sz="2100" dirty="0"/>
+            <a:endParaRPr lang="en-US" sz="2400" dirty="0"/>
           </a:p>
         </p:txBody>
       </p:sp>
@@ -3681,15 +3393,15 @@
         </p:spPr>
         <p:txBody>
           <a:bodyPr wrap="square" lIns="0" tIns="0" rIns="0" bIns="0" rtlCol="0" anchor="ctr">
-            <a:normAutofit/>
+            <a:noAutofit/>
           </a:bodyPr>
           <a:lstStyle/>
           <a:p>
-            <a:pPr indent="0" marL="0">
-              <a:buNone/>
-            </a:pPr>
-            <a:r>
-              <a:rPr lang="en-US" sz="870" b="1" dirty="0">
+            <a:pPr marL="0" indent="0">
+              <a:buNone/>
+            </a:pPr>
+            <a:r>
+              <a:rPr lang="en-US" sz="1000" b="1" dirty="0">
                 <a:solidFill>
                   <a:srgbClr val="14342C"/>
                 </a:solidFill>
@@ -3699,7 +3411,7 @@
               </a:rPr>
               <a:t>ISPU rata-rata tertinggi</a:t>
             </a:r>
-            <a:endParaRPr lang="en-US" sz="870" dirty="0"/>
+            <a:endParaRPr lang="en-US" sz="1000" dirty="0"/>
           </a:p>
         </p:txBody>
       </p:sp>
@@ -3711,7 +3423,7 @@
         </p:nvSpPr>
         <p:spPr>
           <a:xfrm>
-            <a:off x="2770632" y="2414016"/>
+            <a:off x="2770632" y="2449528"/>
             <a:ext cx="1307592" cy="164592"/>
           </a:xfrm>
           <a:prstGeom prst="rect">
@@ -3722,15 +3434,15 @@
         </p:spPr>
         <p:txBody>
           <a:bodyPr wrap="square" lIns="0" tIns="0" rIns="0" bIns="0" rtlCol="0" anchor="ctr">
-            <a:normAutofit/>
+            <a:noAutofit/>
           </a:bodyPr>
           <a:lstStyle/>
           <a:p>
-            <a:pPr indent="0" marL="0">
-              <a:buNone/>
-            </a:pPr>
-            <a:r>
-              <a:rPr lang="en-US" sz="680" dirty="0">
+            <a:pPr marL="0" indent="0">
+              <a:buNone/>
+            </a:pPr>
+            <a:r>
+              <a:rPr lang="en-US" sz="800" dirty="0">
                 <a:solidFill>
                   <a:srgbClr val="58706A"/>
                 </a:solidFill>
@@ -3740,7 +3452,7 @@
               </a:rPr>
               <a:t>DKI2 Kelapa Gading menjadi prioritas lokasi.</a:t>
             </a:r>
-            <a:endParaRPr lang="en-US" sz="680" dirty="0"/>
+            <a:endParaRPr lang="en-US" sz="800" dirty="0"/>
           </a:p>
         </p:txBody>
       </p:sp>
@@ -3770,7 +3482,7 @@
             <a:prstDash val="solid"/>
           </a:ln>
           <a:effectLst>
-            <a:outerShdw sx="100000" sy="100000" kx="0" ky="0" algn="bl" rotWithShape="0" blurRad="12700" dist="12700" dir="2700000">
+            <a:outerShdw blurRad="12700" dist="12700" dir="2700000" algn="bl" rotWithShape="0">
               <a:srgbClr val="86958E">
                 <a:alpha val="10000"/>
               </a:srgbClr>
@@ -3801,11 +3513,11 @@
           </a:bodyPr>
           <a:lstStyle/>
           <a:p>
-            <a:pPr indent="0" marL="0">
-              <a:buNone/>
-            </a:pPr>
-            <a:r>
-              <a:rPr lang="en-US" sz="2100" b="1" dirty="0">
+            <a:pPr marL="0" indent="0">
+              <a:buNone/>
+            </a:pPr>
+            <a:r>
+              <a:rPr lang="en-US" sz="2400" b="1" dirty="0">
                 <a:solidFill>
                   <a:srgbClr val="D68A00"/>
                 </a:solidFill>
@@ -3815,7 +3527,7 @@
               </a:rPr>
               <a:t>89.7</a:t>
             </a:r>
-            <a:endParaRPr lang="en-US" sz="2100" dirty="0"/>
+            <a:endParaRPr lang="en-US" sz="2400" dirty="0"/>
           </a:p>
         </p:txBody>
       </p:sp>
@@ -3842,11 +3554,11 @@
           </a:bodyPr>
           <a:lstStyle/>
           <a:p>
-            <a:pPr indent="0" marL="0">
-              <a:buNone/>
-            </a:pPr>
-            <a:r>
-              <a:rPr lang="en-US" sz="870" b="1" dirty="0">
+            <a:pPr marL="0" indent="0">
+              <a:buNone/>
+            </a:pPr>
+            <a:r>
+              <a:rPr lang="en-US" sz="1000" b="1" dirty="0">
                 <a:solidFill>
                   <a:srgbClr val="14342C"/>
                 </a:solidFill>
@@ -3856,7 +3568,7 @@
               </a:rPr>
               <a:t>puncak musiman</a:t>
             </a:r>
-            <a:endParaRPr lang="en-US" sz="870" dirty="0"/>
+            <a:endParaRPr lang="en-US" sz="1000" dirty="0"/>
           </a:p>
         </p:txBody>
       </p:sp>
@@ -3879,15 +3591,15 @@
         </p:spPr>
         <p:txBody>
           <a:bodyPr wrap="square" lIns="0" tIns="0" rIns="0" bIns="0" rtlCol="0" anchor="ctr">
-            <a:normAutofit/>
+            <a:noAutofit/>
           </a:bodyPr>
           <a:lstStyle/>
           <a:p>
-            <a:pPr indent="0" marL="0">
-              <a:buNone/>
-            </a:pPr>
-            <a:r>
-              <a:rPr lang="en-US" sz="680" dirty="0">
+            <a:pPr marL="0" indent="0">
+              <a:buNone/>
+            </a:pPr>
+            <a:r>
+              <a:rPr lang="en-US" sz="800" dirty="0">
                 <a:solidFill>
                   <a:srgbClr val="58706A"/>
                 </a:solidFill>
@@ -3895,9 +3607,53 @@
                 <a:ea typeface="Aptos" pitchFamily="34" charset="-122"/>
                 <a:cs typeface="Aptos" pitchFamily="34" charset="-120"/>
               </a:rPr>
-              <a:t>Bulan Okt dengan ${summary.peak_month_unhealthy_pct}% hari tidak sehat.</a:t>
-            </a:r>
-            <a:endParaRPr lang="en-US" sz="680" dirty="0"/>
+              <a:t>Bulan Oktober </a:t>
+            </a:r>
+            <a:r>
+              <a:rPr lang="en-US" sz="800" dirty="0" err="1">
+                <a:solidFill>
+                  <a:srgbClr val="58706A"/>
+                </a:solidFill>
+                <a:latin typeface="Aptos" pitchFamily="34" charset="0"/>
+                <a:ea typeface="Aptos" pitchFamily="34" charset="-122"/>
+                <a:cs typeface="Aptos" pitchFamily="34" charset="-120"/>
+              </a:rPr>
+              <a:t>dengan</a:t>
+            </a:r>
+            <a:r>
+              <a:rPr lang="en-US" sz="800" dirty="0">
+                <a:solidFill>
+                  <a:srgbClr val="58706A"/>
+                </a:solidFill>
+                <a:latin typeface="Aptos" pitchFamily="34" charset="0"/>
+                <a:ea typeface="Aptos" pitchFamily="34" charset="-122"/>
+                <a:cs typeface="Aptos" pitchFamily="34" charset="-120"/>
+              </a:rPr>
+              <a:t> rata-rata ISPU </a:t>
+            </a:r>
+            <a:r>
+              <a:rPr lang="en-US" sz="800" dirty="0" err="1">
+                <a:solidFill>
+                  <a:srgbClr val="58706A"/>
+                </a:solidFill>
+                <a:latin typeface="Aptos" pitchFamily="34" charset="0"/>
+                <a:ea typeface="Aptos" pitchFamily="34" charset="-122"/>
+                <a:cs typeface="Aptos" pitchFamily="34" charset="-120"/>
+              </a:rPr>
+              <a:t>bulanan</a:t>
+            </a:r>
+            <a:r>
+              <a:rPr lang="en-US" sz="800" dirty="0">
+                <a:solidFill>
+                  <a:srgbClr val="58706A"/>
+                </a:solidFill>
+                <a:latin typeface="Aptos" pitchFamily="34" charset="0"/>
+                <a:ea typeface="Aptos" pitchFamily="34" charset="-122"/>
+                <a:cs typeface="Aptos" pitchFamily="34" charset="-120"/>
+              </a:rPr>
+              <a:t> 89.7</a:t>
+            </a:r>
+            <a:endParaRPr lang="en-US" sz="800" dirty="0"/>
           </a:p>
         </p:txBody>
       </p:sp>
@@ -3927,7 +3683,7 @@
             <a:prstDash val="solid"/>
           </a:ln>
           <a:effectLst>
-            <a:outerShdw sx="100000" sy="100000" kx="0" ky="0" algn="bl" rotWithShape="0" blurRad="12700" dist="12700" dir="2700000">
+            <a:outerShdw blurRad="12700" dist="12700" dir="2700000" algn="bl" rotWithShape="0">
               <a:srgbClr val="86958E">
                 <a:alpha val="10000"/>
               </a:srgbClr>
@@ -3958,11 +3714,11 @@
           </a:bodyPr>
           <a:lstStyle/>
           <a:p>
-            <a:pPr indent="0" marL="0">
-              <a:buNone/>
-            </a:pPr>
-            <a:r>
-              <a:rPr lang="en-US" sz="2100" b="1" dirty="0">
+            <a:pPr marL="0" indent="0">
+              <a:buNone/>
+            </a:pPr>
+            <a:r>
+              <a:rPr lang="en-US" sz="2400" b="1" dirty="0">
                 <a:solidFill>
                   <a:srgbClr val="2B6CB0"/>
                 </a:solidFill>
@@ -3972,7 +3728,7 @@
               </a:rPr>
               <a:t>44.3%</a:t>
             </a:r>
-            <a:endParaRPr lang="en-US" sz="2100" dirty="0"/>
+            <a:endParaRPr lang="en-US" sz="2400" dirty="0"/>
           </a:p>
         </p:txBody>
       </p:sp>
@@ -3999,11 +3755,11 @@
           </a:bodyPr>
           <a:lstStyle/>
           <a:p>
-            <a:pPr indent="0" marL="0">
-              <a:buNone/>
-            </a:pPr>
-            <a:r>
-              <a:rPr lang="en-US" sz="870" b="1" dirty="0">
+            <a:pPr marL="0" indent="0">
+              <a:buNone/>
+            </a:pPr>
+            <a:r>
+              <a:rPr lang="en-US" sz="1000" b="1" dirty="0">
                 <a:solidFill>
                   <a:srgbClr val="14342C"/>
                 </a:solidFill>
@@ -4013,7 +3769,7 @@
               </a:rPr>
               <a:t>O3 dominan</a:t>
             </a:r>
-            <a:endParaRPr lang="en-US" sz="870" dirty="0"/>
+            <a:endParaRPr lang="en-US" sz="1000" dirty="0"/>
           </a:p>
         </p:txBody>
       </p:sp>
@@ -4036,15 +3792,15 @@
         </p:spPr>
         <p:txBody>
           <a:bodyPr wrap="square" lIns="0" tIns="0" rIns="0" bIns="0" rtlCol="0" anchor="ctr">
-            <a:normAutofit/>
+            <a:noAutofit/>
           </a:bodyPr>
           <a:lstStyle/>
           <a:p>
-            <a:pPr indent="0" marL="0">
-              <a:buNone/>
-            </a:pPr>
-            <a:r>
-              <a:rPr lang="en-US" sz="680" dirty="0">
+            <a:pPr marL="0" indent="0">
+              <a:buNone/>
+            </a:pPr>
+            <a:r>
+              <a:rPr lang="en-US" sz="800" dirty="0">
                 <a:solidFill>
                   <a:srgbClr val="58706A"/>
                 </a:solidFill>
@@ -4054,13 +3810,13 @@
               </a:rPr>
               <a:t>O3 paling sering menjadi parameter critical.</a:t>
             </a:r>
-            <a:endParaRPr lang="en-US" sz="680" dirty="0"/>
+            <a:endParaRPr lang="en-US" sz="800" dirty="0"/>
           </a:p>
         </p:txBody>
       </p:sp>
       <p:graphicFrame>
         <p:nvGraphicFramePr>
-          <p:cNvPr id="22" name="Chart 0" descr=""/>
+          <p:cNvPr id="22" name="Chart 0"/>
           <p:cNvGraphicFramePr/>
           <p:nvPr/>
         </p:nvGraphicFramePr>
@@ -4068,15 +3824,15 @@
           <a:off x="777240" y="2971800"/>
           <a:ext cx="3840480" cy="2011680"/>
         </p:xfrm>
-        <a:graphic xmlns:a="http://schemas.openxmlformats.org/drawingml/2006/main">
+        <a:graphic>
           <a:graphicData uri="http://schemas.openxmlformats.org/drawingml/2006/chart">
-            <c:chart xmlns:c="http://schemas.openxmlformats.org/drawingml/2006/chart" r:id="rId1"/>
+            <c:chart xmlns:c="http://schemas.openxmlformats.org/drawingml/2006/chart" xmlns:r="http://schemas.openxmlformats.org/officeDocument/2006/relationships" r:id="rId3"/>
           </a:graphicData>
         </a:graphic>
       </p:graphicFrame>
       <p:graphicFrame>
         <p:nvGraphicFramePr>
-          <p:cNvPr id="23" name="Chart 1" descr=""/>
+          <p:cNvPr id="23" name="Chart 1"/>
           <p:cNvGraphicFramePr/>
           <p:nvPr/>
         </p:nvGraphicFramePr>
@@ -4084,9 +3840,9 @@
           <a:off x="4892040" y="2971800"/>
           <a:ext cx="3657600" cy="2011680"/>
         </p:xfrm>
-        <a:graphic xmlns:a="http://schemas.openxmlformats.org/drawingml/2006/main">
+        <a:graphic>
           <a:graphicData uri="http://schemas.openxmlformats.org/drawingml/2006/chart">
-            <c:chart xmlns:c="http://schemas.openxmlformats.org/drawingml/2006/chart" r:id="rId2"/>
+            <c:chart xmlns:c="http://schemas.openxmlformats.org/drawingml/2006/chart" xmlns:r="http://schemas.openxmlformats.org/officeDocument/2006/relationships" r:id="rId4"/>
           </a:graphicData>
         </a:graphic>
       </p:graphicFrame>
@@ -4109,15 +3865,15 @@
         </p:spPr>
         <p:txBody>
           <a:bodyPr wrap="square" lIns="0" tIns="0" rIns="0" bIns="0" rtlCol="0" anchor="ctr">
-            <a:normAutofit/>
+            <a:noAutofit/>
           </a:bodyPr>
           <a:lstStyle/>
           <a:p>
-            <a:pPr indent="0" marL="0">
-              <a:buNone/>
-            </a:pPr>
-            <a:r>
-              <a:rPr lang="en-US" sz="720" b="1" dirty="0">
+            <a:pPr marL="0" indent="0">
+              <a:buNone/>
+            </a:pPr>
+            <a:r>
+              <a:rPr lang="en-US" sz="1400" b="1" dirty="0">
                 <a:solidFill>
                   <a:srgbClr val="C34632"/>
                 </a:solidFill>
@@ -4127,7 +3883,7 @@
               </a:rPr>
               <a:t>REKOMENDASI KONKRET UNTUK KEPALA DINAS LH DKI JAKARTA</a:t>
             </a:r>
-            <a:endParaRPr lang="en-US" sz="720" dirty="0"/>
+            <a:endParaRPr lang="en-US" sz="1400" dirty="0"/>
           </a:p>
         </p:txBody>
       </p:sp>
@@ -4204,7 +3960,7 @@
           <a:bodyPr wrap="square" lIns="0" tIns="0" rIns="0" bIns="0" rtlCol="0" anchor="ctr"/>
           <a:lstStyle/>
           <a:p>
-            <a:pPr algn="ctr" indent="0" marL="0">
+            <a:pPr marL="0" indent="0" algn="ctr">
               <a:buNone/>
             </a:pPr>
             <a:r>
@@ -4241,15 +3997,15 @@
         </p:spPr>
         <p:txBody>
           <a:bodyPr wrap="square" lIns="0" tIns="0" rIns="0" bIns="0" rtlCol="0" anchor="ctr">
-            <a:normAutofit/>
+            <a:noAutofit/>
           </a:bodyPr>
           <a:lstStyle/>
           <a:p>
-            <a:pPr indent="0" marL="0">
-              <a:buNone/>
-            </a:pPr>
-            <a:r>
-              <a:rPr lang="en-US" sz="780" b="1" dirty="0">
+            <a:pPr marL="0" indent="0">
+              <a:buNone/>
+            </a:pPr>
+            <a:r>
+              <a:rPr lang="en-US" sz="1100" b="1" dirty="0">
                 <a:solidFill>
                   <a:srgbClr val="14342C"/>
                 </a:solidFill>
@@ -4259,7 +4015,7 @@
               </a:rPr>
               <a:t>Aktifkan alert operasional</a:t>
             </a:r>
-            <a:endParaRPr lang="en-US" sz="780" dirty="0"/>
+            <a:endParaRPr lang="en-US" sz="1100" dirty="0"/>
           </a:p>
         </p:txBody>
       </p:sp>
@@ -4282,15 +4038,15 @@
         </p:spPr>
         <p:txBody>
           <a:bodyPr wrap="square" lIns="127" tIns="127" rIns="127" bIns="127" rtlCol="0" anchor="ctr">
-            <a:normAutofit/>
+            <a:noAutofit/>
           </a:bodyPr>
           <a:lstStyle/>
           <a:p>
-            <a:pPr indent="0" marL="0">
-              <a:buNone/>
-            </a:pPr>
-            <a:r>
-              <a:rPr lang="en-US" sz="680" dirty="0">
+            <a:pPr marL="0" indent="0">
+              <a:buNone/>
+            </a:pPr>
+            <a:r>
+              <a:rPr lang="en-US" sz="800" dirty="0">
                 <a:solidFill>
                   <a:srgbClr val="58706A"/>
                 </a:solidFill>
@@ -4300,7 +4056,7 @@
               </a:rPr>
               <a:t>Tindak lanjuti bila ISPU &gt;100 selama ≥2 hari berturut-turut per stasiun; laporan harian ke pimpinan.</a:t>
             </a:r>
-            <a:endParaRPr lang="en-US" sz="680" dirty="0"/>
+            <a:endParaRPr lang="en-US" sz="800" dirty="0"/>
           </a:p>
         </p:txBody>
       </p:sp>
@@ -4377,7 +4133,7 @@
           <a:bodyPr wrap="square" lIns="0" tIns="0" rIns="0" bIns="0" rtlCol="0" anchor="ctr"/>
           <a:lstStyle/>
           <a:p>
-            <a:pPr algn="ctr" indent="0" marL="0">
+            <a:pPr marL="0" indent="0" algn="ctr">
               <a:buNone/>
             </a:pPr>
             <a:r>
@@ -4414,15 +4170,15 @@
         </p:spPr>
         <p:txBody>
           <a:bodyPr wrap="square" lIns="0" tIns="0" rIns="0" bIns="0" rtlCol="0" anchor="ctr">
-            <a:normAutofit/>
+            <a:noAutofit/>
           </a:bodyPr>
           <a:lstStyle/>
           <a:p>
-            <a:pPr indent="0" marL="0">
-              <a:buNone/>
-            </a:pPr>
-            <a:r>
-              <a:rPr lang="en-US" sz="780" b="1" dirty="0">
+            <a:pPr marL="0" indent="0">
+              <a:buNone/>
+            </a:pPr>
+            <a:r>
+              <a:rPr lang="en-US" sz="1100" b="1" dirty="0">
                 <a:solidFill>
                   <a:srgbClr val="14342C"/>
                 </a:solidFill>
@@ -4432,7 +4188,7 @@
               </a:rPr>
               <a:t>Fokus lokasi prioritas</a:t>
             </a:r>
-            <a:endParaRPr lang="en-US" sz="780" dirty="0"/>
+            <a:endParaRPr lang="en-US" sz="1100" dirty="0"/>
           </a:p>
         </p:txBody>
       </p:sp>
@@ -4455,15 +4211,15 @@
         </p:spPr>
         <p:txBody>
           <a:bodyPr wrap="square" lIns="127" tIns="127" rIns="127" bIns="127" rtlCol="0" anchor="ctr">
-            <a:normAutofit/>
+            <a:noAutofit/>
           </a:bodyPr>
           <a:lstStyle/>
           <a:p>
-            <a:pPr indent="0" marL="0">
-              <a:buNone/>
-            </a:pPr>
-            <a:r>
-              <a:rPr lang="en-US" sz="680" dirty="0">
+            <a:pPr marL="0" indent="0">
+              <a:buNone/>
+            </a:pPr>
+            <a:r>
+              <a:rPr lang="en-US" sz="800" dirty="0">
                 <a:solidFill>
                   <a:srgbClr val="58706A"/>
                 </a:solidFill>
@@ -4473,7 +4229,7 @@
               </a:rPr>
               <a:t>Jadikan DKI2 dan DKI4 sebagai prioritas inspeksi sumber emisi; evaluasi bulanan proporsi hari tidak sehat.</a:t>
             </a:r>
-            <a:endParaRPr lang="en-US" sz="680" dirty="0"/>
+            <a:endParaRPr lang="en-US" sz="800" dirty="0"/>
           </a:p>
         </p:txBody>
       </p:sp>
@@ -4550,7 +4306,7 @@
           <a:bodyPr wrap="square" lIns="0" tIns="0" rIns="0" bIns="0" rtlCol="0" anchor="ctr"/>
           <a:lstStyle/>
           <a:p>
-            <a:pPr algn="ctr" indent="0" marL="0">
+            <a:pPr marL="0" indent="0" algn="ctr">
               <a:buNone/>
             </a:pPr>
             <a:r>
@@ -4587,15 +4343,15 @@
         </p:spPr>
         <p:txBody>
           <a:bodyPr wrap="square" lIns="0" tIns="0" rIns="0" bIns="0" rtlCol="0" anchor="ctr">
-            <a:normAutofit/>
+            <a:noAutofit/>
           </a:bodyPr>
           <a:lstStyle/>
           <a:p>
-            <a:pPr indent="0" marL="0">
-              <a:buNone/>
-            </a:pPr>
-            <a:r>
-              <a:rPr lang="en-US" sz="780" b="1" dirty="0">
+            <a:pPr marL="0" indent="0">
+              <a:buNone/>
+            </a:pPr>
+            <a:r>
+              <a:rPr lang="en-US" sz="1100" b="1" dirty="0">
                 <a:solidFill>
                   <a:srgbClr val="14342C"/>
                 </a:solidFill>
@@ -4605,7 +4361,7 @@
               </a:rPr>
               <a:t>Kalender intervensi musiman</a:t>
             </a:r>
-            <a:endParaRPr lang="en-US" sz="780" dirty="0"/>
+            <a:endParaRPr lang="en-US" sz="1100" dirty="0"/>
           </a:p>
         </p:txBody>
       </p:sp>
@@ -4628,15 +4384,15 @@
         </p:spPr>
         <p:txBody>
           <a:bodyPr wrap="square" lIns="127" tIns="127" rIns="127" bIns="127" rtlCol="0" anchor="ctr">
-            <a:normAutofit/>
+            <a:noAutofit/>
           </a:bodyPr>
           <a:lstStyle/>
           <a:p>
-            <a:pPr indent="0" marL="0">
-              <a:buNone/>
-            </a:pPr>
-            <a:r>
-              <a:rPr lang="en-US" sz="680" dirty="0">
+            <a:pPr marL="0" indent="0">
+              <a:buNone/>
+            </a:pPr>
+            <a:r>
+              <a:rPr lang="en-US" sz="800" dirty="0">
                 <a:solidFill>
                   <a:srgbClr val="58706A"/>
                 </a:solidFill>
@@ -4646,7 +4402,7 @@
               </a:rPr>
               <a:t>Mulai pengendalian pra-musim risiko pada Jul–Nov; target penurunan hari tidak sehat minimal 10% pada periode puncak.</a:t>
             </a:r>
-            <a:endParaRPr lang="en-US" sz="680" dirty="0"/>
+            <a:endParaRPr lang="en-US" sz="800" dirty="0"/>
           </a:p>
         </p:txBody>
       </p:sp>
@@ -4723,7 +4479,7 @@
           <a:bodyPr wrap="square" lIns="0" tIns="0" rIns="0" bIns="0" rtlCol="0" anchor="ctr"/>
           <a:lstStyle/>
           <a:p>
-            <a:pPr algn="ctr" indent="0" marL="0">
+            <a:pPr marL="0" indent="0" algn="ctr">
               <a:buNone/>
             </a:pPr>
             <a:r>
@@ -4760,15 +4516,15 @@
         </p:spPr>
         <p:txBody>
           <a:bodyPr wrap="square" lIns="0" tIns="0" rIns="0" bIns="0" rtlCol="0" anchor="ctr">
-            <a:normAutofit/>
+            <a:noAutofit/>
           </a:bodyPr>
           <a:lstStyle/>
           <a:p>
-            <a:pPr indent="0" marL="0">
-              <a:buNone/>
-            </a:pPr>
-            <a:r>
-              <a:rPr lang="en-US" sz="780" b="1" dirty="0">
+            <a:pPr marL="0" indent="0">
+              <a:buNone/>
+            </a:pPr>
+            <a:r>
+              <a:rPr lang="en-US" sz="1100" b="1" dirty="0">
                 <a:solidFill>
                   <a:srgbClr val="14342C"/>
                 </a:solidFill>
@@ -4778,7 +4534,7 @@
               </a:rPr>
               <a:t>Perbaiki mutu data PM2.5</a:t>
             </a:r>
-            <a:endParaRPr lang="en-US" sz="780" dirty="0"/>
+            <a:endParaRPr lang="en-US" sz="1100" dirty="0"/>
           </a:p>
         </p:txBody>
       </p:sp>
@@ -4801,15 +4557,15 @@
         </p:spPr>
         <p:txBody>
           <a:bodyPr wrap="square" lIns="127" tIns="127" rIns="127" bIns="127" rtlCol="0" anchor="ctr">
-            <a:normAutofit/>
+            <a:noAutofit/>
           </a:bodyPr>
           <a:lstStyle/>
           <a:p>
-            <a:pPr indent="0" marL="0">
-              <a:buNone/>
-            </a:pPr>
-            <a:r>
-              <a:rPr lang="en-US" sz="680" dirty="0">
+            <a:pPr marL="0" indent="0">
+              <a:buNone/>
+            </a:pPr>
+            <a:r>
+              <a:rPr lang="en-US" sz="800" dirty="0">
                 <a:solidFill>
                   <a:srgbClr val="58706A"/>
                 </a:solidFill>
@@ -4819,7 +4575,7 @@
               </a:rPr>
               <a:t>Wajibkan monitoring coverage PM2.5 per SPKU; target kelengkapan minimal 95% untuk analisis tahunan.</a:t>
             </a:r>
-            <a:endParaRPr lang="en-US" sz="680" dirty="0"/>
+            <a:endParaRPr lang="en-US" sz="800" dirty="0"/>
           </a:p>
         </p:txBody>
       </p:sp>
@@ -4869,15 +4625,15 @@
         </p:spPr>
         <p:txBody>
           <a:bodyPr wrap="square" lIns="0" tIns="0" rIns="0" bIns="0" rtlCol="0" anchor="ctr">
-            <a:normAutofit/>
+            <a:noAutofit/>
           </a:bodyPr>
           <a:lstStyle/>
           <a:p>
-            <a:pPr indent="0" marL="0">
-              <a:buNone/>
-            </a:pPr>
-            <a:r>
-              <a:rPr lang="en-US" sz="880" b="1" dirty="0">
+            <a:pPr marL="0" indent="0">
+              <a:buNone/>
+            </a:pPr>
+            <a:r>
+              <a:rPr lang="en-US" sz="1400" b="1" dirty="0">
                 <a:solidFill>
                   <a:srgbClr val="197A5D"/>
                 </a:solidFill>
@@ -4887,7 +4643,7 @@
               </a:rPr>
               <a:t>Keputusan utama</a:t>
             </a:r>
-            <a:endParaRPr lang="en-US" sz="880" dirty="0"/>
+            <a:endParaRPr lang="en-US" sz="1400" dirty="0"/>
           </a:p>
         </p:txBody>
       </p:sp>
@@ -4910,15 +4666,15 @@
         </p:spPr>
         <p:txBody>
           <a:bodyPr wrap="square" lIns="254" tIns="254" rIns="254" bIns="254" rtlCol="0" anchor="ctr">
-            <a:normAutofit/>
+            <a:noAutofit/>
           </a:bodyPr>
           <a:lstStyle/>
           <a:p>
-            <a:pPr indent="0" marL="0">
-              <a:buNone/>
-            </a:pPr>
-            <a:r>
-              <a:rPr lang="en-US" sz="980" dirty="0">
+            <a:pPr marL="0" indent="0">
+              <a:buNone/>
+            </a:pPr>
+            <a:r>
+              <a:rPr lang="en-US" sz="1100" dirty="0">
                 <a:solidFill>
                   <a:srgbClr val="14342C"/>
                 </a:solidFill>
@@ -4928,13 +4684,13 @@
               </a:rPr>
               <a:t>Gunakan dashboard sebagai instrumen rapat rutin: pantau KPI harian, evaluasi bulanan, dan prioritaskan intervensi berdasarkan lokasi, waktu, parameter, dan kualitas data.</a:t>
             </a:r>
-            <a:endParaRPr lang="en-US" sz="980" dirty="0"/>
-          </a:p>
-        </p:txBody>
-      </p:sp>
-      <p:sp>
-        <p:nvSpPr>
-          <p:cNvPr id="25" name="Slide Number Placeholder 0"/>
+            <a:endParaRPr lang="en-US" sz="1100" dirty="0"/>
+          </a:p>
+        </p:txBody>
+      </p:sp>
+      <p:sp>
+        <p:nvSpPr>
+          <p:cNvPr id="48" name="Slide Number Placeholder 0"/>
           <p:cNvSpPr>
             <a:spLocks noGrp="1"/>
           </p:cNvSpPr>
@@ -4952,7 +4708,7 @@
           </a:prstGeom>
           <a:extLst>
             <a:ext uri="{C572A759-6A51-4108-AA02-DFA0A04FC94B}">
-              <ma14:wrappingTextBoxFlag xmlns:ma14="http://schemas.microsoft.com/office/mac/drawingml/2011/main" val="0"/>
+              <ma14:wrappingTextBoxFlag xmlns:ma14="http://schemas.microsoft.com/office/mac/drawingml/2011/main" xmlns="" val="0"/>
             </a:ext>
           </a:extLst>
         </p:spPr>
@@ -4973,7 +4729,7 @@
           <a:p>
             <a:pPr algn="l"/>
             <a:fld id="{F7021451-1387-4CA6-816F-3879F97B5CBC}" type="slidenum">
-              <a:rPr b="0" lang="en-US"/>
+              <a:rPr lang="en-US" b="0"/>
               <a:t>10</a:t>
             </a:fld>
             <a:endParaRPr lang="en-US"/>
@@ -4996,6 +4752,7 @@
         <a:solidFill>
           <a:srgbClr val="F7FAF8"/>
         </a:solidFill>
+        <a:effectLst/>
       </p:bgPr>
     </p:bg>
     <p:spTree>
@@ -5033,7 +4790,7 @@
           <a:bodyPr wrap="square" lIns="0" tIns="0" rIns="0" bIns="0" rtlCol="0" anchor="ctr"/>
           <a:lstStyle/>
           <a:p>
-            <a:pPr indent="0" marL="0">
+            <a:pPr marL="0" indent="0">
               <a:buNone/>
             </a:pPr>
             <a:r>
@@ -5074,7 +4831,7 @@
           </a:bodyPr>
           <a:lstStyle/>
           <a:p>
-            <a:pPr indent="0" marL="0">
+            <a:pPr marL="0" indent="0">
               <a:buNone/>
             </a:pPr>
             <a:r>
@@ -5134,11 +4891,11 @@
         </p:spPr>
         <p:txBody>
           <a:bodyPr wrap="square" lIns="254" tIns="254" rIns="254" bIns="254" rtlCol="0" anchor="t">
-            <a:normAutofit/>
+            <a:normAutofit fontScale="92500"/>
           </a:bodyPr>
           <a:lstStyle/>
           <a:p>
-            <a:pPr algn="l" indent="0" marL="0">
+            <a:pPr marL="0" indent="0" algn="l">
               <a:buNone/>
             </a:pPr>
             <a:r>
@@ -5182,7 +4939,7 @@
             <a:prstDash val="solid"/>
           </a:ln>
           <a:effectLst>
-            <a:outerShdw sx="100000" sy="100000" kx="0" ky="0" algn="bl" rotWithShape="0" blurRad="12700" dist="12700" dir="2700000">
+            <a:outerShdw blurRad="12700" dist="12700" dir="2700000" algn="bl" rotWithShape="0">
               <a:srgbClr val="86958E">
                 <a:alpha val="10000"/>
               </a:srgbClr>
@@ -5236,11 +4993,11 @@
           <a:bodyPr wrap="square" lIns="0" tIns="0" rIns="0" bIns="0" rtlCol="0" anchor="ctr"/>
           <a:lstStyle/>
           <a:p>
-            <a:pPr algn="ctr" indent="0" marL="0">
-              <a:buNone/>
-            </a:pPr>
-            <a:r>
-              <a:rPr lang="en-US" sz="820" b="1" dirty="0">
+            <a:pPr marL="0" indent="0" algn="ctr">
+              <a:buNone/>
+            </a:pPr>
+            <a:r>
+              <a:rPr lang="en-US" sz="1400" b="1" dirty="0">
                 <a:solidFill>
                   <a:srgbClr val="FFFFFF"/>
                 </a:solidFill>
@@ -5250,7 +5007,7 @@
               </a:rPr>
               <a:t>1</a:t>
             </a:r>
-            <a:endParaRPr lang="en-US" sz="820" dirty="0"/>
+            <a:endParaRPr lang="en-US" sz="1400" dirty="0"/>
           </a:p>
         </p:txBody>
       </p:sp>
@@ -5277,11 +5034,11 @@
           </a:bodyPr>
           <a:lstStyle/>
           <a:p>
-            <a:pPr indent="0" marL="0">
-              <a:buNone/>
-            </a:pPr>
-            <a:r>
-              <a:rPr lang="en-US" sz="1010" b="1" dirty="0">
+            <a:pPr marL="0" indent="0">
+              <a:buNone/>
+            </a:pPr>
+            <a:r>
+              <a:rPr lang="en-US" sz="1400" b="1" dirty="0">
                 <a:solidFill>
                   <a:srgbClr val="14342C"/>
                 </a:solidFill>
@@ -5291,7 +5048,7 @@
               </a:rPr>
               <a:t>Kebutuhan analisis</a:t>
             </a:r>
-            <a:endParaRPr lang="en-US" sz="1010" dirty="0"/>
+            <a:endParaRPr lang="en-US" sz="1400" dirty="0"/>
           </a:p>
         </p:txBody>
       </p:sp>
@@ -5314,15 +5071,15 @@
         </p:spPr>
         <p:txBody>
           <a:bodyPr wrap="square" lIns="254" tIns="254" rIns="254" bIns="254" rtlCol="0" anchor="ctr">
-            <a:normAutofit/>
+            <a:noAutofit/>
           </a:bodyPr>
           <a:lstStyle/>
           <a:p>
-            <a:pPr indent="0" marL="0">
-              <a:buNone/>
-            </a:pPr>
-            <a:r>
-              <a:rPr lang="en-US" sz="820" dirty="0">
+            <a:pPr marL="0" indent="0">
+              <a:buNone/>
+            </a:pPr>
+            <a:r>
+              <a:rPr lang="en-US" sz="1100" dirty="0">
                 <a:solidFill>
                   <a:srgbClr val="58706A"/>
                 </a:solidFill>
@@ -5332,7 +5089,7 @@
               </a:rPr>
               <a:t>Mengetahui kondisi umum kualitas udara, lokasi prioritas, periode risiko, dan pencemar dominan berdasarkan data dashboard.</a:t>
             </a:r>
-            <a:endParaRPr lang="en-US" sz="820" dirty="0"/>
+            <a:endParaRPr lang="en-US" sz="1100" dirty="0"/>
           </a:p>
         </p:txBody>
       </p:sp>
@@ -5362,7 +5119,7 @@
             <a:prstDash val="solid"/>
           </a:ln>
           <a:effectLst>
-            <a:outerShdw sx="100000" sy="100000" kx="0" ky="0" algn="bl" rotWithShape="0" blurRad="12700" dist="12700" dir="2700000">
+            <a:outerShdw blurRad="12700" dist="12700" dir="2700000" algn="bl" rotWithShape="0">
               <a:srgbClr val="86958E">
                 <a:alpha val="10000"/>
               </a:srgbClr>
@@ -5416,11 +5173,11 @@
           <a:bodyPr wrap="square" lIns="0" tIns="0" rIns="0" bIns="0" rtlCol="0" anchor="ctr"/>
           <a:lstStyle/>
           <a:p>
-            <a:pPr algn="ctr" indent="0" marL="0">
-              <a:buNone/>
-            </a:pPr>
-            <a:r>
-              <a:rPr lang="en-US" sz="820" b="1" dirty="0">
+            <a:pPr marL="0" indent="0" algn="ctr">
+              <a:buNone/>
+            </a:pPr>
+            <a:r>
+              <a:rPr lang="en-US" sz="1400" b="1" dirty="0">
                 <a:solidFill>
                   <a:srgbClr val="FFFFFF"/>
                 </a:solidFill>
@@ -5430,7 +5187,7 @@
               </a:rPr>
               <a:t>2</a:t>
             </a:r>
-            <a:endParaRPr lang="en-US" sz="820" dirty="0"/>
+            <a:endParaRPr lang="en-US" sz="1400" dirty="0"/>
           </a:p>
         </p:txBody>
       </p:sp>
@@ -5457,11 +5214,11 @@
           </a:bodyPr>
           <a:lstStyle/>
           <a:p>
-            <a:pPr indent="0" marL="0">
-              <a:buNone/>
-            </a:pPr>
-            <a:r>
-              <a:rPr lang="en-US" sz="1010" b="1" dirty="0">
+            <a:pPr marL="0" indent="0">
+              <a:buNone/>
+            </a:pPr>
+            <a:r>
+              <a:rPr lang="en-US" sz="1400" b="1" dirty="0">
                 <a:solidFill>
                   <a:srgbClr val="14342C"/>
                 </a:solidFill>
@@ -5471,7 +5228,7 @@
               </a:rPr>
               <a:t>Pertanyaan bisnis</a:t>
             </a:r>
-            <a:endParaRPr lang="en-US" sz="1010" dirty="0"/>
+            <a:endParaRPr lang="en-US" sz="1400" dirty="0"/>
           </a:p>
         </p:txBody>
       </p:sp>
@@ -5498,11 +5255,11 @@
           </a:bodyPr>
           <a:lstStyle/>
           <a:p>
-            <a:pPr indent="0" marL="0">
-              <a:buNone/>
-            </a:pPr>
-            <a:r>
-              <a:rPr lang="en-US" sz="820" dirty="0">
+            <a:pPr marL="0" indent="0">
+              <a:buNone/>
+            </a:pPr>
+            <a:r>
+              <a:rPr lang="en-US" sz="1100" dirty="0">
                 <a:solidFill>
                   <a:srgbClr val="58706A"/>
                 </a:solidFill>
@@ -5512,7 +5269,7 @@
               </a:rPr>
               <a:t>Apa status kualitas udara? Stasiun mana paling berisiko? Kapan polusi meningkat? Parameter apa yang dominan?</a:t>
             </a:r>
-            <a:endParaRPr lang="en-US" sz="820" dirty="0"/>
+            <a:endParaRPr lang="en-US" sz="1100" dirty="0"/>
           </a:p>
         </p:txBody>
       </p:sp>
@@ -5542,7 +5299,7 @@
             <a:prstDash val="solid"/>
           </a:ln>
           <a:effectLst>
-            <a:outerShdw sx="100000" sy="100000" kx="0" ky="0" algn="bl" rotWithShape="0" blurRad="12700" dist="12700" dir="2700000">
+            <a:outerShdw blurRad="12700" dist="12700" dir="2700000" algn="bl" rotWithShape="0">
               <a:srgbClr val="86958E">
                 <a:alpha val="10000"/>
               </a:srgbClr>
@@ -5596,11 +5353,11 @@
           <a:bodyPr wrap="square" lIns="0" tIns="0" rIns="0" bIns="0" rtlCol="0" anchor="ctr"/>
           <a:lstStyle/>
           <a:p>
-            <a:pPr algn="ctr" indent="0" marL="0">
-              <a:buNone/>
-            </a:pPr>
-            <a:r>
-              <a:rPr lang="en-US" sz="820" b="1" dirty="0">
+            <a:pPr marL="0" indent="0" algn="ctr">
+              <a:buNone/>
+            </a:pPr>
+            <a:r>
+              <a:rPr lang="en-US" sz="1400" b="1" dirty="0">
                 <a:solidFill>
                   <a:srgbClr val="FFFFFF"/>
                 </a:solidFill>
@@ -5610,7 +5367,7 @@
               </a:rPr>
               <a:t>3</a:t>
             </a:r>
-            <a:endParaRPr lang="en-US" sz="820" dirty="0"/>
+            <a:endParaRPr lang="en-US" sz="1400" dirty="0"/>
           </a:p>
         </p:txBody>
       </p:sp>
@@ -5637,11 +5394,11 @@
           </a:bodyPr>
           <a:lstStyle/>
           <a:p>
-            <a:pPr indent="0" marL="0">
-              <a:buNone/>
-            </a:pPr>
-            <a:r>
-              <a:rPr lang="en-US" sz="1010" b="1" dirty="0">
+            <a:pPr marL="0" indent="0">
+              <a:buNone/>
+            </a:pPr>
+            <a:r>
+              <a:rPr lang="en-US" sz="1400" b="1" dirty="0">
                 <a:solidFill>
                   <a:srgbClr val="14342C"/>
                 </a:solidFill>
@@ -5651,7 +5408,7 @@
               </a:rPr>
               <a:t>Pengguna hasil</a:t>
             </a:r>
-            <a:endParaRPr lang="en-US" sz="1010" dirty="0"/>
+            <a:endParaRPr lang="en-US" sz="1400" dirty="0"/>
           </a:p>
         </p:txBody>
       </p:sp>
@@ -5678,11 +5435,11 @@
           </a:bodyPr>
           <a:lstStyle/>
           <a:p>
-            <a:pPr indent="0" marL="0">
-              <a:buNone/>
-            </a:pPr>
-            <a:r>
-              <a:rPr lang="en-US" sz="820" dirty="0">
+            <a:pPr marL="0" indent="0">
+              <a:buNone/>
+            </a:pPr>
+            <a:r>
+              <a:rPr lang="en-US" sz="1100" dirty="0">
                 <a:solidFill>
                   <a:srgbClr val="58706A"/>
                 </a:solidFill>
@@ -5692,7 +5449,7 @@
               </a:rPr>
               <a:t>Kepala Dinas LH DKI Jakarta, bidang pengendalian pencemaran udara, pengelola SPKU, serta unit data/dashboard.</a:t>
             </a:r>
-            <a:endParaRPr lang="en-US" sz="820" dirty="0"/>
+            <a:endParaRPr lang="en-US" sz="1100" dirty="0"/>
           </a:p>
         </p:txBody>
       </p:sp>
@@ -5704,8 +5461,8 @@
         </p:nvSpPr>
         <p:spPr>
           <a:xfrm>
-            <a:off x="713232" y="3886200"/>
-            <a:ext cx="1828800" cy="164592"/>
+            <a:off x="713231" y="3886200"/>
+            <a:ext cx="2533821" cy="164592"/>
           </a:xfrm>
           <a:prstGeom prst="rect">
             <a:avLst/>
@@ -5715,15 +5472,15 @@
         </p:spPr>
         <p:txBody>
           <a:bodyPr wrap="square" lIns="0" tIns="0" rIns="0" bIns="0" rtlCol="0" anchor="ctr">
-            <a:normAutofit/>
+            <a:noAutofit/>
           </a:bodyPr>
           <a:lstStyle/>
           <a:p>
-            <a:pPr indent="0" marL="0">
-              <a:buNone/>
-            </a:pPr>
-            <a:r>
-              <a:rPr lang="en-US" sz="720" b="1" dirty="0">
+            <a:pPr marL="0" indent="0">
+              <a:buNone/>
+            </a:pPr>
+            <a:r>
+              <a:rPr lang="en-US" b="1" dirty="0">
                 <a:solidFill>
                   <a:srgbClr val="197A5D"/>
                 </a:solidFill>
@@ -5733,7 +5490,7 @@
               </a:rPr>
               <a:t>TUJUAN ANALISIS</a:t>
             </a:r>
-            <a:endParaRPr lang="en-US" sz="720" dirty="0"/>
+            <a:endParaRPr lang="en-US" dirty="0"/>
           </a:p>
         </p:txBody>
       </p:sp>
@@ -5756,12 +5513,15 @@
         </p:spPr>
         <p:txBody>
           <a:bodyPr wrap="square" lIns="254" tIns="254" rIns="254" bIns="254" rtlCol="0" anchor="ctr">
-            <a:normAutofit/>
+            <a:normAutofit lnSpcReduction="10000"/>
           </a:bodyPr>
           <a:lstStyle/>
           <a:p>
-            <a:r>
-              <a:rPr lang="en-US" sz="1010" dirty="0">
+            <a:pPr marL="342900" indent="-342900">
+              <a:buAutoNum type="arabicPeriod"/>
+            </a:pPr>
+            <a:r>
+              <a:rPr lang="en-US" sz="1400" dirty="0" err="1">
                 <a:solidFill>
                   <a:srgbClr val="14342C"/>
                 </a:solidFill>
@@ -5769,13 +5529,10 @@
                 <a:ea typeface="Aptos" pitchFamily="34" charset="-122"/>
                 <a:cs typeface="Aptos" pitchFamily="34" charset="-120"/>
               </a:rPr>
-              <a:t>Menyajikan KPI utama kualitas udara dan kondisi terkini per stasiun.</a:t>
-            </a:r>
-            <a:endParaRPr lang="en-US" sz="1010" dirty="0"/>
-          </a:p>
-          <a:p>
-            <a:r>
-              <a:rPr lang="en-US" sz="1010" dirty="0">
+              <a:t>Menyajikan</a:t>
+            </a:r>
+            <a:r>
+              <a:rPr lang="en-US" sz="1400" dirty="0">
                 <a:solidFill>
                   <a:srgbClr val="14342C"/>
                 </a:solidFill>
@@ -5783,13 +5540,10 @@
                 <a:ea typeface="Aptos" pitchFamily="34" charset="-122"/>
                 <a:cs typeface="Aptos" pitchFamily="34" charset="-120"/>
               </a:rPr>
-              <a:t>Menganalisis tren temporal harian, bulanan, dan tahunan.</a:t>
-            </a:r>
-            <a:endParaRPr lang="en-US" sz="1010" dirty="0"/>
-          </a:p>
-          <a:p>
-            <a:r>
-              <a:rPr lang="en-US" sz="1010" dirty="0">
+              <a:t> KPI utama kualitas udara dan kondisi terkini per </a:t>
+            </a:r>
+            <a:r>
+              <a:rPr lang="en-US" sz="1400" dirty="0" err="1">
                 <a:solidFill>
                   <a:srgbClr val="14342C"/>
                 </a:solidFill>
@@ -5797,13 +5551,10 @@
                 <a:ea typeface="Aptos" pitchFamily="34" charset="-122"/>
                 <a:cs typeface="Aptos" pitchFamily="34" charset="-120"/>
               </a:rPr>
-              <a:t>Membandingkan kinerja kualitas udara antar 5 SPKU.</a:t>
-            </a:r>
-            <a:endParaRPr lang="en-US" sz="1010" dirty="0"/>
-          </a:p>
-          <a:p>
-            <a:r>
-              <a:rPr lang="en-US" sz="1010" dirty="0">
+              <a:t>stasiun</a:t>
+            </a:r>
+            <a:r>
+              <a:rPr lang="en-US" sz="1400" dirty="0">
                 <a:solidFill>
                   <a:srgbClr val="14342C"/>
                 </a:solidFill>
@@ -5811,13 +5562,15 @@
                 <a:ea typeface="Aptos" pitchFamily="34" charset="-122"/>
                 <a:cs typeface="Aptos" pitchFamily="34" charset="-120"/>
               </a:rPr>
-              <a:t>Mengidentifikasi parameter pencemar dominan dan keterbatasan data PM2.5.</a:t>
-            </a:r>
-            <a:endParaRPr lang="en-US" sz="1010" dirty="0"/>
-          </a:p>
-          <a:p>
-            <a:r>
-              <a:rPr lang="en-US" sz="1010" dirty="0">
+              <a:t>.</a:t>
+            </a:r>
+          </a:p>
+          <a:p>
+            <a:pPr marL="342900" indent="-342900">
+              <a:buAutoNum type="arabicPeriod"/>
+            </a:pPr>
+            <a:r>
+              <a:rPr lang="en-US" sz="1400" dirty="0" err="1">
                 <a:solidFill>
                   <a:srgbClr val="14342C"/>
                 </a:solidFill>
@@ -5825,9 +5578,126 @@
                 <a:ea typeface="Aptos" pitchFamily="34" charset="-122"/>
                 <a:cs typeface="Aptos" pitchFamily="34" charset="-120"/>
               </a:rPr>
-              <a:t>Menemukan pola musiman untuk kalender intervensi.</a:t>
-            </a:r>
-            <a:endParaRPr lang="en-US" sz="1010" dirty="0"/>
+              <a:t>Menganalisis</a:t>
+            </a:r>
+            <a:r>
+              <a:rPr lang="en-US" sz="1400" dirty="0">
+                <a:solidFill>
+                  <a:srgbClr val="14342C"/>
+                </a:solidFill>
+                <a:latin typeface="Aptos" pitchFamily="34" charset="0"/>
+                <a:ea typeface="Aptos" pitchFamily="34" charset="-122"/>
+                <a:cs typeface="Aptos" pitchFamily="34" charset="-120"/>
+              </a:rPr>
+              <a:t> tren temporal harian, bulanan, dan </a:t>
+            </a:r>
+            <a:r>
+              <a:rPr lang="en-US" sz="1400" dirty="0" err="1">
+                <a:solidFill>
+                  <a:srgbClr val="14342C"/>
+                </a:solidFill>
+                <a:latin typeface="Aptos" pitchFamily="34" charset="0"/>
+                <a:ea typeface="Aptos" pitchFamily="34" charset="-122"/>
+                <a:cs typeface="Aptos" pitchFamily="34" charset="-120"/>
+              </a:rPr>
+              <a:t>tahunan</a:t>
+            </a:r>
+            <a:r>
+              <a:rPr lang="en-US" sz="1400" dirty="0">
+                <a:solidFill>
+                  <a:srgbClr val="14342C"/>
+                </a:solidFill>
+                <a:latin typeface="Aptos" pitchFamily="34" charset="0"/>
+                <a:ea typeface="Aptos" pitchFamily="34" charset="-122"/>
+                <a:cs typeface="Aptos" pitchFamily="34" charset="-120"/>
+              </a:rPr>
+              <a:t>.</a:t>
+            </a:r>
+            <a:endParaRPr lang="en-US" sz="1400" dirty="0"/>
+          </a:p>
+          <a:p>
+            <a:pPr marL="342900" indent="-342900">
+              <a:buAutoNum type="arabicPeriod"/>
+            </a:pPr>
+            <a:r>
+              <a:rPr lang="en-US" sz="1400" dirty="0" err="1">
+                <a:solidFill>
+                  <a:srgbClr val="14342C"/>
+                </a:solidFill>
+                <a:latin typeface="Aptos" pitchFamily="34" charset="0"/>
+                <a:ea typeface="Aptos" pitchFamily="34" charset="-122"/>
+                <a:cs typeface="Aptos" pitchFamily="34" charset="-120"/>
+              </a:rPr>
+              <a:t>Membandingkan</a:t>
+            </a:r>
+            <a:r>
+              <a:rPr lang="en-US" sz="1400" dirty="0">
+                <a:solidFill>
+                  <a:srgbClr val="14342C"/>
+                </a:solidFill>
+                <a:latin typeface="Aptos" pitchFamily="34" charset="0"/>
+                <a:ea typeface="Aptos" pitchFamily="34" charset="-122"/>
+                <a:cs typeface="Aptos" pitchFamily="34" charset="-120"/>
+              </a:rPr>
+              <a:t> kinerja kualitas udara antar 5 SPKU.</a:t>
+            </a:r>
+            <a:endParaRPr lang="en-US" sz="1400" dirty="0"/>
+          </a:p>
+          <a:p>
+            <a:pPr marL="342900" indent="-342900">
+              <a:buAutoNum type="arabicPeriod"/>
+            </a:pPr>
+            <a:r>
+              <a:rPr lang="en-US" sz="1400" dirty="0" err="1">
+                <a:solidFill>
+                  <a:srgbClr val="14342C"/>
+                </a:solidFill>
+                <a:latin typeface="Aptos" pitchFamily="34" charset="0"/>
+                <a:ea typeface="Aptos" pitchFamily="34" charset="-122"/>
+                <a:cs typeface="Aptos" pitchFamily="34" charset="-120"/>
+              </a:rPr>
+              <a:t>Mengidentifikasi</a:t>
+            </a:r>
+            <a:r>
+              <a:rPr lang="en-US" sz="1400" dirty="0">
+                <a:solidFill>
+                  <a:srgbClr val="14342C"/>
+                </a:solidFill>
+                <a:latin typeface="Aptos" pitchFamily="34" charset="0"/>
+                <a:ea typeface="Aptos" pitchFamily="34" charset="-122"/>
+                <a:cs typeface="Aptos" pitchFamily="34" charset="-120"/>
+              </a:rPr>
+              <a:t> parameter pencemar dominan dan keterbatasan data PM2.5.</a:t>
+            </a:r>
+            <a:endParaRPr lang="en-US" sz="1400" dirty="0"/>
+          </a:p>
+          <a:p>
+            <a:pPr marL="342900" indent="-342900">
+              <a:buAutoNum type="arabicPeriod"/>
+            </a:pPr>
+            <a:r>
+              <a:rPr lang="en-US" sz="1400" dirty="0" err="1">
+                <a:solidFill>
+                  <a:srgbClr val="14342C"/>
+                </a:solidFill>
+                <a:latin typeface="Aptos" pitchFamily="34" charset="0"/>
+                <a:ea typeface="Aptos" pitchFamily="34" charset="-122"/>
+                <a:cs typeface="Aptos" pitchFamily="34" charset="-120"/>
+              </a:rPr>
+              <a:t>Menemukan</a:t>
+            </a:r>
+            <a:r>
+              <a:rPr lang="en-US" sz="1400" dirty="0">
+                <a:solidFill>
+                  <a:srgbClr val="14342C"/>
+                </a:solidFill>
+                <a:latin typeface="Aptos" pitchFamily="34" charset="0"/>
+                <a:ea typeface="Aptos" pitchFamily="34" charset="-122"/>
+                <a:cs typeface="Aptos" pitchFamily="34" charset="-120"/>
+              </a:rPr>
+              <a:t> pola musiman untuk kalender intervensi.</a:t>
+            </a:r>
+            <a:endParaRPr lang="en-US" sz="1400" dirty="0"/>
           </a:p>
         </p:txBody>
       </p:sp>
@@ -5877,15 +5747,15 @@
         </p:spPr>
         <p:txBody>
           <a:bodyPr wrap="square" lIns="0" tIns="0" rIns="0" bIns="0" rtlCol="0" anchor="ctr">
-            <a:normAutofit/>
+            <a:noAutofit/>
           </a:bodyPr>
           <a:lstStyle/>
           <a:p>
-            <a:pPr indent="0" marL="0">
-              <a:buNone/>
-            </a:pPr>
-            <a:r>
-              <a:rPr lang="en-US" sz="880" b="1" dirty="0">
+            <a:pPr marL="0" indent="0">
+              <a:buNone/>
+            </a:pPr>
+            <a:r>
+              <a:rPr lang="en-US" sz="1600" b="1" dirty="0">
                 <a:solidFill>
                   <a:srgbClr val="197A5D"/>
                 </a:solidFill>
@@ -5895,7 +5765,7 @@
               </a:rPr>
               <a:t>Output yang diharapkan</a:t>
             </a:r>
-            <a:endParaRPr lang="en-US" sz="880" dirty="0"/>
+            <a:endParaRPr lang="en-US" sz="1600" dirty="0"/>
           </a:p>
         </p:txBody>
       </p:sp>
@@ -5922,11 +5792,11 @@
           </a:bodyPr>
           <a:lstStyle/>
           <a:p>
-            <a:pPr indent="0" marL="0">
-              <a:buNone/>
-            </a:pPr>
-            <a:r>
-              <a:rPr lang="en-US" sz="980" dirty="0">
+            <a:pPr marL="0" indent="0">
+              <a:buNone/>
+            </a:pPr>
+            <a:r>
+              <a:rPr lang="en-US" sz="1200" dirty="0">
                 <a:solidFill>
                   <a:srgbClr val="14342C"/>
                 </a:solidFill>
@@ -5936,7 +5806,7 @@
               </a:rPr>
               <a:t>Dashboard BI interaktif dan rekomendasi kebijakan yang konkret, terukur, serta dapat ditindaklanjuti oleh Kepala Dinas Lingkungan Hidup DKI Jakarta.</a:t>
             </a:r>
-            <a:endParaRPr lang="en-US" sz="980" dirty="0"/>
+            <a:endParaRPr lang="en-US" sz="1200" dirty="0"/>
           </a:p>
         </p:txBody>
       </p:sp>
@@ -5986,15 +5856,15 @@
         </p:spPr>
         <p:txBody>
           <a:bodyPr wrap="square" lIns="0" tIns="0" rIns="0" bIns="0" rtlCol="0" anchor="ctr">
-            <a:normAutofit/>
+            <a:noAutofit/>
           </a:bodyPr>
           <a:lstStyle/>
           <a:p>
-            <a:pPr indent="0" marL="0">
-              <a:buNone/>
-            </a:pPr>
-            <a:r>
-              <a:rPr lang="en-US" sz="880" b="1" dirty="0">
+            <a:pPr marL="0" indent="0">
+              <a:buNone/>
+            </a:pPr>
+            <a:r>
+              <a:rPr lang="en-US" sz="1400" b="1" dirty="0">
                 <a:solidFill>
                   <a:srgbClr val="C34632"/>
                 </a:solidFill>
@@ -6004,7 +5874,7 @@
               </a:rPr>
               <a:t>Arah keputusan</a:t>
             </a:r>
-            <a:endParaRPr lang="en-US" sz="880" dirty="0"/>
+            <a:endParaRPr lang="en-US" sz="1400" dirty="0"/>
           </a:p>
         </p:txBody>
       </p:sp>
@@ -6027,15 +5897,15 @@
         </p:spPr>
         <p:txBody>
           <a:bodyPr wrap="square" lIns="254" tIns="254" rIns="254" bIns="254" rtlCol="0" anchor="ctr">
-            <a:normAutofit/>
+            <a:noAutofit/>
           </a:bodyPr>
           <a:lstStyle/>
           <a:p>
-            <a:pPr indent="0" marL="0">
-              <a:buNone/>
-            </a:pPr>
-            <a:r>
-              <a:rPr lang="en-US" sz="980" dirty="0">
+            <a:pPr marL="0" indent="0">
+              <a:buNone/>
+            </a:pPr>
+            <a:r>
+              <a:rPr lang="en-US" sz="1100" dirty="0">
                 <a:solidFill>
                   <a:srgbClr val="14342C"/>
                 </a:solidFill>
@@ -6043,15 +5913,59 @@
                 <a:ea typeface="Aptos" pitchFamily="34" charset="-122"/>
                 <a:cs typeface="Aptos" pitchFamily="34" charset="-120"/>
               </a:rPr>
-              <a:t>Intervensi berbasis risiko: lokasi, waktu, parameter dominan, dan mutu data — bukan keputusan umum tanpa prioritas.</a:t>
-            </a:r>
-            <a:endParaRPr lang="en-US" sz="980" dirty="0"/>
-          </a:p>
-        </p:txBody>
-      </p:sp>
-      <p:sp>
-        <p:nvSpPr>
-          <p:cNvPr id="25" name="Slide Number Placeholder 0"/>
+              <a:t>Intervensi berbasis risiko: lokasi, waktu, parameter dominan, dan </a:t>
+            </a:r>
+            <a:r>
+              <a:rPr lang="en-US" sz="1100" dirty="0" err="1">
+                <a:solidFill>
+                  <a:srgbClr val="14342C"/>
+                </a:solidFill>
+                <a:latin typeface="Aptos" pitchFamily="34" charset="0"/>
+                <a:ea typeface="Aptos" pitchFamily="34" charset="-122"/>
+                <a:cs typeface="Aptos" pitchFamily="34" charset="-120"/>
+              </a:rPr>
+              <a:t>mutu</a:t>
+            </a:r>
+            <a:r>
+              <a:rPr lang="en-US" sz="1100" dirty="0">
+                <a:solidFill>
+                  <a:srgbClr val="14342C"/>
+                </a:solidFill>
+                <a:latin typeface="Aptos" pitchFamily="34" charset="0"/>
+                <a:ea typeface="Aptos" pitchFamily="34" charset="-122"/>
+                <a:cs typeface="Aptos" pitchFamily="34" charset="-120"/>
+              </a:rPr>
+              <a:t> data. </a:t>
+            </a:r>
+            <a:r>
+              <a:rPr lang="en-US" sz="1100" dirty="0" err="1">
+                <a:solidFill>
+                  <a:srgbClr val="14342C"/>
+                </a:solidFill>
+                <a:latin typeface="Aptos" pitchFamily="34" charset="0"/>
+                <a:ea typeface="Aptos" pitchFamily="34" charset="-122"/>
+                <a:cs typeface="Aptos" pitchFamily="34" charset="-120"/>
+              </a:rPr>
+              <a:t>Bukan</a:t>
+            </a:r>
+            <a:r>
+              <a:rPr lang="en-US" sz="1100" dirty="0">
+                <a:solidFill>
+                  <a:srgbClr val="14342C"/>
+                </a:solidFill>
+                <a:latin typeface="Aptos" pitchFamily="34" charset="0"/>
+                <a:ea typeface="Aptos" pitchFamily="34" charset="-122"/>
+                <a:cs typeface="Aptos" pitchFamily="34" charset="-120"/>
+              </a:rPr>
+              <a:t> keputusan umum tanpa prioritas.</a:t>
+            </a:r>
+            <a:endParaRPr lang="en-US" sz="1100" dirty="0"/>
+          </a:p>
+        </p:txBody>
+      </p:sp>
+      <p:sp>
+        <p:nvSpPr>
+          <p:cNvPr id="29" name="Slide Number Placeholder 0"/>
           <p:cNvSpPr>
             <a:spLocks noGrp="1"/>
           </p:cNvSpPr>
@@ -6069,7 +5983,7 @@
           </a:prstGeom>
           <a:extLst>
             <a:ext uri="{C572A759-6A51-4108-AA02-DFA0A04FC94B}">
-              <ma14:wrappingTextBoxFlag xmlns:ma14="http://schemas.microsoft.com/office/mac/drawingml/2011/main" val="0"/>
+              <ma14:wrappingTextBoxFlag xmlns:ma14="http://schemas.microsoft.com/office/mac/drawingml/2011/main" xmlns="" val="0"/>
             </a:ext>
           </a:extLst>
         </p:spPr>
@@ -6090,7 +6004,7 @@
           <a:p>
             <a:pPr algn="l"/>
             <a:fld id="{F7021451-1387-4CA6-816F-3879F97B5CBC}" type="slidenum">
-              <a:rPr b="0" lang="en-US"/>
+              <a:rPr lang="en-US" b="0"/>
               <a:t>2</a:t>
             </a:fld>
             <a:endParaRPr lang="en-US"/>
@@ -6113,6 +6027,7 @@
         <a:solidFill>
           <a:srgbClr val="F7FAF8"/>
         </a:solidFill>
+        <a:effectLst/>
       </p:bgPr>
     </p:bg>
     <p:spTree>
@@ -6150,7 +6065,7 @@
           <a:bodyPr wrap="square" lIns="0" tIns="0" rIns="0" bIns="0" rtlCol="0" anchor="ctr"/>
           <a:lstStyle/>
           <a:p>
-            <a:pPr indent="0" marL="0">
+            <a:pPr marL="0" indent="0">
               <a:buNone/>
             </a:pPr>
             <a:r>
@@ -6191,7 +6106,7 @@
           </a:bodyPr>
           <a:lstStyle/>
           <a:p>
-            <a:pPr indent="0" marL="0">
+            <a:pPr marL="0" indent="0">
               <a:buNone/>
             </a:pPr>
             <a:r>
@@ -6258,7 +6173,7 @@
             <a:prstDash val="solid"/>
           </a:ln>
           <a:effectLst>
-            <a:outerShdw sx="100000" sy="100000" kx="0" ky="0" algn="bl" rotWithShape="0" blurRad="12700" dist="12700" dir="2700000">
+            <a:outerShdw blurRad="12700" dist="12700" dir="2700000" algn="bl" rotWithShape="0">
               <a:srgbClr val="86958E">
                 <a:alpha val="10000"/>
               </a:srgbClr>
@@ -6312,7 +6227,7 @@
           <a:bodyPr wrap="square" lIns="0" tIns="0" rIns="0" bIns="0" rtlCol="0" anchor="ctr"/>
           <a:lstStyle/>
           <a:p>
-            <a:pPr algn="ctr" indent="0" marL="0">
+            <a:pPr marL="0" indent="0" algn="ctr">
               <a:buNone/>
             </a:pPr>
             <a:r>
@@ -6353,11 +6268,11 @@
           </a:bodyPr>
           <a:lstStyle/>
           <a:p>
-            <a:pPr indent="0" marL="0">
-              <a:buNone/>
-            </a:pPr>
-            <a:r>
-              <a:rPr lang="en-US" sz="1010" b="1" dirty="0">
+            <a:pPr marL="0" indent="0">
+              <a:buNone/>
+            </a:pPr>
+            <a:r>
+              <a:rPr lang="en-US" sz="1400" b="1" dirty="0">
                 <a:solidFill>
                   <a:srgbClr val="14342C"/>
                 </a:solidFill>
@@ -6367,7 +6282,7 @@
               </a:rPr>
               <a:t>Sumber &amp; unduh data</a:t>
             </a:r>
-            <a:endParaRPr lang="en-US" sz="1010" dirty="0"/>
+            <a:endParaRPr lang="en-US" sz="1400" dirty="0"/>
           </a:p>
         </p:txBody>
       </p:sp>
@@ -6390,15 +6305,15 @@
         </p:spPr>
         <p:txBody>
           <a:bodyPr wrap="square" lIns="254" tIns="254" rIns="254" bIns="254" rtlCol="0" anchor="ctr">
-            <a:normAutofit/>
+            <a:noAutofit/>
           </a:bodyPr>
           <a:lstStyle/>
           <a:p>
-            <a:pPr indent="0" marL="0">
-              <a:buNone/>
-            </a:pPr>
-            <a:r>
-              <a:rPr lang="en-US" sz="820" dirty="0">
+            <a:pPr marL="0" indent="0">
+              <a:buNone/>
+            </a:pPr>
+            <a:r>
+              <a:rPr lang="en-US" sz="1100" dirty="0">
                 <a:solidFill>
                   <a:srgbClr val="58706A"/>
                 </a:solidFill>
@@ -6406,9 +6321,75 @@
                 <a:ea typeface="Aptos" pitchFamily="34" charset="-122"/>
                 <a:cs typeface="Aptos" pitchFamily="34" charset="-120"/>
               </a:rPr>
-              <a:t>Dataset ISPU DKI Jakarta diperoleh dari portal data terbuka pemerintah. File diunduh per tahun dalam format CSV/XLSX, lalu dikonsolidasikan.</a:t>
-            </a:r>
-            <a:endParaRPr lang="en-US" sz="820" dirty="0"/>
+              <a:t>Dataset ISPU DKI Jakarta diperoleh </a:t>
+            </a:r>
+            <a:r>
+              <a:rPr lang="en-US" sz="1100" dirty="0" err="1">
+                <a:solidFill>
+                  <a:srgbClr val="58706A"/>
+                </a:solidFill>
+                <a:latin typeface="Aptos" pitchFamily="34" charset="0"/>
+                <a:ea typeface="Aptos" pitchFamily="34" charset="-122"/>
+                <a:cs typeface="Aptos" pitchFamily="34" charset="-120"/>
+              </a:rPr>
+              <a:t>dari</a:t>
+            </a:r>
+            <a:r>
+              <a:rPr lang="en-US" sz="1100" dirty="0">
+                <a:solidFill>
+                  <a:srgbClr val="58706A"/>
+                </a:solidFill>
+                <a:latin typeface="Aptos" pitchFamily="34" charset="0"/>
+                <a:ea typeface="Aptos" pitchFamily="34" charset="-122"/>
+                <a:cs typeface="Aptos" pitchFamily="34" charset="-120"/>
+              </a:rPr>
+              <a:t> portal </a:t>
+            </a:r>
+            <a:r>
+              <a:rPr lang="en-US" sz="1100" dirty="0" err="1">
+                <a:solidFill>
+                  <a:srgbClr val="58706A"/>
+                </a:solidFill>
+                <a:latin typeface="Aptos" pitchFamily="34" charset="0"/>
+                <a:ea typeface="Aptos" pitchFamily="34" charset="-122"/>
+                <a:cs typeface="Aptos" pitchFamily="34" charset="-120"/>
+              </a:rPr>
+              <a:t>pemerintah</a:t>
+            </a:r>
+            <a:r>
+              <a:rPr lang="en-US" sz="1100" dirty="0">
+                <a:solidFill>
+                  <a:srgbClr val="58706A"/>
+                </a:solidFill>
+                <a:latin typeface="Aptos" pitchFamily="34" charset="0"/>
+                <a:ea typeface="Aptos" pitchFamily="34" charset="-122"/>
+                <a:cs typeface="Aptos" pitchFamily="34" charset="-120"/>
+              </a:rPr>
+              <a:t>. File </a:t>
+            </a:r>
+            <a:r>
+              <a:rPr lang="en-US" sz="1100" dirty="0" err="1">
+                <a:solidFill>
+                  <a:srgbClr val="58706A"/>
+                </a:solidFill>
+                <a:latin typeface="Aptos" pitchFamily="34" charset="0"/>
+                <a:ea typeface="Aptos" pitchFamily="34" charset="-122"/>
+                <a:cs typeface="Aptos" pitchFamily="34" charset="-120"/>
+              </a:rPr>
+              <a:t>diunduh</a:t>
+            </a:r>
+            <a:r>
+              <a:rPr lang="en-US" sz="1100" dirty="0">
+                <a:solidFill>
+                  <a:srgbClr val="58706A"/>
+                </a:solidFill>
+                <a:latin typeface="Aptos" pitchFamily="34" charset="0"/>
+                <a:ea typeface="Aptos" pitchFamily="34" charset="-122"/>
+                <a:cs typeface="Aptos" pitchFamily="34" charset="-120"/>
+              </a:rPr>
+              <a:t> dalam format CSV/XLSX, lalu dikonsolidasikan.</a:t>
+            </a:r>
+            <a:endParaRPr lang="en-US" sz="1100" dirty="0"/>
           </a:p>
         </p:txBody>
       </p:sp>
@@ -6438,7 +6419,7 @@
             <a:prstDash val="solid"/>
           </a:ln>
           <a:effectLst>
-            <a:outerShdw sx="100000" sy="100000" kx="0" ky="0" algn="bl" rotWithShape="0" blurRad="12700" dist="12700" dir="2700000">
+            <a:outerShdw blurRad="12700" dist="12700" dir="2700000" algn="bl" rotWithShape="0">
               <a:srgbClr val="86958E">
                 <a:alpha val="10000"/>
               </a:srgbClr>
@@ -6492,7 +6473,7 @@
           <a:bodyPr wrap="square" lIns="0" tIns="0" rIns="0" bIns="0" rtlCol="0" anchor="ctr"/>
           <a:lstStyle/>
           <a:p>
-            <a:pPr algn="ctr" indent="0" marL="0">
+            <a:pPr marL="0" indent="0" algn="ctr">
               <a:buNone/>
             </a:pPr>
             <a:r>
@@ -6533,11 +6514,11 @@
           </a:bodyPr>
           <a:lstStyle/>
           <a:p>
-            <a:pPr indent="0" marL="0">
-              <a:buNone/>
-            </a:pPr>
-            <a:r>
-              <a:rPr lang="en-US" sz="1010" b="1" dirty="0">
+            <a:pPr marL="0" indent="0">
+              <a:buNone/>
+            </a:pPr>
+            <a:r>
+              <a:rPr lang="en-US" sz="1400" b="1" dirty="0">
                 <a:solidFill>
                   <a:srgbClr val="14342C"/>
                 </a:solidFill>
@@ -6547,7 +6528,7 @@
               </a:rPr>
               <a:t>Pembacaan data</a:t>
             </a:r>
-            <a:endParaRPr lang="en-US" sz="1010" dirty="0"/>
+            <a:endParaRPr lang="en-US" sz="1400" dirty="0"/>
           </a:p>
         </p:txBody>
       </p:sp>
@@ -6570,15 +6551,15 @@
         </p:spPr>
         <p:txBody>
           <a:bodyPr wrap="square" lIns="254" tIns="254" rIns="254" bIns="254" rtlCol="0" anchor="ctr">
-            <a:normAutofit/>
+            <a:noAutofit/>
           </a:bodyPr>
           <a:lstStyle/>
           <a:p>
-            <a:pPr indent="0" marL="0">
-              <a:buNone/>
-            </a:pPr>
-            <a:r>
-              <a:rPr lang="en-US" sz="820" dirty="0">
+            <a:pPr marL="0" indent="0">
+              <a:buNone/>
+            </a:pPr>
+            <a:r>
+              <a:rPr lang="en-US" sz="1100" dirty="0">
                 <a:solidFill>
                   <a:srgbClr val="58706A"/>
                 </a:solidFill>
@@ -6586,9 +6567,97 @@
                 <a:ea typeface="Aptos" pitchFamily="34" charset="-122"/>
                 <a:cs typeface="Aptos" pitchFamily="34" charset="-120"/>
               </a:rPr>
-              <a:t>Data dibaca ke Python menggunakan pandas, tanggal diparsing, kolom numerik dikonversi, dan fitur tahun/bulan dibuat untuk analisis.</a:t>
-            </a:r>
-            <a:endParaRPr lang="en-US" sz="820" dirty="0"/>
+              <a:t>Data dibaca ke Python menggunakan pandas, </a:t>
+            </a:r>
+            <a:r>
+              <a:rPr lang="en-US" sz="1100" dirty="0" err="1">
+                <a:solidFill>
+                  <a:srgbClr val="58706A"/>
+                </a:solidFill>
+                <a:latin typeface="Aptos" pitchFamily="34" charset="0"/>
+                <a:ea typeface="Aptos" pitchFamily="34" charset="-122"/>
+                <a:cs typeface="Aptos" pitchFamily="34" charset="-120"/>
+              </a:rPr>
+              <a:t>tanggal</a:t>
+            </a:r>
+            <a:r>
+              <a:rPr lang="en-US" sz="1100" dirty="0">
+                <a:solidFill>
+                  <a:srgbClr val="58706A"/>
+                </a:solidFill>
+                <a:latin typeface="Aptos" pitchFamily="34" charset="0"/>
+                <a:ea typeface="Aptos" pitchFamily="34" charset="-122"/>
+                <a:cs typeface="Aptos" pitchFamily="34" charset="-120"/>
+              </a:rPr>
+              <a:t> </a:t>
+            </a:r>
+            <a:r>
+              <a:rPr lang="en-US" sz="1100" dirty="0" err="1">
+                <a:solidFill>
+                  <a:srgbClr val="58706A"/>
+                </a:solidFill>
+                <a:latin typeface="Aptos" pitchFamily="34" charset="0"/>
+                <a:ea typeface="Aptos" pitchFamily="34" charset="-122"/>
+                <a:cs typeface="Aptos" pitchFamily="34" charset="-120"/>
+              </a:rPr>
+              <a:t>diparsing</a:t>
+            </a:r>
+            <a:r>
+              <a:rPr lang="en-US" sz="1100" dirty="0">
+                <a:solidFill>
+                  <a:srgbClr val="58706A"/>
+                </a:solidFill>
+                <a:latin typeface="Aptos" pitchFamily="34" charset="0"/>
+                <a:ea typeface="Aptos" pitchFamily="34" charset="-122"/>
+                <a:cs typeface="Aptos" pitchFamily="34" charset="-120"/>
+              </a:rPr>
+              <a:t> dan kolom </a:t>
+            </a:r>
+            <a:r>
+              <a:rPr lang="en-US" sz="1100" dirty="0" err="1">
+                <a:solidFill>
+                  <a:srgbClr val="58706A"/>
+                </a:solidFill>
+                <a:latin typeface="Aptos" pitchFamily="34" charset="0"/>
+                <a:ea typeface="Aptos" pitchFamily="34" charset="-122"/>
+                <a:cs typeface="Aptos" pitchFamily="34" charset="-120"/>
+              </a:rPr>
+              <a:t>numerik</a:t>
+            </a:r>
+            <a:r>
+              <a:rPr lang="en-US" sz="1100" dirty="0">
+                <a:solidFill>
+                  <a:srgbClr val="58706A"/>
+                </a:solidFill>
+                <a:latin typeface="Aptos" pitchFamily="34" charset="0"/>
+                <a:ea typeface="Aptos" pitchFamily="34" charset="-122"/>
+                <a:cs typeface="Aptos" pitchFamily="34" charset="-120"/>
+              </a:rPr>
+              <a:t> </a:t>
+            </a:r>
+            <a:r>
+              <a:rPr lang="en-US" sz="1100" dirty="0" err="1">
+                <a:solidFill>
+                  <a:srgbClr val="58706A"/>
+                </a:solidFill>
+                <a:latin typeface="Aptos" pitchFamily="34" charset="0"/>
+                <a:ea typeface="Aptos" pitchFamily="34" charset="-122"/>
+                <a:cs typeface="Aptos" pitchFamily="34" charset="-120"/>
+              </a:rPr>
+              <a:t>dikonversi</a:t>
+            </a:r>
+            <a:r>
+              <a:rPr lang="en-US" sz="1100" dirty="0">
+                <a:solidFill>
+                  <a:srgbClr val="58706A"/>
+                </a:solidFill>
+                <a:latin typeface="Aptos" pitchFamily="34" charset="0"/>
+                <a:ea typeface="Aptos" pitchFamily="34" charset="-122"/>
+                <a:cs typeface="Aptos" pitchFamily="34" charset="-120"/>
+              </a:rPr>
+              <a:t>.</a:t>
+            </a:r>
+            <a:endParaRPr lang="en-US" sz="1100" dirty="0"/>
           </a:p>
         </p:txBody>
       </p:sp>
@@ -6618,7 +6687,7 @@
             <a:prstDash val="solid"/>
           </a:ln>
           <a:effectLst>
-            <a:outerShdw sx="100000" sy="100000" kx="0" ky="0" algn="bl" rotWithShape="0" blurRad="12700" dist="12700" dir="2700000">
+            <a:outerShdw blurRad="12700" dist="12700" dir="2700000" algn="bl" rotWithShape="0">
               <a:srgbClr val="86958E">
                 <a:alpha val="10000"/>
               </a:srgbClr>
@@ -6672,7 +6741,7 @@
           <a:bodyPr wrap="square" lIns="0" tIns="0" rIns="0" bIns="0" rtlCol="0" anchor="ctr"/>
           <a:lstStyle/>
           <a:p>
-            <a:pPr algn="ctr" indent="0" marL="0">
+            <a:pPr marL="0" indent="0" algn="ctr">
               <a:buNone/>
             </a:pPr>
             <a:r>
@@ -6713,11 +6782,11 @@
           </a:bodyPr>
           <a:lstStyle/>
           <a:p>
-            <a:pPr indent="0" marL="0">
-              <a:buNone/>
-            </a:pPr>
-            <a:r>
-              <a:rPr lang="en-US" sz="1010" b="1" dirty="0">
+            <a:pPr marL="0" indent="0">
+              <a:buNone/>
+            </a:pPr>
+            <a:r>
+              <a:rPr lang="en-US" sz="1400" b="1" dirty="0">
                 <a:solidFill>
                   <a:srgbClr val="14342C"/>
                 </a:solidFill>
@@ -6727,7 +6796,7 @@
               </a:rPr>
               <a:t>EDA &amp; validasi</a:t>
             </a:r>
-            <a:endParaRPr lang="en-US" sz="1010" dirty="0"/>
+            <a:endParaRPr lang="en-US" sz="1400" dirty="0"/>
           </a:p>
         </p:txBody>
       </p:sp>
@@ -6750,15 +6819,15 @@
         </p:spPr>
         <p:txBody>
           <a:bodyPr wrap="square" lIns="254" tIns="254" rIns="254" bIns="254" rtlCol="0" anchor="ctr">
-            <a:normAutofit/>
+            <a:noAutofit/>
           </a:bodyPr>
           <a:lstStyle/>
           <a:p>
-            <a:pPr indent="0" marL="0">
-              <a:buNone/>
-            </a:pPr>
-            <a:r>
-              <a:rPr lang="en-US" sz="820" dirty="0">
+            <a:pPr marL="0" indent="0">
+              <a:buNone/>
+            </a:pPr>
+            <a:r>
+              <a:rPr lang="en-US" sz="1100" dirty="0">
                 <a:solidFill>
                   <a:srgbClr val="58706A"/>
                 </a:solidFill>
@@ -6768,7 +6837,7 @@
               </a:rPr>
               <a:t>Dilakukan statistik deskriptif, distribusi kategori, nilai unik kategorik, serta validasi konsistensi tanggal, periode, max, critical, dan kategori.</a:t>
             </a:r>
-            <a:endParaRPr lang="en-US" sz="820" dirty="0"/>
+            <a:endParaRPr lang="en-US" sz="1100" dirty="0"/>
           </a:p>
         </p:txBody>
       </p:sp>
@@ -6798,7 +6867,7 @@
             <a:prstDash val="solid"/>
           </a:ln>
           <a:effectLst>
-            <a:outerShdw sx="100000" sy="100000" kx="0" ky="0" algn="bl" rotWithShape="0" blurRad="12700" dist="12700" dir="2700000">
+            <a:outerShdw blurRad="12700" dist="12700" dir="2700000" algn="bl" rotWithShape="0">
               <a:srgbClr val="86958E">
                 <a:alpha val="10000"/>
               </a:srgbClr>
@@ -6852,7 +6921,7 @@
           <a:bodyPr wrap="square" lIns="0" tIns="0" rIns="0" bIns="0" rtlCol="0" anchor="ctr"/>
           <a:lstStyle/>
           <a:p>
-            <a:pPr algn="ctr" indent="0" marL="0">
+            <a:pPr marL="0" indent="0" algn="ctr">
               <a:buNone/>
             </a:pPr>
             <a:r>
@@ -6889,15 +6958,15 @@
         </p:spPr>
         <p:txBody>
           <a:bodyPr wrap="square" lIns="0" tIns="0" rIns="0" bIns="0" rtlCol="0" anchor="ctr">
-            <a:normAutofit/>
+            <a:noAutofit/>
           </a:bodyPr>
           <a:lstStyle/>
           <a:p>
-            <a:pPr indent="0" marL="0">
-              <a:buNone/>
-            </a:pPr>
-            <a:r>
-              <a:rPr lang="en-US" sz="1010" b="1" dirty="0">
+            <a:pPr marL="0" indent="0">
+              <a:buNone/>
+            </a:pPr>
+            <a:r>
+              <a:rPr lang="en-US" sz="1400" b="1" dirty="0">
                 <a:solidFill>
                   <a:srgbClr val="14342C"/>
                 </a:solidFill>
@@ -6907,7 +6976,7 @@
               </a:rPr>
               <a:t>Dashboard &amp; rekomendasi</a:t>
             </a:r>
-            <a:endParaRPr lang="en-US" sz="1010" dirty="0"/>
+            <a:endParaRPr lang="en-US" sz="1400" dirty="0"/>
           </a:p>
         </p:txBody>
       </p:sp>
@@ -6930,15 +6999,15 @@
         </p:spPr>
         <p:txBody>
           <a:bodyPr wrap="square" lIns="254" tIns="254" rIns="254" bIns="254" rtlCol="0" anchor="ctr">
-            <a:normAutofit/>
+            <a:noAutofit/>
           </a:bodyPr>
           <a:lstStyle/>
           <a:p>
-            <a:pPr indent="0" marL="0">
-              <a:buNone/>
-            </a:pPr>
-            <a:r>
-              <a:rPr lang="en-US" sz="820" dirty="0">
+            <a:pPr marL="0" indent="0">
+              <a:buNone/>
+            </a:pPr>
+            <a:r>
+              <a:rPr lang="en-US" sz="1100" dirty="0">
                 <a:solidFill>
                   <a:srgbClr val="58706A"/>
                 </a:solidFill>
@@ -6948,7 +7017,7 @@
               </a:rPr>
               <a:t>Data bersih diekspor sebagai ispu_jakarta_analysis.csv dan digunakan pada dashboard Streamlit serta slide paparan.</a:t>
             </a:r>
-            <a:endParaRPr lang="en-US" sz="820" dirty="0"/>
+            <a:endParaRPr lang="en-US" sz="1100" dirty="0"/>
           </a:p>
         </p:txBody>
       </p:sp>
@@ -6960,8 +7029,8 @@
         </p:nvSpPr>
         <p:spPr>
           <a:xfrm>
-            <a:off x="713232" y="3154680"/>
-            <a:ext cx="2011680" cy="164592"/>
+            <a:off x="713232" y="3572279"/>
+            <a:ext cx="2852928" cy="210301"/>
           </a:xfrm>
           <a:prstGeom prst="rect">
             <a:avLst/>
@@ -6971,15 +7040,15 @@
         </p:spPr>
         <p:txBody>
           <a:bodyPr wrap="square" lIns="0" tIns="0" rIns="0" bIns="0" rtlCol="0" anchor="ctr">
-            <a:normAutofit/>
+            <a:noAutofit/>
           </a:bodyPr>
           <a:lstStyle/>
           <a:p>
-            <a:pPr indent="0" marL="0">
-              <a:buNone/>
-            </a:pPr>
-            <a:r>
-              <a:rPr lang="en-US" sz="720" b="1" dirty="0">
+            <a:pPr marL="0" indent="0">
+              <a:buNone/>
+            </a:pPr>
+            <a:r>
+              <a:rPr lang="en-US" b="1" dirty="0">
                 <a:solidFill>
                   <a:srgbClr val="197A5D"/>
                 </a:solidFill>
@@ -6989,7 +7058,7 @@
               </a:rPr>
               <a:t>TOOLS YANG DIGUNAKAN</a:t>
             </a:r>
-            <a:endParaRPr lang="en-US" sz="720" dirty="0"/>
+            <a:endParaRPr lang="en-US" dirty="0"/>
           </a:p>
         </p:txBody>
       </p:sp>
@@ -7001,7 +7070,7 @@
         </p:nvSpPr>
         <p:spPr>
           <a:xfrm>
-            <a:off x="777240" y="3493008"/>
+            <a:off x="777240" y="3910608"/>
             <a:ext cx="2148840" cy="960120"/>
           </a:xfrm>
           <a:prstGeom prst="roundRect">
@@ -7019,7 +7088,7 @@
             <a:prstDash val="solid"/>
           </a:ln>
           <a:effectLst>
-            <a:outerShdw sx="100000" sy="100000" kx="0" ky="0" algn="bl" rotWithShape="0" blurRad="12700" dist="12700" dir="2700000">
+            <a:outerShdw blurRad="12700" dist="12700" dir="2700000" algn="bl" rotWithShape="0">
               <a:srgbClr val="86958E">
                 <a:alpha val="10000"/>
               </a:srgbClr>
@@ -7035,8 +7104,8 @@
         </p:nvSpPr>
         <p:spPr>
           <a:xfrm>
-            <a:off x="923544" y="3602736"/>
-            <a:ext cx="1856232" cy="384048"/>
+            <a:off x="923544" y="4020336"/>
+            <a:ext cx="1856232" cy="384049"/>
           </a:xfrm>
           <a:prstGeom prst="rect">
             <a:avLst/>
@@ -7050,11 +7119,11 @@
           </a:bodyPr>
           <a:lstStyle/>
           <a:p>
-            <a:pPr indent="0" marL="0">
-              <a:buNone/>
-            </a:pPr>
-            <a:r>
-              <a:rPr lang="en-US" sz="2100" b="1" dirty="0">
+            <a:pPr marL="0" indent="0">
+              <a:buNone/>
+            </a:pPr>
+            <a:r>
+              <a:rPr lang="en-US" sz="2400" b="1" dirty="0">
                 <a:solidFill>
                   <a:srgbClr val="2B6CB0"/>
                 </a:solidFill>
@@ -7064,7 +7133,7 @@
               </a:rPr>
               <a:t>Python</a:t>
             </a:r>
-            <a:endParaRPr lang="en-US" sz="2100" dirty="0"/>
+            <a:endParaRPr lang="en-US" sz="2400" dirty="0"/>
           </a:p>
         </p:txBody>
       </p:sp>
@@ -7076,7 +7145,7 @@
         </p:nvSpPr>
         <p:spPr>
           <a:xfrm>
-            <a:off x="923544" y="4014216"/>
+            <a:off x="923544" y="4431816"/>
             <a:ext cx="1856232" cy="256032"/>
           </a:xfrm>
           <a:prstGeom prst="rect">
@@ -7091,11 +7160,11 @@
           </a:bodyPr>
           <a:lstStyle/>
           <a:p>
-            <a:pPr indent="0" marL="0">
-              <a:buNone/>
-            </a:pPr>
-            <a:r>
-              <a:rPr lang="en-US" sz="870" b="1" dirty="0">
+            <a:pPr marL="0" indent="0">
+              <a:buNone/>
+            </a:pPr>
+            <a:r>
+              <a:rPr lang="en-US" sz="1100" b="1" dirty="0">
                 <a:solidFill>
                   <a:srgbClr val="14342C"/>
                 </a:solidFill>
@@ -7105,7 +7174,7 @@
               </a:rPr>
               <a:t>pandas, numpy, plotly</a:t>
             </a:r>
-            <a:endParaRPr lang="en-US" sz="870" dirty="0"/>
+            <a:endParaRPr lang="en-US" sz="1100" dirty="0"/>
           </a:p>
         </p:txBody>
       </p:sp>
@@ -7117,7 +7186,7 @@
         </p:nvSpPr>
         <p:spPr>
           <a:xfrm>
-            <a:off x="3154680" y="3493008"/>
+            <a:off x="3154680" y="3910608"/>
             <a:ext cx="2148840" cy="960120"/>
           </a:xfrm>
           <a:prstGeom prst="roundRect">
@@ -7135,7 +7204,7 @@
             <a:prstDash val="solid"/>
           </a:ln>
           <a:effectLst>
-            <a:outerShdw sx="100000" sy="100000" kx="0" ky="0" algn="bl" rotWithShape="0" blurRad="12700" dist="12700" dir="2700000">
+            <a:outerShdw blurRad="12700" dist="12700" dir="2700000" algn="bl" rotWithShape="0">
               <a:srgbClr val="86958E">
                 <a:alpha val="10000"/>
               </a:srgbClr>
@@ -7151,8 +7220,8 @@
         </p:nvSpPr>
         <p:spPr>
           <a:xfrm>
-            <a:off x="3300984" y="3602736"/>
-            <a:ext cx="1856232" cy="384048"/>
+            <a:off x="3300984" y="4020336"/>
+            <a:ext cx="1856232" cy="384049"/>
           </a:xfrm>
           <a:prstGeom prst="rect">
             <a:avLst/>
@@ -7166,11 +7235,11 @@
           </a:bodyPr>
           <a:lstStyle/>
           <a:p>
-            <a:pPr indent="0" marL="0">
-              <a:buNone/>
-            </a:pPr>
-            <a:r>
-              <a:rPr lang="en-US" sz="2100" b="1" dirty="0">
+            <a:pPr marL="0" indent="0">
+              <a:buNone/>
+            </a:pPr>
+            <a:r>
+              <a:rPr lang="en-US" sz="2400" b="1" dirty="0">
                 <a:solidFill>
                   <a:srgbClr val="197A5D"/>
                 </a:solidFill>
@@ -7180,7 +7249,7 @@
               </a:rPr>
               <a:t>Streamlit</a:t>
             </a:r>
-            <a:endParaRPr lang="en-US" sz="2100" dirty="0"/>
+            <a:endParaRPr lang="en-US" sz="2400" dirty="0"/>
           </a:p>
         </p:txBody>
       </p:sp>
@@ -7192,7 +7261,7 @@
         </p:nvSpPr>
         <p:spPr>
           <a:xfrm>
-            <a:off x="3300984" y="4014216"/>
+            <a:off x="3300984" y="4431816"/>
             <a:ext cx="1856232" cy="256032"/>
           </a:xfrm>
           <a:prstGeom prst="rect">
@@ -7207,11 +7276,11 @@
           </a:bodyPr>
           <a:lstStyle/>
           <a:p>
-            <a:pPr indent="0" marL="0">
-              <a:buNone/>
-            </a:pPr>
-            <a:r>
-              <a:rPr lang="en-US" sz="870" b="1" dirty="0">
+            <a:pPr marL="0" indent="0">
+              <a:buNone/>
+            </a:pPr>
+            <a:r>
+              <a:rPr lang="en-US" sz="1100" b="1" dirty="0">
                 <a:solidFill>
                   <a:srgbClr val="14342C"/>
                 </a:solidFill>
@@ -7221,7 +7290,7 @@
               </a:rPr>
               <a:t>dashboard BI interaktif</a:t>
             </a:r>
-            <a:endParaRPr lang="en-US" sz="870" dirty="0"/>
+            <a:endParaRPr lang="en-US" sz="1100" dirty="0"/>
           </a:p>
         </p:txBody>
       </p:sp>
@@ -7233,7 +7302,7 @@
         </p:nvSpPr>
         <p:spPr>
           <a:xfrm>
-            <a:off x="5532120" y="3493008"/>
+            <a:off x="5532120" y="3910608"/>
             <a:ext cx="2148840" cy="960120"/>
           </a:xfrm>
           <a:prstGeom prst="roundRect">
@@ -7251,7 +7320,7 @@
             <a:prstDash val="solid"/>
           </a:ln>
           <a:effectLst>
-            <a:outerShdw sx="100000" sy="100000" kx="0" ky="0" algn="bl" rotWithShape="0" blurRad="12700" dist="12700" dir="2700000">
+            <a:outerShdw blurRad="12700" dist="12700" dir="2700000" algn="bl" rotWithShape="0">
               <a:srgbClr val="86958E">
                 <a:alpha val="10000"/>
               </a:srgbClr>
@@ -7267,8 +7336,8 @@
         </p:nvSpPr>
         <p:spPr>
           <a:xfrm>
-            <a:off x="5678424" y="3602736"/>
-            <a:ext cx="1856232" cy="384048"/>
+            <a:off x="5678424" y="4020336"/>
+            <a:ext cx="1856232" cy="384049"/>
           </a:xfrm>
           <a:prstGeom prst="rect">
             <a:avLst/>
@@ -7282,11 +7351,11 @@
           </a:bodyPr>
           <a:lstStyle/>
           <a:p>
-            <a:pPr indent="0" marL="0">
-              <a:buNone/>
-            </a:pPr>
-            <a:r>
-              <a:rPr lang="en-US" sz="2100" b="1" dirty="0">
+            <a:pPr marL="0" indent="0">
+              <a:buNone/>
+            </a:pPr>
+            <a:r>
+              <a:rPr lang="en-US" sz="2400" b="1" dirty="0">
                 <a:solidFill>
                   <a:srgbClr val="D68A00"/>
                 </a:solidFill>
@@ -7296,7 +7365,7 @@
               </a:rPr>
               <a:t>PowerPoint</a:t>
             </a:r>
-            <a:endParaRPr lang="en-US" sz="2100" dirty="0"/>
+            <a:endParaRPr lang="en-US" sz="2400" dirty="0"/>
           </a:p>
         </p:txBody>
       </p:sp>
@@ -7308,7 +7377,7 @@
         </p:nvSpPr>
         <p:spPr>
           <a:xfrm>
-            <a:off x="5678424" y="4014216"/>
+            <a:off x="5678424" y="4431816"/>
             <a:ext cx="1856232" cy="256032"/>
           </a:xfrm>
           <a:prstGeom prst="rect">
@@ -7323,11 +7392,11 @@
           </a:bodyPr>
           <a:lstStyle/>
           <a:p>
-            <a:pPr indent="0" marL="0">
-              <a:buNone/>
-            </a:pPr>
-            <a:r>
-              <a:rPr lang="en-US" sz="870" b="1" dirty="0">
+            <a:pPr marL="0" indent="0">
+              <a:buNone/>
+            </a:pPr>
+            <a:r>
+              <a:rPr lang="en-US" sz="1100" b="1" dirty="0">
                 <a:solidFill>
                   <a:srgbClr val="14342C"/>
                 </a:solidFill>
@@ -7337,7 +7406,7 @@
               </a:rPr>
               <a:t>paparan stakeholder</a:t>
             </a:r>
-            <a:endParaRPr lang="en-US" sz="870" dirty="0"/>
+            <a:endParaRPr lang="en-US" sz="1100" dirty="0"/>
           </a:p>
         </p:txBody>
       </p:sp>
@@ -7349,7 +7418,7 @@
         </p:nvSpPr>
         <p:spPr>
           <a:xfrm>
-            <a:off x="7909560" y="3493008"/>
+            <a:off x="7909560" y="3910608"/>
             <a:ext cx="2148840" cy="960120"/>
           </a:xfrm>
           <a:prstGeom prst="roundRect">
@@ -7367,7 +7436,7 @@
             <a:prstDash val="solid"/>
           </a:ln>
           <a:effectLst>
-            <a:outerShdw sx="100000" sy="100000" kx="0" ky="0" algn="bl" rotWithShape="0" blurRad="12700" dist="12700" dir="2700000">
+            <a:outerShdw blurRad="12700" dist="12700" dir="2700000" algn="bl" rotWithShape="0">
               <a:srgbClr val="86958E">
                 <a:alpha val="10000"/>
               </a:srgbClr>
@@ -7383,8 +7452,8 @@
         </p:nvSpPr>
         <p:spPr>
           <a:xfrm>
-            <a:off x="8055864" y="3602736"/>
-            <a:ext cx="1856232" cy="384048"/>
+            <a:off x="8055864" y="4020336"/>
+            <a:ext cx="1856232" cy="384049"/>
           </a:xfrm>
           <a:prstGeom prst="rect">
             <a:avLst/>
@@ -7398,11 +7467,11 @@
           </a:bodyPr>
           <a:lstStyle/>
           <a:p>
-            <a:pPr indent="0" marL="0">
-              <a:buNone/>
-            </a:pPr>
-            <a:r>
-              <a:rPr lang="en-US" sz="2100" b="1" dirty="0">
+            <a:pPr marL="0" indent="0">
+              <a:buNone/>
+            </a:pPr>
+            <a:r>
+              <a:rPr lang="en-US" sz="2400" b="1" dirty="0">
                 <a:solidFill>
                   <a:srgbClr val="C34632"/>
                 </a:solidFill>
@@ -7412,7 +7481,7 @@
               </a:rPr>
               <a:t>CSV</a:t>
             </a:r>
-            <a:endParaRPr lang="en-US" sz="2100" dirty="0"/>
+            <a:endParaRPr lang="en-US" sz="2400" dirty="0"/>
           </a:p>
         </p:txBody>
       </p:sp>
@@ -7424,7 +7493,7 @@
         </p:nvSpPr>
         <p:spPr>
           <a:xfrm>
-            <a:off x="8055864" y="4014216"/>
+            <a:off x="8055864" y="4431816"/>
             <a:ext cx="1856232" cy="256032"/>
           </a:xfrm>
           <a:prstGeom prst="rect">
@@ -7439,11 +7508,11 @@
           </a:bodyPr>
           <a:lstStyle/>
           <a:p>
-            <a:pPr indent="0" marL="0">
-              <a:buNone/>
-            </a:pPr>
-            <a:r>
-              <a:rPr lang="en-US" sz="870" b="1" dirty="0">
+            <a:pPr marL="0" indent="0">
+              <a:buNone/>
+            </a:pPr>
+            <a:r>
+              <a:rPr lang="en-US" sz="1100" b="1" dirty="0">
                 <a:solidFill>
                   <a:srgbClr val="14342C"/>
                 </a:solidFill>
@@ -7453,36 +7522,9 @@
               </a:rPr>
               <a:t>data bersih siap analisis</a:t>
             </a:r>
-            <a:endParaRPr lang="en-US" sz="870" dirty="0"/>
-          </a:p>
-        </p:txBody>
-      </p:sp>
-      <p:sp>
-        <p:nvSpPr>
-          <p:cNvPr id="38" name="Shape 36"/>
-          <p:cNvSpPr/>
-          <p:nvPr/>
-        </p:nvSpPr>
-        <p:spPr>
-          <a:xfrm>
-            <a:off x="777240" y="4892040"/>
-            <a:ext cx="10241280" cy="768096"/>
-          </a:xfrm>
-          <a:prstGeom prst="roundRect">
-            <a:avLst>
-              <a:gd name="adj" fmla="val 9524"/>
-            </a:avLst>
-          </a:prstGeom>
-          <a:solidFill>
-            <a:srgbClr val="102D26"/>
-          </a:solidFill>
-          <a:ln w="10160">
-            <a:solidFill>
-              <a:srgbClr val="102D26"/>
-            </a:solidFill>
-            <a:prstDash val="solid"/>
-          </a:ln>
-        </p:spPr>
+            <a:endParaRPr lang="en-US" sz="1100" dirty="0"/>
+          </a:p>
+        </p:txBody>
       </p:sp>
       <p:sp>
         <p:nvSpPr>
@@ -7492,8 +7534,8 @@
         </p:nvSpPr>
         <p:spPr>
           <a:xfrm>
-            <a:off x="1024128" y="5065776"/>
-            <a:ext cx="9692640" cy="384048"/>
+            <a:off x="310896" y="5071895"/>
+            <a:ext cx="9692640" cy="384049"/>
           </a:xfrm>
           <a:prstGeom prst="rect">
             <a:avLst/>
@@ -7503,11 +7545,11 @@
         </p:spPr>
         <p:txBody>
           <a:bodyPr wrap="square" lIns="254" tIns="254" rIns="254" bIns="254" rtlCol="0" anchor="t">
-            <a:normAutofit/>
+            <a:normAutofit fontScale="92500" lnSpcReduction="10000"/>
           </a:bodyPr>
           <a:lstStyle/>
           <a:p>
-            <a:pPr algn="l" indent="0" marL="0">
+            <a:pPr marL="0" indent="0" algn="l">
               <a:buNone/>
             </a:pPr>
             <a:r>
@@ -7524,7 +7566,7 @@
             <a:endParaRPr lang="en-US" sz="980" dirty="0"/>
           </a:p>
           <a:p>
-            <a:pPr algn="l" indent="0" marL="0">
+            <a:pPr marL="0" indent="0" algn="l">
               <a:buNone/>
             </a:pPr>
             <a:r>
@@ -7541,7 +7583,7 @@
             <a:endParaRPr lang="en-US" sz="980" dirty="0"/>
           </a:p>
           <a:p>
-            <a:pPr algn="l" indent="0" marL="0">
+            <a:pPr marL="0" indent="0" algn="l">
               <a:buNone/>
             </a:pPr>
             <a:r>
@@ -7609,7 +7651,7 @@
           </a:bodyPr>
           <a:lstStyle/>
           <a:p>
-            <a:pPr indent="0" marL="0">
+            <a:pPr marL="0" indent="0">
               <a:buNone/>
             </a:pPr>
             <a:r>
@@ -7646,11 +7688,11 @@
         </p:spPr>
         <p:txBody>
           <a:bodyPr wrap="square" lIns="254" tIns="254" rIns="254" bIns="254" rtlCol="0" anchor="ctr">
-            <a:normAutofit/>
+            <a:normAutofit fontScale="55000" lnSpcReduction="20000"/>
           </a:bodyPr>
           <a:lstStyle/>
           <a:p>
-            <a:pPr indent="0" marL="0">
+            <a:pPr marL="0" indent="0">
               <a:buNone/>
             </a:pPr>
             <a:r>
@@ -7670,7 +7712,7 @@
       </p:sp>
       <p:sp>
         <p:nvSpPr>
-          <p:cNvPr id="25" name="Slide Number Placeholder 0"/>
+          <p:cNvPr id="43" name="Slide Number Placeholder 0"/>
           <p:cNvSpPr>
             <a:spLocks noGrp="1"/>
           </p:cNvSpPr>
@@ -7688,7 +7730,7 @@
           </a:prstGeom>
           <a:extLst>
             <a:ext uri="{C572A759-6A51-4108-AA02-DFA0A04FC94B}">
-              <ma14:wrappingTextBoxFlag xmlns:ma14="http://schemas.microsoft.com/office/mac/drawingml/2011/main" val="0"/>
+              <ma14:wrappingTextBoxFlag xmlns:ma14="http://schemas.microsoft.com/office/mac/drawingml/2011/main" xmlns="" val="0"/>
             </a:ext>
           </a:extLst>
         </p:spPr>
@@ -7709,7 +7751,7 @@
           <a:p>
             <a:pPr algn="l"/>
             <a:fld id="{F7021451-1387-4CA6-816F-3879F97B5CBC}" type="slidenum">
-              <a:rPr b="0" lang="en-US"/>
+              <a:rPr lang="en-US" b="0"/>
               <a:t>3</a:t>
             </a:fld>
             <a:endParaRPr lang="en-US"/>
@@ -7732,6 +7774,7 @@
         <a:solidFill>
           <a:srgbClr val="F7FAF8"/>
         </a:solidFill>
+        <a:effectLst/>
       </p:bgPr>
     </p:bg>
     <p:spTree>
@@ -7769,7 +7812,7 @@
           <a:bodyPr wrap="square" lIns="0" tIns="0" rIns="0" bIns="0" rtlCol="0" anchor="ctr"/>
           <a:lstStyle/>
           <a:p>
-            <a:pPr indent="0" marL="0">
+            <a:pPr marL="0" indent="0">
               <a:buNone/>
             </a:pPr>
             <a:r>
@@ -7810,7 +7853,7 @@
           </a:bodyPr>
           <a:lstStyle/>
           <a:p>
-            <a:pPr indent="0" marL="0">
+            <a:pPr marL="0" indent="0">
               <a:buNone/>
             </a:pPr>
             <a:r>
@@ -7899,11 +7942,11 @@
           </a:bodyPr>
           <a:lstStyle/>
           <a:p>
-            <a:pPr indent="0" marL="0">
-              <a:buNone/>
-            </a:pPr>
-            <a:r>
-              <a:rPr lang="en-US" sz="720" b="1" dirty="0">
+            <a:pPr marL="0" indent="0">
+              <a:buNone/>
+            </a:pPr>
+            <a:r>
+              <a:rPr lang="en-US" sz="1400" b="1" dirty="0">
                 <a:solidFill>
                   <a:srgbClr val="14342C"/>
                 </a:solidFill>
@@ -7913,7 +7956,7 @@
               </a:rPr>
               <a:t>Masalah kualitas data</a:t>
             </a:r>
-            <a:endParaRPr lang="en-US" sz="720" dirty="0"/>
+            <a:endParaRPr lang="en-US" sz="1400" dirty="0"/>
           </a:p>
         </p:txBody>
       </p:sp>
@@ -7961,15 +8004,15 @@
         </p:spPr>
         <p:txBody>
           <a:bodyPr wrap="square" lIns="0" tIns="0" rIns="0" bIns="0" rtlCol="0" anchor="ctr">
-            <a:normAutofit/>
+            <a:noAutofit/>
           </a:bodyPr>
           <a:lstStyle/>
           <a:p>
-            <a:pPr indent="0" marL="0">
-              <a:buNone/>
-            </a:pPr>
-            <a:r>
-              <a:rPr lang="en-US" sz="720" b="1" dirty="0">
+            <a:pPr marL="0" indent="0">
+              <a:buNone/>
+            </a:pPr>
+            <a:r>
+              <a:rPr lang="en-US" sz="1400" b="1" dirty="0">
                 <a:solidFill>
                   <a:srgbClr val="14342C"/>
                 </a:solidFill>
@@ -7979,7 +8022,7 @@
               </a:rPr>
               <a:t>Jumlah terdampak</a:t>
             </a:r>
-            <a:endParaRPr lang="en-US" sz="720" dirty="0"/>
+            <a:endParaRPr lang="en-US" sz="1400" dirty="0"/>
           </a:p>
         </p:txBody>
       </p:sp>
@@ -8031,11 +8074,11 @@
           </a:bodyPr>
           <a:lstStyle/>
           <a:p>
-            <a:pPr indent="0" marL="0">
-              <a:buNone/>
-            </a:pPr>
-            <a:r>
-              <a:rPr lang="en-US" sz="720" b="1" dirty="0">
+            <a:pPr marL="0" indent="0">
+              <a:buNone/>
+            </a:pPr>
+            <a:r>
+              <a:rPr lang="en-US" sz="1400" b="1" dirty="0">
                 <a:solidFill>
                   <a:srgbClr val="14342C"/>
                 </a:solidFill>
@@ -8045,7 +8088,7 @@
               </a:rPr>
               <a:t>Strategi penanganan</a:t>
             </a:r>
-            <a:endParaRPr lang="en-US" sz="720" dirty="0"/>
+            <a:endParaRPr lang="en-US" sz="1400" dirty="0"/>
           </a:p>
         </p:txBody>
       </p:sp>
@@ -8097,11 +8140,11 @@
           </a:bodyPr>
           <a:lstStyle/>
           <a:p>
-            <a:pPr indent="0" marL="0">
-              <a:buNone/>
-            </a:pPr>
-            <a:r>
-              <a:rPr lang="en-US" sz="720" dirty="0">
+            <a:pPr marL="0" indent="0">
+              <a:buNone/>
+            </a:pPr>
+            <a:r>
+              <a:rPr lang="en-US" sz="1200" dirty="0">
                 <a:solidFill>
                   <a:srgbClr val="14342C"/>
                 </a:solidFill>
@@ -8111,7 +8154,7 @@
               </a:rPr>
               <a:t>PM2.5 missing</a:t>
             </a:r>
-            <a:endParaRPr lang="en-US" sz="720" dirty="0"/>
+            <a:endParaRPr lang="en-US" sz="1200" dirty="0"/>
           </a:p>
         </p:txBody>
       </p:sp>
@@ -8163,11 +8206,11 @@
           </a:bodyPr>
           <a:lstStyle/>
           <a:p>
-            <a:pPr indent="0" marL="0">
-              <a:buNone/>
-            </a:pPr>
-            <a:r>
-              <a:rPr lang="en-US" sz="720" dirty="0">
+            <a:pPr marL="0" indent="0">
+              <a:buNone/>
+            </a:pPr>
+            <a:r>
+              <a:rPr lang="en-US" sz="1200" dirty="0">
                 <a:solidFill>
                   <a:srgbClr val="14342C"/>
                 </a:solidFill>
@@ -8177,7 +8220,7 @@
               </a:rPr>
               <a:t>9.059</a:t>
             </a:r>
-            <a:endParaRPr lang="en-US" sz="720" dirty="0"/>
+            <a:endParaRPr lang="en-US" sz="1200" dirty="0"/>
           </a:p>
         </p:txBody>
       </p:sp>
@@ -8229,11 +8272,11 @@
           </a:bodyPr>
           <a:lstStyle/>
           <a:p>
-            <a:pPr indent="0" marL="0">
-              <a:buNone/>
-            </a:pPr>
-            <a:r>
-              <a:rPr lang="en-US" sz="720" dirty="0">
+            <a:pPr marL="0" indent="0">
+              <a:buNone/>
+            </a:pPr>
+            <a:r>
+              <a:rPr lang="en-US" sz="1200" dirty="0">
                 <a:solidFill>
                   <a:srgbClr val="14342C"/>
                 </a:solidFill>
@@ -8243,7 +8286,7 @@
               </a:rPr>
               <a:t>Tidak diimputasi; analisis PM2.5 hanya pada data tersedia</a:t>
             </a:r>
-            <a:endParaRPr lang="en-US" sz="720" dirty="0"/>
+            <a:endParaRPr lang="en-US" sz="1200" dirty="0"/>
           </a:p>
         </p:txBody>
       </p:sp>
@@ -8295,11 +8338,11 @@
           </a:bodyPr>
           <a:lstStyle/>
           <a:p>
-            <a:pPr indent="0" marL="0">
-              <a:buNone/>
-            </a:pPr>
-            <a:r>
-              <a:rPr lang="en-US" sz="720" dirty="0">
+            <a:pPr marL="0" indent="0">
+              <a:buNone/>
+            </a:pPr>
+            <a:r>
+              <a:rPr lang="en-US" sz="1200" dirty="0">
                 <a:solidFill>
                   <a:srgbClr val="14342C"/>
                 </a:solidFill>
@@ -8309,7 +8352,7 @@
               </a:rPr>
               <a:t>Max mismatch</a:t>
             </a:r>
-            <a:endParaRPr lang="en-US" sz="720" dirty="0"/>
+            <a:endParaRPr lang="en-US" sz="1200" dirty="0"/>
           </a:p>
         </p:txBody>
       </p:sp>
@@ -8361,11 +8404,11 @@
           </a:bodyPr>
           <a:lstStyle/>
           <a:p>
-            <a:pPr indent="0" marL="0">
-              <a:buNone/>
-            </a:pPr>
-            <a:r>
-              <a:rPr lang="en-US" sz="720" dirty="0">
+            <a:pPr marL="0" indent="0">
+              <a:buNone/>
+            </a:pPr>
+            <a:r>
+              <a:rPr lang="en-US" sz="1200" dirty="0">
                 <a:solidFill>
                   <a:srgbClr val="14342C"/>
                 </a:solidFill>
@@ -8375,7 +8418,7 @@
               </a:rPr>
               <a:t>1.378</a:t>
             </a:r>
-            <a:endParaRPr lang="en-US" sz="720" dirty="0"/>
+            <a:endParaRPr lang="en-US" sz="1200" dirty="0"/>
           </a:p>
         </p:txBody>
       </p:sp>
@@ -8427,11 +8470,11 @@
           </a:bodyPr>
           <a:lstStyle/>
           <a:p>
-            <a:pPr indent="0" marL="0">
-              <a:buNone/>
-            </a:pPr>
-            <a:r>
-              <a:rPr lang="en-US" sz="720" dirty="0">
+            <a:pPr marL="0" indent="0">
+              <a:buNone/>
+            </a:pPr>
+            <a:r>
+              <a:rPr lang="en-US" sz="1200" dirty="0">
                 <a:solidFill>
                   <a:srgbClr val="14342C"/>
                 </a:solidFill>
@@ -8441,7 +8484,7 @@
               </a:rPr>
               <a:t>Gunakan max_recomputed sebagai ISPU tervalidasi</a:t>
             </a:r>
-            <a:endParaRPr lang="en-US" sz="720" dirty="0"/>
+            <a:endParaRPr lang="en-US" sz="1200" dirty="0"/>
           </a:p>
         </p:txBody>
       </p:sp>
@@ -8493,11 +8536,11 @@
           </a:bodyPr>
           <a:lstStyle/>
           <a:p>
-            <a:pPr indent="0" marL="0">
-              <a:buNone/>
-            </a:pPr>
-            <a:r>
-              <a:rPr lang="en-US" sz="720" dirty="0">
+            <a:pPr marL="0" indent="0">
+              <a:buNone/>
+            </a:pPr>
+            <a:r>
+              <a:rPr lang="en-US" sz="1200" dirty="0">
                 <a:solidFill>
                   <a:srgbClr val="14342C"/>
                 </a:solidFill>
@@ -8507,7 +8550,7 @@
               </a:rPr>
               <a:t>Critical mismatch</a:t>
             </a:r>
-            <a:endParaRPr lang="en-US" sz="720" dirty="0"/>
+            <a:endParaRPr lang="en-US" sz="1200" dirty="0"/>
           </a:p>
         </p:txBody>
       </p:sp>
@@ -8559,11 +8602,11 @@
           </a:bodyPr>
           <a:lstStyle/>
           <a:p>
-            <a:pPr indent="0" marL="0">
-              <a:buNone/>
-            </a:pPr>
-            <a:r>
-              <a:rPr lang="en-US" sz="720" dirty="0">
+            <a:pPr marL="0" indent="0">
+              <a:buNone/>
+            </a:pPr>
+            <a:r>
+              <a:rPr lang="en-US" sz="1200" dirty="0">
                 <a:solidFill>
                   <a:srgbClr val="14342C"/>
                 </a:solidFill>
@@ -8573,7 +8616,7 @@
               </a:rPr>
               <a:t>1.246</a:t>
             </a:r>
-            <a:endParaRPr lang="en-US" sz="720" dirty="0"/>
+            <a:endParaRPr lang="en-US" sz="1200" dirty="0"/>
           </a:p>
         </p:txBody>
       </p:sp>
@@ -8625,11 +8668,11 @@
           </a:bodyPr>
           <a:lstStyle/>
           <a:p>
-            <a:pPr indent="0" marL="0">
-              <a:buNone/>
-            </a:pPr>
-            <a:r>
-              <a:rPr lang="en-US" sz="720" dirty="0">
+            <a:pPr marL="0" indent="0">
+              <a:buNone/>
+            </a:pPr>
+            <a:r>
+              <a:rPr lang="en-US" sz="1200" dirty="0">
                 <a:solidFill>
                   <a:srgbClr val="14342C"/>
                 </a:solidFill>
@@ -8639,7 +8682,7 @@
               </a:rPr>
               <a:t>Gunakan critical_recomputed sebagai pencemar dominan</a:t>
             </a:r>
-            <a:endParaRPr lang="en-US" sz="720" dirty="0"/>
+            <a:endParaRPr lang="en-US" sz="1200" dirty="0"/>
           </a:p>
         </p:txBody>
       </p:sp>
@@ -8691,11 +8734,11 @@
           </a:bodyPr>
           <a:lstStyle/>
           <a:p>
-            <a:pPr indent="0" marL="0">
-              <a:buNone/>
-            </a:pPr>
-            <a:r>
-              <a:rPr lang="en-US" sz="720" dirty="0">
+            <a:pPr marL="0" indent="0">
+              <a:buNone/>
+            </a:pPr>
+            <a:r>
+              <a:rPr lang="en-US" sz="1200" dirty="0">
                 <a:solidFill>
                   <a:srgbClr val="14342C"/>
                 </a:solidFill>
@@ -8705,7 +8748,7 @@
               </a:rPr>
               <a:t>Tanggal-periode mismatch</a:t>
             </a:r>
-            <a:endParaRPr lang="en-US" sz="720" dirty="0"/>
+            <a:endParaRPr lang="en-US" sz="1200" dirty="0"/>
           </a:p>
         </p:txBody>
       </p:sp>
@@ -8757,11 +8800,11 @@
           </a:bodyPr>
           <a:lstStyle/>
           <a:p>
-            <a:pPr indent="0" marL="0">
-              <a:buNone/>
-            </a:pPr>
-            <a:r>
-              <a:rPr lang="en-US" sz="720" dirty="0">
+            <a:pPr marL="0" indent="0">
+              <a:buNone/>
+            </a:pPr>
+            <a:r>
+              <a:rPr lang="en-US" sz="1200" dirty="0">
                 <a:solidFill>
                   <a:srgbClr val="14342C"/>
                 </a:solidFill>
@@ -8771,7 +8814,7 @@
               </a:rPr>
               <a:t>172</a:t>
             </a:r>
-            <a:endParaRPr lang="en-US" sz="720" dirty="0"/>
+            <a:endParaRPr lang="en-US" sz="1200" dirty="0"/>
           </a:p>
         </p:txBody>
       </p:sp>
@@ -8823,11 +8866,11 @@
           </a:bodyPr>
           <a:lstStyle/>
           <a:p>
-            <a:pPr indent="0" marL="0">
-              <a:buNone/>
-            </a:pPr>
-            <a:r>
-              <a:rPr lang="en-US" sz="720" dirty="0">
+            <a:pPr marL="0" indent="0">
+              <a:buNone/>
+            </a:pPr>
+            <a:r>
+              <a:rPr lang="en-US" sz="1200" dirty="0">
                 <a:solidFill>
                   <a:srgbClr val="14342C"/>
                 </a:solidFill>
@@ -8837,7 +8880,7 @@
               </a:rPr>
               <a:t>Koreksi deterministik/flag audit</a:t>
             </a:r>
-            <a:endParaRPr lang="en-US" sz="720" dirty="0"/>
+            <a:endParaRPr lang="en-US" sz="1200" dirty="0"/>
           </a:p>
         </p:txBody>
       </p:sp>
@@ -8889,11 +8932,11 @@
           </a:bodyPr>
           <a:lstStyle/>
           <a:p>
-            <a:pPr indent="0" marL="0">
-              <a:buNone/>
-            </a:pPr>
-            <a:r>
-              <a:rPr lang="en-US" sz="720" dirty="0">
+            <a:pPr marL="0" indent="0">
+              <a:buNone/>
+            </a:pPr>
+            <a:r>
+              <a:rPr lang="en-US" sz="1200" dirty="0">
                 <a:solidFill>
                   <a:srgbClr val="14342C"/>
                 </a:solidFill>
@@ -8903,7 +8946,7 @@
               </a:rPr>
               <a:t>Duplikat kunci harian-stasiun</a:t>
             </a:r>
-            <a:endParaRPr lang="en-US" sz="720" dirty="0"/>
+            <a:endParaRPr lang="en-US" sz="1200" dirty="0"/>
           </a:p>
         </p:txBody>
       </p:sp>
@@ -8955,11 +8998,11 @@
           </a:bodyPr>
           <a:lstStyle/>
           <a:p>
-            <a:pPr indent="0" marL="0">
-              <a:buNone/>
-            </a:pPr>
-            <a:r>
-              <a:rPr lang="en-US" sz="720" dirty="0">
+            <a:pPr marL="0" indent="0">
+              <a:buNone/>
+            </a:pPr>
+            <a:r>
+              <a:rPr lang="en-US" sz="1200" dirty="0">
                 <a:solidFill>
                   <a:srgbClr val="14342C"/>
                 </a:solidFill>
@@ -8969,7 +9012,7 @@
               </a:rPr>
               <a:t>640</a:t>
             </a:r>
-            <a:endParaRPr lang="en-US" sz="720" dirty="0"/>
+            <a:endParaRPr lang="en-US" sz="1200" dirty="0"/>
           </a:p>
         </p:txBody>
       </p:sp>
@@ -9021,11 +9064,11 @@
           </a:bodyPr>
           <a:lstStyle/>
           <a:p>
-            <a:pPr indent="0" marL="0">
-              <a:buNone/>
-            </a:pPr>
-            <a:r>
-              <a:rPr lang="en-US" sz="720" dirty="0">
+            <a:pPr marL="0" indent="0">
+              <a:buNone/>
+            </a:pPr>
+            <a:r>
+              <a:rPr lang="en-US" sz="1200" dirty="0">
                 <a:solidFill>
                   <a:srgbClr val="14342C"/>
                 </a:solidFill>
@@ -9035,23 +9078,29 @@
               </a:rPr>
               <a:t>Flag, tidak digabung otomatis</a:t>
             </a:r>
-            <a:endParaRPr lang="en-US" sz="720" dirty="0"/>
+            <a:endParaRPr lang="en-US" sz="1200" dirty="0"/>
           </a:p>
         </p:txBody>
       </p:sp>
       <p:graphicFrame>
         <p:nvGraphicFramePr>
-          <p:cNvPr id="41" name="Chart 0" descr=""/>
+          <p:cNvPr id="41" name="Chart 0"/>
           <p:cNvGraphicFramePr/>
-          <p:nvPr/>
+          <p:nvPr>
+            <p:extLst>
+              <p:ext uri="{D42A27DB-BD31-4B8C-83A1-F6EECF244321}">
+                <p14:modId xmlns:p14="http://schemas.microsoft.com/office/powerpoint/2010/main" val="2385839761"/>
+              </p:ext>
+            </p:extLst>
+          </p:nvPr>
         </p:nvGraphicFramePr>
         <p:xfrm>
-          <a:off x="7818120" y="1371600"/>
-          <a:ext cx="3429000" cy="2331720"/>
+          <a:off x="7593980" y="1371600"/>
+          <a:ext cx="3653140" cy="2770632"/>
         </p:xfrm>
-        <a:graphic xmlns:a="http://schemas.openxmlformats.org/drawingml/2006/main">
+        <a:graphic>
           <a:graphicData uri="http://schemas.openxmlformats.org/drawingml/2006/chart">
-            <c:chart xmlns:c="http://schemas.openxmlformats.org/drawingml/2006/chart" r:id="rId1"/>
+            <c:chart xmlns:c="http://schemas.openxmlformats.org/drawingml/2006/chart" xmlns:r="http://schemas.openxmlformats.org/officeDocument/2006/relationships" r:id="rId3"/>
           </a:graphicData>
         </a:graphic>
       </p:graphicFrame>
@@ -9101,15 +9150,15 @@
         </p:spPr>
         <p:txBody>
           <a:bodyPr wrap="square" lIns="0" tIns="0" rIns="0" bIns="0" rtlCol="0" anchor="ctr">
-            <a:normAutofit/>
+            <a:noAutofit/>
           </a:bodyPr>
           <a:lstStyle/>
           <a:p>
-            <a:pPr indent="0" marL="0">
-              <a:buNone/>
-            </a:pPr>
-            <a:r>
-              <a:rPr lang="en-US" sz="880" b="1" dirty="0">
+            <a:pPr marL="0" indent="0">
+              <a:buNone/>
+            </a:pPr>
+            <a:r>
+              <a:rPr lang="en-US" sz="1400" b="1" dirty="0">
                 <a:solidFill>
                   <a:srgbClr val="197A5D"/>
                 </a:solidFill>
@@ -9119,7 +9168,7 @@
               </a:rPr>
               <a:t>Validasi konsistensi antar kolom</a:t>
             </a:r>
-            <a:endParaRPr lang="en-US" sz="880" dirty="0"/>
+            <a:endParaRPr lang="en-US" sz="1400" dirty="0"/>
           </a:p>
         </p:txBody>
       </p:sp>
@@ -9142,15 +9191,15 @@
         </p:spPr>
         <p:txBody>
           <a:bodyPr wrap="square" lIns="254" tIns="254" rIns="254" bIns="254" rtlCol="0" anchor="ctr">
-            <a:normAutofit/>
+            <a:noAutofit/>
           </a:bodyPr>
           <a:lstStyle/>
           <a:p>
-            <a:pPr indent="0" marL="0">
-              <a:buNone/>
-            </a:pPr>
-            <a:r>
-              <a:rPr lang="en-US" sz="980" dirty="0">
+            <a:pPr marL="0" indent="0">
+              <a:buNone/>
+            </a:pPr>
+            <a:r>
+              <a:rPr lang="en-US" sz="1200" dirty="0">
                 <a:solidFill>
                   <a:srgbClr val="14342C"/>
                 </a:solidFill>
@@ -9160,7 +9209,7 @@
               </a:rPr>
               <a:t>Max divalidasi ulang menjadi max_recomputed; critical divalidasi menjadi critical_recomputed; periode_data diperiksa terhadap tanggal_validated; duplikasi kunci tanggal-stasiun diberi flag audit.</a:t>
             </a:r>
-            <a:endParaRPr lang="en-US" sz="980" dirty="0"/>
+            <a:endParaRPr lang="en-US" sz="1200" dirty="0"/>
           </a:p>
         </p:txBody>
       </p:sp>
@@ -9210,15 +9259,15 @@
         </p:spPr>
         <p:txBody>
           <a:bodyPr wrap="square" lIns="0" tIns="0" rIns="0" bIns="0" rtlCol="0" anchor="ctr">
-            <a:normAutofit/>
+            <a:noAutofit/>
           </a:bodyPr>
           <a:lstStyle/>
           <a:p>
-            <a:pPr indent="0" marL="0">
-              <a:buNone/>
-            </a:pPr>
-            <a:r>
-              <a:rPr lang="en-US" sz="880" b="1" dirty="0">
+            <a:pPr marL="0" indent="0">
+              <a:buNone/>
+            </a:pPr>
+            <a:r>
+              <a:rPr lang="en-US" sz="1400" b="1" dirty="0">
                 <a:solidFill>
                   <a:srgbClr val="D68A00"/>
                 </a:solidFill>
@@ -9228,7 +9277,7 @@
               </a:rPr>
               <a:t>Keputusan PM2.5</a:t>
             </a:r>
-            <a:endParaRPr lang="en-US" sz="880" dirty="0"/>
+            <a:endParaRPr lang="en-US" sz="1400" dirty="0"/>
           </a:p>
         </p:txBody>
       </p:sp>
@@ -9255,11 +9304,11 @@
           </a:bodyPr>
           <a:lstStyle/>
           <a:p>
-            <a:pPr indent="0" marL="0">
-              <a:buNone/>
-            </a:pPr>
-            <a:r>
-              <a:rPr lang="en-US" sz="980" dirty="0">
+            <a:pPr marL="0" indent="0">
+              <a:buNone/>
+            </a:pPr>
+            <a:r>
+              <a:rPr lang="en-US" sz="1200" dirty="0">
                 <a:solidFill>
                   <a:srgbClr val="14342C"/>
                 </a:solidFill>
@@ -9269,7 +9318,7 @@
               </a:rPr>
               <a:t>PM2.5 missing 9.059 baris (62.2%). Tidak diimputasi; analisis PM2.5 dibatasi pada 2020-02-01 s.d. 2023-11-30 ketika data tersedia.</a:t>
             </a:r>
-            <a:endParaRPr lang="en-US" sz="980" dirty="0"/>
+            <a:endParaRPr lang="en-US" sz="1200" dirty="0"/>
           </a:p>
         </p:txBody>
       </p:sp>
@@ -9319,15 +9368,15 @@
         </p:spPr>
         <p:txBody>
           <a:bodyPr wrap="square" lIns="0" tIns="0" rIns="0" bIns="0" rtlCol="0" anchor="ctr">
-            <a:normAutofit/>
+            <a:noAutofit/>
           </a:bodyPr>
           <a:lstStyle/>
           <a:p>
-            <a:pPr indent="0" marL="0">
-              <a:buNone/>
-            </a:pPr>
-            <a:r>
-              <a:rPr lang="en-US" sz="880" b="1" dirty="0">
+            <a:pPr marL="0" indent="0">
+              <a:buNone/>
+            </a:pPr>
+            <a:r>
+              <a:rPr lang="en-US" sz="1400" b="1" dirty="0">
                 <a:solidFill>
                   <a:srgbClr val="2B6CB0"/>
                 </a:solidFill>
@@ -9337,7 +9386,7 @@
               </a:rPr>
               <a:t>Hasil data bersih</a:t>
             </a:r>
-            <a:endParaRPr lang="en-US" sz="880" dirty="0"/>
+            <a:endParaRPr lang="en-US" sz="1400" dirty="0"/>
           </a:p>
         </p:txBody>
       </p:sp>
@@ -9360,15 +9409,15 @@
         </p:spPr>
         <p:txBody>
           <a:bodyPr wrap="square" lIns="254" tIns="254" rIns="254" bIns="254" rtlCol="0" anchor="ctr">
-            <a:normAutofit/>
+            <a:noAutofit/>
           </a:bodyPr>
           <a:lstStyle/>
           <a:p>
-            <a:pPr indent="0" marL="0">
-              <a:buNone/>
-            </a:pPr>
-            <a:r>
-              <a:rPr lang="en-US" sz="980" dirty="0">
+            <a:pPr marL="0" indent="0">
+              <a:buNone/>
+            </a:pPr>
+            <a:r>
+              <a:rPr lang="en-US" sz="1200" dirty="0">
                 <a:solidFill>
                   <a:srgbClr val="14342C"/>
                 </a:solidFill>
@@ -9378,13 +9427,13 @@
               </a:rPr>
               <a:t>14.576 baris dan 28 kolom siap digunakan; kategori udara mengikuti kolom categori dari dataset, bukan dihitung ulang dari nilai ISPU.</a:t>
             </a:r>
-            <a:endParaRPr lang="en-US" sz="980" dirty="0"/>
-          </a:p>
-        </p:txBody>
-      </p:sp>
-      <p:sp>
-        <p:nvSpPr>
-          <p:cNvPr id="25" name="Slide Number Placeholder 0"/>
+            <a:endParaRPr lang="en-US" sz="1200" dirty="0"/>
+          </a:p>
+        </p:txBody>
+      </p:sp>
+      <p:sp>
+        <p:nvSpPr>
+          <p:cNvPr id="51" name="Slide Number Placeholder 0"/>
           <p:cNvSpPr>
             <a:spLocks noGrp="1"/>
           </p:cNvSpPr>
@@ -9402,7 +9451,7 @@
           </a:prstGeom>
           <a:extLst>
             <a:ext uri="{C572A759-6A51-4108-AA02-DFA0A04FC94B}">
-              <ma14:wrappingTextBoxFlag xmlns:ma14="http://schemas.microsoft.com/office/mac/drawingml/2011/main" val="0"/>
+              <ma14:wrappingTextBoxFlag xmlns:ma14="http://schemas.microsoft.com/office/mac/drawingml/2011/main" xmlns="" val="0"/>
             </a:ext>
           </a:extLst>
         </p:spPr>
@@ -9423,7 +9472,7 @@
           <a:p>
             <a:pPr algn="l"/>
             <a:fld id="{F7021451-1387-4CA6-816F-3879F97B5CBC}" type="slidenum">
-              <a:rPr b="0" lang="en-US"/>
+              <a:rPr lang="en-US" b="0"/>
               <a:t>4</a:t>
             </a:fld>
             <a:endParaRPr lang="en-US"/>
@@ -9446,6 +9495,7 @@
         <a:solidFill>
           <a:srgbClr val="F7FAF8"/>
         </a:solidFill>
+        <a:effectLst/>
       </p:bgPr>
     </p:bg>
     <p:spTree>
@@ -9483,7 +9533,7 @@
           <a:bodyPr wrap="square" lIns="0" tIns="0" rIns="0" bIns="0" rtlCol="0" anchor="ctr"/>
           <a:lstStyle/>
           <a:p>
-            <a:pPr indent="0" marL="0">
+            <a:pPr marL="0" indent="0">
               <a:buNone/>
             </a:pPr>
             <a:r>
@@ -9524,7 +9574,7 @@
           </a:bodyPr>
           <a:lstStyle/>
           <a:p>
-            <a:pPr indent="0" marL="0">
+            <a:pPr marL="0" indent="0">
               <a:buNone/>
             </a:pPr>
             <a:r>
@@ -9588,7 +9638,7 @@
           </a:bodyPr>
           <a:lstStyle/>
           <a:p>
-            <a:pPr indent="0" marL="0">
+            <a:pPr marL="0" indent="0">
               <a:buNone/>
             </a:pPr>
             <a:r>
@@ -9632,7 +9682,7 @@
             <a:prstDash val="solid"/>
           </a:ln>
           <a:effectLst>
-            <a:outerShdw sx="100000" sy="100000" kx="0" ky="0" algn="bl" rotWithShape="0" blurRad="12700" dist="12700" dir="2700000">
+            <a:outerShdw blurRad="12700" dist="12700" dir="2700000" algn="bl" rotWithShape="0">
               <a:srgbClr val="86958E">
                 <a:alpha val="10000"/>
               </a:srgbClr>
@@ -9642,22 +9692,21 @@
       </p:sp>
       <p:pic>
         <p:nvPicPr>
-          <p:cNvPr id="7" name="Image 0" descr="/mnt/data/rendered_final/slide-7.png">    </p:cNvPr>
+          <p:cNvPr id="7" name="Image 0"/>
           <p:cNvPicPr>
             <a:picLocks noChangeAspect="1"/>
           </p:cNvPicPr>
           <p:nvPr/>
         </p:nvPicPr>
         <p:blipFill>
-          <a:blip r:embed="rId1"/>
-          <a:stretch>
-            <a:fillRect/>
-          </a:stretch>
+          <a:blip r:embed="rId3"/>
+          <a:srcRect/>
+          <a:stretch/>
         </p:blipFill>
         <p:spPr>
           <a:xfrm>
-            <a:off x="661924" y="1490472"/>
-            <a:ext cx="7445248" cy="4187952"/>
+            <a:off x="845729" y="1490472"/>
+            <a:ext cx="7077638" cy="4187952"/>
           </a:xfrm>
           <a:prstGeom prst="rect">
             <a:avLst/>
@@ -9710,15 +9759,15 @@
         </p:spPr>
         <p:txBody>
           <a:bodyPr wrap="square" lIns="0" tIns="0" rIns="0" bIns="0" rtlCol="0" anchor="ctr">
-            <a:normAutofit/>
+            <a:noAutofit/>
           </a:bodyPr>
           <a:lstStyle/>
           <a:p>
-            <a:pPr indent="0" marL="0">
-              <a:buNone/>
-            </a:pPr>
-            <a:r>
-              <a:rPr lang="en-US" sz="880" b="1" dirty="0">
+            <a:pPr marL="0" indent="0">
+              <a:buNone/>
+            </a:pPr>
+            <a:r>
+              <a:rPr lang="en-US" sz="2000" b="1" dirty="0">
                 <a:solidFill>
                   <a:srgbClr val="197A5D"/>
                 </a:solidFill>
@@ -9728,7 +9777,7 @@
               </a:rPr>
               <a:t>Analisis utama</a:t>
             </a:r>
-            <a:endParaRPr lang="en-US" sz="880" dirty="0"/>
+            <a:endParaRPr lang="en-US" sz="2000" dirty="0"/>
           </a:p>
         </p:txBody>
       </p:sp>
@@ -9755,11 +9804,11 @@
           </a:bodyPr>
           <a:lstStyle/>
           <a:p>
-            <a:pPr indent="0" marL="0">
-              <a:buNone/>
-            </a:pPr>
-            <a:r>
-              <a:rPr lang="en-US" sz="980" dirty="0">
+            <a:pPr marL="0" indent="0">
+              <a:buNone/>
+            </a:pPr>
+            <a:r>
+              <a:rPr lang="en-US" sz="1400" dirty="0">
                 <a:solidFill>
                   <a:srgbClr val="14342C"/>
                 </a:solidFill>
@@ -9769,7 +9818,7 @@
               </a:rPr>
               <a:t>Rata-rata ISPU seluruh data adalah 79.2, dengan 17.6% hari masuk TIDAK SEHAT atau lebih buruk. Parameter pencemar dominan terbanyak adalah O3 (44.3%).</a:t>
             </a:r>
-            <a:endParaRPr lang="en-US" sz="980" dirty="0"/>
+            <a:endParaRPr lang="en-US" sz="1400" dirty="0"/>
           </a:p>
         </p:txBody>
       </p:sp>
@@ -9819,15 +9868,15 @@
         </p:spPr>
         <p:txBody>
           <a:bodyPr wrap="square" lIns="0" tIns="0" rIns="0" bIns="0" rtlCol="0" anchor="ctr">
-            <a:normAutofit/>
+            <a:noAutofit/>
           </a:bodyPr>
           <a:lstStyle/>
           <a:p>
-            <a:pPr indent="0" marL="0">
-              <a:buNone/>
-            </a:pPr>
-            <a:r>
-              <a:rPr lang="en-US" sz="880" b="1" dirty="0">
+            <a:pPr marL="0" indent="0">
+              <a:buNone/>
+            </a:pPr>
+            <a:r>
+              <a:rPr lang="en-US" sz="2000" b="1" dirty="0">
                 <a:solidFill>
                   <a:srgbClr val="C34632"/>
                 </a:solidFill>
@@ -9837,7 +9886,7 @@
               </a:rPr>
               <a:t>Insight yang dihasilkan</a:t>
             </a:r>
-            <a:endParaRPr lang="en-US" sz="880" dirty="0"/>
+            <a:endParaRPr lang="en-US" sz="2000" dirty="0"/>
           </a:p>
         </p:txBody>
       </p:sp>
@@ -9864,11 +9913,11 @@
           </a:bodyPr>
           <a:lstStyle/>
           <a:p>
-            <a:pPr indent="0" marL="0">
-              <a:buNone/>
-            </a:pPr>
-            <a:r>
-              <a:rPr lang="en-US" sz="980" dirty="0">
+            <a:pPr marL="0" indent="0">
+              <a:buNone/>
+            </a:pPr>
+            <a:r>
+              <a:rPr lang="en-US" sz="1400" dirty="0">
                 <a:solidFill>
                   <a:srgbClr val="14342C"/>
                 </a:solidFill>
@@ -9878,7 +9927,7 @@
               </a:rPr>
               <a:t>Kepala Dinas dapat menetapkan pemantauan harian berbasis alert ketika kategori naik ke TIDAK SEHAT, terutama pada stasiun dengan nilai terkini tertinggi.</a:t>
             </a:r>
-            <a:endParaRPr lang="en-US" sz="980" dirty="0"/>
+            <a:endParaRPr lang="en-US" sz="1400" dirty="0"/>
           </a:p>
         </p:txBody>
       </p:sp>
@@ -9905,7 +9954,7 @@
           </a:bodyPr>
           <a:lstStyle/>
           <a:p>
-            <a:pPr algn="l" indent="0" marL="0">
+            <a:pPr marL="0" indent="0" algn="l">
               <a:buNone/>
             </a:pPr>
             <a:r>
@@ -9943,7 +9992,7 @@
           </a:prstGeom>
           <a:extLst>
             <a:ext uri="{C572A759-6A51-4108-AA02-DFA0A04FC94B}">
-              <ma14:wrappingTextBoxFlag xmlns:ma14="http://schemas.microsoft.com/office/mac/drawingml/2011/main" val="0"/>
+              <ma14:wrappingTextBoxFlag xmlns:ma14="http://schemas.microsoft.com/office/mac/drawingml/2011/main" xmlns="" val="0"/>
             </a:ext>
           </a:extLst>
         </p:spPr>
@@ -9964,7 +10013,7 @@
           <a:p>
             <a:pPr algn="l"/>
             <a:fld id="{F7021451-1387-4CA6-816F-3879F97B5CBC}" type="slidenum">
-              <a:rPr b="0" lang="en-US"/>
+              <a:rPr lang="en-US" b="0"/>
               <a:t>5</a:t>
             </a:fld>
             <a:endParaRPr lang="en-US"/>
@@ -9987,6 +10036,7 @@
         <a:solidFill>
           <a:srgbClr val="F7FAF8"/>
         </a:solidFill>
+        <a:effectLst/>
       </p:bgPr>
     </p:bg>
     <p:spTree>
@@ -10024,7 +10074,7 @@
           <a:bodyPr wrap="square" lIns="0" tIns="0" rIns="0" bIns="0" rtlCol="0" anchor="ctr"/>
           <a:lstStyle/>
           <a:p>
-            <a:pPr indent="0" marL="0">
+            <a:pPr marL="0" indent="0">
               <a:buNone/>
             </a:pPr>
             <a:r>
@@ -10065,7 +10115,7 @@
           </a:bodyPr>
           <a:lstStyle/>
           <a:p>
-            <a:pPr indent="0" marL="0">
+            <a:pPr marL="0" indent="0">
               <a:buNone/>
             </a:pPr>
             <a:r>
@@ -10129,7 +10179,7 @@
           </a:bodyPr>
           <a:lstStyle/>
           <a:p>
-            <a:pPr indent="0" marL="0">
+            <a:pPr marL="0" indent="0">
               <a:buNone/>
             </a:pPr>
             <a:r>
@@ -10173,7 +10223,7 @@
             <a:prstDash val="solid"/>
           </a:ln>
           <a:effectLst>
-            <a:outerShdw sx="100000" sy="100000" kx="0" ky="0" algn="bl" rotWithShape="0" blurRad="12700" dist="12700" dir="2700000">
+            <a:outerShdw blurRad="12700" dist="12700" dir="2700000" algn="bl" rotWithShape="0">
               <a:srgbClr val="86958E">
                 <a:alpha val="10000"/>
               </a:srgbClr>
@@ -10183,22 +10233,21 @@
       </p:sp>
       <p:pic>
         <p:nvPicPr>
-          <p:cNvPr id="7" name="Image 0" descr="/mnt/data/rendered_final/slide-8.png">    </p:cNvPr>
+          <p:cNvPr id="7" name="Image 0"/>
           <p:cNvPicPr>
             <a:picLocks noChangeAspect="1"/>
           </p:cNvPicPr>
           <p:nvPr/>
         </p:nvPicPr>
         <p:blipFill>
-          <a:blip r:embed="rId1"/>
-          <a:stretch>
-            <a:fillRect/>
-          </a:stretch>
+          <a:blip r:embed="rId3"/>
+          <a:srcRect/>
+          <a:stretch/>
         </p:blipFill>
         <p:spPr>
           <a:xfrm>
-            <a:off x="661924" y="1490472"/>
-            <a:ext cx="7445248" cy="4187952"/>
+            <a:off x="845729" y="1490472"/>
+            <a:ext cx="7077638" cy="4187952"/>
           </a:xfrm>
           <a:prstGeom prst="rect">
             <a:avLst/>
@@ -10251,15 +10300,15 @@
         </p:spPr>
         <p:txBody>
           <a:bodyPr wrap="square" lIns="0" tIns="0" rIns="0" bIns="0" rtlCol="0" anchor="ctr">
-            <a:normAutofit/>
+            <a:noAutofit/>
           </a:bodyPr>
           <a:lstStyle/>
           <a:p>
-            <a:pPr indent="0" marL="0">
-              <a:buNone/>
-            </a:pPr>
-            <a:r>
-              <a:rPr lang="en-US" sz="880" b="1" dirty="0">
+            <a:pPr marL="0" indent="0">
+              <a:buNone/>
+            </a:pPr>
+            <a:r>
+              <a:rPr lang="en-US" sz="2000" b="1" dirty="0">
                 <a:solidFill>
                   <a:srgbClr val="2B6CB0"/>
                 </a:solidFill>
@@ -10269,7 +10318,7 @@
               </a:rPr>
               <a:t>Analisis utama</a:t>
             </a:r>
-            <a:endParaRPr lang="en-US" sz="880" dirty="0"/>
+            <a:endParaRPr lang="en-US" sz="2000" dirty="0"/>
           </a:p>
         </p:txBody>
       </p:sp>
@@ -10292,15 +10341,15 @@
         </p:spPr>
         <p:txBody>
           <a:bodyPr wrap="square" lIns="254" tIns="254" rIns="254" bIns="254" rtlCol="0" anchor="ctr">
-            <a:normAutofit/>
+            <a:noAutofit/>
           </a:bodyPr>
           <a:lstStyle/>
           <a:p>
-            <a:pPr indent="0" marL="0">
-              <a:buNone/>
-            </a:pPr>
-            <a:r>
-              <a:rPr lang="en-US" sz="980" dirty="0">
+            <a:pPr marL="0" indent="0">
+              <a:buNone/>
+            </a:pPr>
+            <a:r>
+              <a:rPr lang="en-US" sz="1400" dirty="0">
                 <a:solidFill>
                   <a:srgbClr val="14342C"/>
                 </a:solidFill>
@@ -10310,7 +10359,7 @@
               </a:rPr>
               <a:t>Tahun terbaik adalah 2010 dengan rata-rata ISPU 60.8; tahun terburuk adalah 2018 dengan rata-rata ISPU 120.4. Tren menunjukkan fluktuasi antar tahun sehingga evaluasi perlu memperhatikan konteks data dan jumlah observasi.</a:t>
             </a:r>
-            <a:endParaRPr lang="en-US" sz="980" dirty="0"/>
+            <a:endParaRPr lang="en-US" sz="1400" dirty="0"/>
           </a:p>
         </p:txBody>
       </p:sp>
@@ -10360,15 +10409,15 @@
         </p:spPr>
         <p:txBody>
           <a:bodyPr wrap="square" lIns="0" tIns="0" rIns="0" bIns="0" rtlCol="0" anchor="ctr">
-            <a:normAutofit/>
+            <a:noAutofit/>
           </a:bodyPr>
           <a:lstStyle/>
           <a:p>
-            <a:pPr indent="0" marL="0">
-              <a:buNone/>
-            </a:pPr>
-            <a:r>
-              <a:rPr lang="en-US" sz="880" b="1" dirty="0">
+            <a:pPr marL="0" indent="0">
+              <a:buNone/>
+            </a:pPr>
+            <a:r>
+              <a:rPr lang="en-US" sz="2000" b="1" dirty="0">
                 <a:solidFill>
                   <a:srgbClr val="C34632"/>
                 </a:solidFill>
@@ -10378,7 +10427,7 @@
               </a:rPr>
               <a:t>Insight yang dihasilkan</a:t>
             </a:r>
-            <a:endParaRPr lang="en-US" sz="880" dirty="0"/>
+            <a:endParaRPr lang="en-US" sz="2000" dirty="0"/>
           </a:p>
         </p:txBody>
       </p:sp>
@@ -10405,11 +10454,11 @@
           </a:bodyPr>
           <a:lstStyle/>
           <a:p>
-            <a:pPr indent="0" marL="0">
-              <a:buNone/>
-            </a:pPr>
-            <a:r>
-              <a:rPr lang="en-US" sz="980" dirty="0">
+            <a:pPr marL="0" indent="0">
+              <a:buNone/>
+            </a:pPr>
+            <a:r>
+              <a:rPr lang="en-US" sz="1400" dirty="0">
                 <a:solidFill>
                   <a:srgbClr val="14342C"/>
                 </a:solidFill>
@@ -10419,7 +10468,7 @@
               </a:rPr>
               <a:t>Gunakan tren bulanan/tahunan sebagai trigger evaluasi program: ketika rata-rata tahunan dan % hari tidak sehat naik, aktifkan audit sumber emisi dan komunikasi risiko.</a:t>
             </a:r>
-            <a:endParaRPr lang="en-US" sz="980" dirty="0"/>
+            <a:endParaRPr lang="en-US" sz="1400" dirty="0"/>
           </a:p>
         </p:txBody>
       </p:sp>
@@ -10446,7 +10495,7 @@
           </a:bodyPr>
           <a:lstStyle/>
           <a:p>
-            <a:pPr algn="l" indent="0" marL="0">
+            <a:pPr marL="0" indent="0" algn="l">
               <a:buNone/>
             </a:pPr>
             <a:r>
@@ -10484,7 +10533,7 @@
           </a:prstGeom>
           <a:extLst>
             <a:ext uri="{C572A759-6A51-4108-AA02-DFA0A04FC94B}">
-              <ma14:wrappingTextBoxFlag xmlns:ma14="http://schemas.microsoft.com/office/mac/drawingml/2011/main" val="0"/>
+              <ma14:wrappingTextBoxFlag xmlns:ma14="http://schemas.microsoft.com/office/mac/drawingml/2011/main" xmlns="" val="0"/>
             </a:ext>
           </a:extLst>
         </p:spPr>
@@ -10505,7 +10554,7 @@
           <a:p>
             <a:pPr algn="l"/>
             <a:fld id="{F7021451-1387-4CA6-816F-3879F97B5CBC}" type="slidenum">
-              <a:rPr b="0" lang="en-US"/>
+              <a:rPr lang="en-US" b="0"/>
               <a:t>6</a:t>
             </a:fld>
             <a:endParaRPr lang="en-US"/>
@@ -10528,6 +10577,7 @@
         <a:solidFill>
           <a:srgbClr val="F7FAF8"/>
         </a:solidFill>
+        <a:effectLst/>
       </p:bgPr>
     </p:bg>
     <p:spTree>
@@ -10565,7 +10615,7 @@
           <a:bodyPr wrap="square" lIns="0" tIns="0" rIns="0" bIns="0" rtlCol="0" anchor="ctr"/>
           <a:lstStyle/>
           <a:p>
-            <a:pPr indent="0" marL="0">
+            <a:pPr marL="0" indent="0">
               <a:buNone/>
             </a:pPr>
             <a:r>
@@ -10606,7 +10656,7 @@
           </a:bodyPr>
           <a:lstStyle/>
           <a:p>
-            <a:pPr indent="0" marL="0">
+            <a:pPr marL="0" indent="0">
               <a:buNone/>
             </a:pPr>
             <a:r>
@@ -10670,7 +10720,7 @@
           </a:bodyPr>
           <a:lstStyle/>
           <a:p>
-            <a:pPr indent="0" marL="0">
+            <a:pPr marL="0" indent="0">
               <a:buNone/>
             </a:pPr>
             <a:r>
@@ -10714,7 +10764,7 @@
             <a:prstDash val="solid"/>
           </a:ln>
           <a:effectLst>
-            <a:outerShdw sx="100000" sy="100000" kx="0" ky="0" algn="bl" rotWithShape="0" blurRad="12700" dist="12700" dir="2700000">
+            <a:outerShdw blurRad="12700" dist="12700" dir="2700000" algn="bl" rotWithShape="0">
               <a:srgbClr val="86958E">
                 <a:alpha val="10000"/>
               </a:srgbClr>
@@ -10724,22 +10774,21 @@
       </p:sp>
       <p:pic>
         <p:nvPicPr>
-          <p:cNvPr id="7" name="Image 0" descr="/mnt/data/rendered_final/slide-9.png">    </p:cNvPr>
+          <p:cNvPr id="7" name="Image 0"/>
           <p:cNvPicPr>
             <a:picLocks noChangeAspect="1"/>
           </p:cNvPicPr>
           <p:nvPr/>
         </p:nvPicPr>
         <p:blipFill>
-          <a:blip r:embed="rId1"/>
-          <a:stretch>
-            <a:fillRect/>
-          </a:stretch>
+          <a:blip r:embed="rId3"/>
+          <a:srcRect/>
+          <a:stretch/>
         </p:blipFill>
         <p:spPr>
           <a:xfrm>
-            <a:off x="661924" y="1490472"/>
-            <a:ext cx="7445248" cy="4187952"/>
+            <a:off x="845729" y="1490472"/>
+            <a:ext cx="7077638" cy="4187952"/>
           </a:xfrm>
           <a:prstGeom prst="rect">
             <a:avLst/>
@@ -10792,15 +10841,15 @@
         </p:spPr>
         <p:txBody>
           <a:bodyPr wrap="square" lIns="0" tIns="0" rIns="0" bIns="0" rtlCol="0" anchor="ctr">
-            <a:normAutofit/>
+            <a:noAutofit/>
           </a:bodyPr>
           <a:lstStyle/>
           <a:p>
-            <a:pPr indent="0" marL="0">
-              <a:buNone/>
-            </a:pPr>
-            <a:r>
-              <a:rPr lang="en-US" sz="880" b="1" dirty="0">
+            <a:pPr marL="0" indent="0">
+              <a:buNone/>
+            </a:pPr>
+            <a:r>
+              <a:rPr lang="en-US" sz="2000" b="1" dirty="0">
                 <a:solidFill>
                   <a:srgbClr val="D68A00"/>
                 </a:solidFill>
@@ -10810,7 +10859,7 @@
               </a:rPr>
               <a:t>Analisis utama</a:t>
             </a:r>
-            <a:endParaRPr lang="en-US" sz="880" dirty="0"/>
+            <a:endParaRPr lang="en-US" sz="2000" dirty="0"/>
           </a:p>
         </p:txBody>
       </p:sp>
@@ -10837,11 +10886,11 @@
           </a:bodyPr>
           <a:lstStyle/>
           <a:p>
-            <a:pPr indent="0" marL="0">
-              <a:buNone/>
-            </a:pPr>
-            <a:r>
-              <a:rPr lang="en-US" sz="980" dirty="0">
+            <a:pPr marL="0" indent="0">
+              <a:buNone/>
+            </a:pPr>
+            <a:r>
+              <a:rPr lang="en-US" sz="1400" dirty="0">
                 <a:solidFill>
                   <a:srgbClr val="14342C"/>
                 </a:solidFill>
@@ -10851,7 +10900,7 @@
               </a:rPr>
               <a:t>Stasiun dengan rata-rata ISPU tertinggi adalah DKI2 Kelapa Gading (88.2), sedangkan terendah DKI1 Bunderan HI (65). DKI4 Lubang Buaya memiliki proporsi hari tidak sehat tertinggi (23.1%).</a:t>
             </a:r>
-            <a:endParaRPr lang="en-US" sz="980" dirty="0"/>
+            <a:endParaRPr lang="en-US" sz="1400" dirty="0"/>
           </a:p>
         </p:txBody>
       </p:sp>
@@ -10901,15 +10950,15 @@
         </p:spPr>
         <p:txBody>
           <a:bodyPr wrap="square" lIns="0" tIns="0" rIns="0" bIns="0" rtlCol="0" anchor="ctr">
-            <a:normAutofit/>
+            <a:noAutofit/>
           </a:bodyPr>
           <a:lstStyle/>
           <a:p>
-            <a:pPr indent="0" marL="0">
-              <a:buNone/>
-            </a:pPr>
-            <a:r>
-              <a:rPr lang="en-US" sz="880" b="1" dirty="0">
+            <a:pPr marL="0" indent="0">
+              <a:buNone/>
+            </a:pPr>
+            <a:r>
+              <a:rPr lang="en-US" sz="2000" b="1" dirty="0">
                 <a:solidFill>
                   <a:srgbClr val="C34632"/>
                 </a:solidFill>
@@ -10919,7 +10968,7 @@
               </a:rPr>
               <a:t>Insight yang dihasilkan</a:t>
             </a:r>
-            <a:endParaRPr lang="en-US" sz="880" dirty="0"/>
+            <a:endParaRPr lang="en-US" sz="2000" dirty="0"/>
           </a:p>
         </p:txBody>
       </p:sp>
@@ -10946,11 +10995,11 @@
           </a:bodyPr>
           <a:lstStyle/>
           <a:p>
-            <a:pPr indent="0" marL="0">
-              <a:buNone/>
-            </a:pPr>
-            <a:r>
-              <a:rPr lang="en-US" sz="980" dirty="0">
+            <a:pPr marL="0" indent="0">
+              <a:buNone/>
+            </a:pPr>
+            <a:r>
+              <a:rPr lang="en-US" sz="1400" dirty="0">
                 <a:solidFill>
                   <a:srgbClr val="14342C"/>
                 </a:solidFill>
@@ -10960,7 +11009,7 @@
               </a:rPr>
               <a:t>Prioritaskan inspeksi dan pengendalian sumber pencemar pada area yang direpresentasikan stasiun dengan rata-rata ISPU dan proporsi hari tidak sehat tertinggi.</a:t>
             </a:r>
-            <a:endParaRPr lang="en-US" sz="980" dirty="0"/>
+            <a:endParaRPr lang="en-US" sz="1400" dirty="0"/>
           </a:p>
         </p:txBody>
       </p:sp>
@@ -10987,7 +11036,7 @@
           </a:bodyPr>
           <a:lstStyle/>
           <a:p>
-            <a:pPr algn="l" indent="0" marL="0">
+            <a:pPr marL="0" indent="0" algn="l">
               <a:buNone/>
             </a:pPr>
             <a:r>
@@ -11025,7 +11074,7 @@
           </a:prstGeom>
           <a:extLst>
             <a:ext uri="{C572A759-6A51-4108-AA02-DFA0A04FC94B}">
-              <ma14:wrappingTextBoxFlag xmlns:ma14="http://schemas.microsoft.com/office/mac/drawingml/2011/main" val="0"/>
+              <ma14:wrappingTextBoxFlag xmlns:ma14="http://schemas.microsoft.com/office/mac/drawingml/2011/main" xmlns="" val="0"/>
             </a:ext>
           </a:extLst>
         </p:spPr>
@@ -11046,7 +11095,7 @@
           <a:p>
             <a:pPr algn="l"/>
             <a:fld id="{F7021451-1387-4CA6-816F-3879F97B5CBC}" type="slidenum">
-              <a:rPr b="0" lang="en-US"/>
+              <a:rPr lang="en-US" b="0"/>
               <a:t>7</a:t>
             </a:fld>
             <a:endParaRPr lang="en-US"/>
@@ -11069,6 +11118,7 @@
         <a:solidFill>
           <a:srgbClr val="F7FAF8"/>
         </a:solidFill>
+        <a:effectLst/>
       </p:bgPr>
     </p:bg>
     <p:spTree>
@@ -11106,7 +11156,7 @@
           <a:bodyPr wrap="square" lIns="0" tIns="0" rIns="0" bIns="0" rtlCol="0" anchor="ctr"/>
           <a:lstStyle/>
           <a:p>
-            <a:pPr indent="0" marL="0">
+            <a:pPr marL="0" indent="0">
               <a:buNone/>
             </a:pPr>
             <a:r>
@@ -11147,7 +11197,7 @@
           </a:bodyPr>
           <a:lstStyle/>
           <a:p>
-            <a:pPr indent="0" marL="0">
+            <a:pPr marL="0" indent="0">
               <a:buNone/>
             </a:pPr>
             <a:r>
@@ -11211,7 +11261,7 @@
           </a:bodyPr>
           <a:lstStyle/>
           <a:p>
-            <a:pPr indent="0" marL="0">
+            <a:pPr marL="0" indent="0">
               <a:buNone/>
             </a:pPr>
             <a:r>
@@ -11255,7 +11305,7 @@
             <a:prstDash val="solid"/>
           </a:ln>
           <a:effectLst>
-            <a:outerShdw sx="100000" sy="100000" kx="0" ky="0" algn="bl" rotWithShape="0" blurRad="12700" dist="12700" dir="2700000">
+            <a:outerShdw blurRad="12700" dist="12700" dir="2700000" algn="bl" rotWithShape="0">
               <a:srgbClr val="86958E">
                 <a:alpha val="10000"/>
               </a:srgbClr>
@@ -11265,22 +11315,21 @@
       </p:sp>
       <p:pic>
         <p:nvPicPr>
-          <p:cNvPr id="7" name="Image 0" descr="/mnt/data/rendered_final/slide-10.png">    </p:cNvPr>
+          <p:cNvPr id="7" name="Image 0"/>
           <p:cNvPicPr>
             <a:picLocks noChangeAspect="1"/>
           </p:cNvPicPr>
           <p:nvPr/>
         </p:nvPicPr>
         <p:blipFill>
-          <a:blip r:embed="rId1"/>
-          <a:stretch>
-            <a:fillRect/>
-          </a:stretch>
+          <a:blip r:embed="rId3"/>
+          <a:srcRect/>
+          <a:stretch/>
         </p:blipFill>
         <p:spPr>
           <a:xfrm>
-            <a:off x="661924" y="1490472"/>
-            <a:ext cx="7445248" cy="4187952"/>
+            <a:off x="845729" y="1490472"/>
+            <a:ext cx="7077638" cy="4187952"/>
           </a:xfrm>
           <a:prstGeom prst="rect">
             <a:avLst/>
@@ -11333,15 +11382,15 @@
         </p:spPr>
         <p:txBody>
           <a:bodyPr wrap="square" lIns="0" tIns="0" rIns="0" bIns="0" rtlCol="0" anchor="ctr">
-            <a:normAutofit/>
+            <a:noAutofit/>
           </a:bodyPr>
           <a:lstStyle/>
           <a:p>
-            <a:pPr indent="0" marL="0">
-              <a:buNone/>
-            </a:pPr>
-            <a:r>
-              <a:rPr lang="en-US" sz="880" b="1" dirty="0">
+            <a:pPr marL="0" indent="0">
+              <a:buNone/>
+            </a:pPr>
+            <a:r>
+              <a:rPr lang="en-US" sz="2000" b="1" dirty="0">
                 <a:solidFill>
                   <a:srgbClr val="C34632"/>
                 </a:solidFill>
@@ -11351,7 +11400,7 @@
               </a:rPr>
               <a:t>Analisis utama</a:t>
             </a:r>
-            <a:endParaRPr lang="en-US" sz="880" dirty="0"/>
+            <a:endParaRPr lang="en-US" sz="2000" dirty="0"/>
           </a:p>
         </p:txBody>
       </p:sp>
@@ -11378,11 +11427,11 @@
           </a:bodyPr>
           <a:lstStyle/>
           <a:p>
-            <a:pPr indent="0" marL="0">
-              <a:buNone/>
-            </a:pPr>
-            <a:r>
-              <a:rPr lang="en-US" sz="980" dirty="0">
+            <a:pPr marL="0" indent="0">
+              <a:buNone/>
+            </a:pPr>
+            <a:r>
+              <a:rPr lang="en-US" sz="1400" dirty="0">
                 <a:solidFill>
                   <a:srgbClr val="14342C"/>
                 </a:solidFill>
@@ -11392,7 +11441,7 @@
               </a:rPr>
               <a:t>O3 paling sering menjadi pencemar dominan (44.3%), diikuti PM2.5 (29.3%) dan PM10 (22.7%). Namun PM2.5 harus dibaca bersama coverage karena 62.2% datanya missing.</a:t>
             </a:r>
-            <a:endParaRPr lang="en-US" sz="980" dirty="0"/>
+            <a:endParaRPr lang="en-US" sz="1400" dirty="0"/>
           </a:p>
         </p:txBody>
       </p:sp>
@@ -11442,15 +11491,15 @@
         </p:spPr>
         <p:txBody>
           <a:bodyPr wrap="square" lIns="0" tIns="0" rIns="0" bIns="0" rtlCol="0" anchor="ctr">
-            <a:normAutofit/>
+            <a:noAutofit/>
           </a:bodyPr>
           <a:lstStyle/>
           <a:p>
-            <a:pPr indent="0" marL="0">
-              <a:buNone/>
-            </a:pPr>
-            <a:r>
-              <a:rPr lang="en-US" sz="880" b="1" dirty="0">
+            <a:pPr marL="0" indent="0">
+              <a:buNone/>
+            </a:pPr>
+            <a:r>
+              <a:rPr lang="en-US" sz="2000" b="1" dirty="0">
                 <a:solidFill>
                   <a:srgbClr val="C34632"/>
                 </a:solidFill>
@@ -11460,7 +11509,7 @@
               </a:rPr>
               <a:t>Insight yang dihasilkan</a:t>
             </a:r>
-            <a:endParaRPr lang="en-US" sz="880" dirty="0"/>
+            <a:endParaRPr lang="en-US" sz="2000" dirty="0"/>
           </a:p>
         </p:txBody>
       </p:sp>
@@ -11487,11 +11536,11 @@
           </a:bodyPr>
           <a:lstStyle/>
           <a:p>
-            <a:pPr indent="0" marL="0">
-              <a:buNone/>
-            </a:pPr>
-            <a:r>
-              <a:rPr lang="en-US" sz="980" dirty="0">
+            <a:pPr marL="0" indent="0">
+              <a:buNone/>
+            </a:pPr>
+            <a:r>
+              <a:rPr lang="en-US" sz="1400" dirty="0">
                 <a:solidFill>
                   <a:srgbClr val="14342C"/>
                 </a:solidFill>
@@ -11501,7 +11550,7 @@
               </a:rPr>
               <a:t>Intervensi perlu spesifik parameter: O3 memerlukan evaluasi prekursor emisi, sedangkan PM2.5 perlu dibaca pada periode data tersedia dan dilengkapi dengan peningkatan cakupan pengukuran.</a:t>
             </a:r>
-            <a:endParaRPr lang="en-US" sz="980" dirty="0"/>
+            <a:endParaRPr lang="en-US" sz="1400" dirty="0"/>
           </a:p>
         </p:txBody>
       </p:sp>
@@ -11528,7 +11577,7 @@
           </a:bodyPr>
           <a:lstStyle/>
           <a:p>
-            <a:pPr algn="l" indent="0" marL="0">
+            <a:pPr marL="0" indent="0" algn="l">
               <a:buNone/>
             </a:pPr>
             <a:r>
@@ -11566,7 +11615,7 @@
           </a:prstGeom>
           <a:extLst>
             <a:ext uri="{C572A759-6A51-4108-AA02-DFA0A04FC94B}">
-              <ma14:wrappingTextBoxFlag xmlns:ma14="http://schemas.microsoft.com/office/mac/drawingml/2011/main" val="0"/>
+              <ma14:wrappingTextBoxFlag xmlns:ma14="http://schemas.microsoft.com/office/mac/drawingml/2011/main" xmlns="" val="0"/>
             </a:ext>
           </a:extLst>
         </p:spPr>
@@ -11587,7 +11636,7 @@
           <a:p>
             <a:pPr algn="l"/>
             <a:fld id="{F7021451-1387-4CA6-816F-3879F97B5CBC}" type="slidenum">
-              <a:rPr b="0" lang="en-US"/>
+              <a:rPr lang="en-US" b="0"/>
               <a:t>8</a:t>
             </a:fld>
             <a:endParaRPr lang="en-US"/>
@@ -11610,6 +11659,7 @@
         <a:solidFill>
           <a:srgbClr val="F7FAF8"/>
         </a:solidFill>
+        <a:effectLst/>
       </p:bgPr>
     </p:bg>
     <p:spTree>
@@ -11647,7 +11697,7 @@
           <a:bodyPr wrap="square" lIns="0" tIns="0" rIns="0" bIns="0" rtlCol="0" anchor="ctr"/>
           <a:lstStyle/>
           <a:p>
-            <a:pPr indent="0" marL="0">
+            <a:pPr marL="0" indent="0">
               <a:buNone/>
             </a:pPr>
             <a:r>
@@ -11688,7 +11738,7 @@
           </a:bodyPr>
           <a:lstStyle/>
           <a:p>
-            <a:pPr indent="0" marL="0">
+            <a:pPr marL="0" indent="0">
               <a:buNone/>
             </a:pPr>
             <a:r>
@@ -11752,7 +11802,7 @@
           </a:bodyPr>
           <a:lstStyle/>
           <a:p>
-            <a:pPr indent="0" marL="0">
+            <a:pPr marL="0" indent="0">
               <a:buNone/>
             </a:pPr>
             <a:r>
@@ -11796,7 +11846,7 @@
             <a:prstDash val="solid"/>
           </a:ln>
           <a:effectLst>
-            <a:outerShdw sx="100000" sy="100000" kx="0" ky="0" algn="bl" rotWithShape="0" blurRad="12700" dist="12700" dir="2700000">
+            <a:outerShdw blurRad="12700" dist="12700" dir="2700000" algn="bl" rotWithShape="0">
               <a:srgbClr val="86958E">
                 <a:alpha val="10000"/>
               </a:srgbClr>
@@ -11806,22 +11856,21 @@
       </p:sp>
       <p:pic>
         <p:nvPicPr>
-          <p:cNvPr id="7" name="Image 0" descr="/mnt/data/rendered_final/slide-12.png">    </p:cNvPr>
+          <p:cNvPr id="7" name="Image 0"/>
           <p:cNvPicPr>
             <a:picLocks noChangeAspect="1"/>
           </p:cNvPicPr>
           <p:nvPr/>
         </p:nvPicPr>
         <p:blipFill>
-          <a:blip r:embed="rId1"/>
-          <a:stretch>
-            <a:fillRect/>
-          </a:stretch>
+          <a:blip r:embed="rId3"/>
+          <a:srcRect/>
+          <a:stretch/>
         </p:blipFill>
         <p:spPr>
           <a:xfrm>
-            <a:off x="661924" y="1490472"/>
-            <a:ext cx="7445248" cy="4187952"/>
+            <a:off x="845729" y="1490472"/>
+            <a:ext cx="7077638" cy="4187952"/>
           </a:xfrm>
           <a:prstGeom prst="rect">
             <a:avLst/>
@@ -11874,15 +11923,15 @@
         </p:spPr>
         <p:txBody>
           <a:bodyPr wrap="square" lIns="0" tIns="0" rIns="0" bIns="0" rtlCol="0" anchor="ctr">
-            <a:normAutofit/>
+            <a:noAutofit/>
           </a:bodyPr>
           <a:lstStyle/>
           <a:p>
-            <a:pPr indent="0" marL="0">
-              <a:buNone/>
-            </a:pPr>
-            <a:r>
-              <a:rPr lang="en-US" sz="880" b="1" dirty="0">
+            <a:pPr marL="0" indent="0">
+              <a:buNone/>
+            </a:pPr>
+            <a:r>
+              <a:rPr lang="en-US" sz="2000" b="1" dirty="0">
                 <a:solidFill>
                   <a:srgbClr val="197A5D"/>
                 </a:solidFill>
@@ -11892,7 +11941,7 @@
               </a:rPr>
               <a:t>Analisis utama</a:t>
             </a:r>
-            <a:endParaRPr lang="en-US" sz="880" dirty="0"/>
+            <a:endParaRPr lang="en-US" sz="2000" dirty="0"/>
           </a:p>
         </p:txBody>
       </p:sp>
@@ -11919,11 +11968,11 @@
           </a:bodyPr>
           <a:lstStyle/>
           <a:p>
-            <a:pPr indent="0" marL="0">
-              <a:buNone/>
-            </a:pPr>
-            <a:r>
-              <a:rPr lang="en-US" sz="980" dirty="0">
+            <a:pPr marL="0" indent="0">
+              <a:buNone/>
+            </a:pPr>
+            <a:r>
+              <a:rPr lang="en-US" sz="1400" dirty="0">
                 <a:solidFill>
                   <a:srgbClr val="14342C"/>
                 </a:solidFill>
@@ -11933,7 +11982,7 @@
               </a:rPr>
               <a:t>Rata-rata ISPU tertinggi terjadi pada bulan Okt (89.7) dengan 25.4% hari tidak sehat. Bulan dengan rata-rata terendah adalah Jan (62.6).</a:t>
             </a:r>
-            <a:endParaRPr lang="en-US" sz="980" dirty="0"/>
+            <a:endParaRPr lang="en-US" sz="1400" dirty="0"/>
           </a:p>
         </p:txBody>
       </p:sp>
@@ -11983,15 +12032,15 @@
         </p:spPr>
         <p:txBody>
           <a:bodyPr wrap="square" lIns="0" tIns="0" rIns="0" bIns="0" rtlCol="0" anchor="ctr">
-            <a:normAutofit/>
+            <a:noAutofit/>
           </a:bodyPr>
           <a:lstStyle/>
           <a:p>
-            <a:pPr indent="0" marL="0">
-              <a:buNone/>
-            </a:pPr>
-            <a:r>
-              <a:rPr lang="en-US" sz="880" b="1" dirty="0">
+            <a:pPr marL="0" indent="0">
+              <a:buNone/>
+            </a:pPr>
+            <a:r>
+              <a:rPr lang="en-US" sz="2000" b="1" dirty="0">
                 <a:solidFill>
                   <a:srgbClr val="C34632"/>
                 </a:solidFill>
@@ -12001,7 +12050,7 @@
               </a:rPr>
               <a:t>Insight yang dihasilkan</a:t>
             </a:r>
-            <a:endParaRPr lang="en-US" sz="880" dirty="0"/>
+            <a:endParaRPr lang="en-US" sz="2000" dirty="0"/>
           </a:p>
         </p:txBody>
       </p:sp>
@@ -12028,11 +12077,11 @@
           </a:bodyPr>
           <a:lstStyle/>
           <a:p>
-            <a:pPr indent="0" marL="0">
-              <a:buNone/>
-            </a:pPr>
-            <a:r>
-              <a:rPr lang="en-US" sz="980" dirty="0">
+            <a:pPr marL="0" indent="0">
+              <a:buNone/>
+            </a:pPr>
+            <a:r>
+              <a:rPr lang="en-US" sz="1400" dirty="0">
                 <a:solidFill>
                   <a:srgbClr val="14342C"/>
                 </a:solidFill>
@@ -12042,7 +12091,7 @@
               </a:rPr>
               <a:t>Susun kalender intervensi sebelum periode risiko tinggi, terutama menjelang September–November, melalui inspeksi sumber emisi, pengendalian debu/konstruksi, dan komunikasi risiko kesehatan.</a:t>
             </a:r>
-            <a:endParaRPr lang="en-US" sz="980" dirty="0"/>
+            <a:endParaRPr lang="en-US" sz="1400" dirty="0"/>
           </a:p>
         </p:txBody>
       </p:sp>
@@ -12069,7 +12118,7 @@
           </a:bodyPr>
           <a:lstStyle/>
           <a:p>
-            <a:pPr algn="l" indent="0" marL="0">
+            <a:pPr marL="0" indent="0" algn="l">
               <a:buNone/>
             </a:pPr>
             <a:r>
@@ -12107,7 +12156,7 @@
           </a:prstGeom>
           <a:extLst>
             <a:ext uri="{C572A759-6A51-4108-AA02-DFA0A04FC94B}">
-              <ma14:wrappingTextBoxFlag xmlns:ma14="http://schemas.microsoft.com/office/mac/drawingml/2011/main" val="0"/>
+              <ma14:wrappingTextBoxFlag xmlns:ma14="http://schemas.microsoft.com/office/mac/drawingml/2011/main" xmlns="" val="0"/>
             </a:ext>
           </a:extLst>
         </p:spPr>
@@ -12128,7 +12177,7 @@
           <a:p>
             <a:pPr algn="l"/>
             <a:fld id="{F7021451-1387-4CA6-816F-3879F97B5CBC}" type="slidenum">
-              <a:rPr b="0" lang="en-US"/>
+              <a:rPr lang="en-US" b="0"/>
               <a:t>9</a:t>
             </a:fld>
             <a:endParaRPr lang="en-US"/>
@@ -12436,4 +12485,299 @@
     </a:ext>
   </a:extLst>
 </a:theme>
+</file>
+
+<file path=ppt/theme/theme2.xml><?xml version="1.0" encoding="utf-8"?>
+<a:theme xmlns:a="http://schemas.openxmlformats.org/drawingml/2006/main" name="Office Theme">
+  <a:themeElements>
+    <a:clrScheme name="Office">
+      <a:dk1>
+        <a:sysClr val="windowText" lastClr="000000"/>
+      </a:dk1>
+      <a:lt1>
+        <a:sysClr val="window" lastClr="FFFFFF"/>
+      </a:lt1>
+      <a:dk2>
+        <a:srgbClr val="44546A"/>
+      </a:dk2>
+      <a:lt2>
+        <a:srgbClr val="E7E6E6"/>
+      </a:lt2>
+      <a:accent1>
+        <a:srgbClr val="4472C4"/>
+      </a:accent1>
+      <a:accent2>
+        <a:srgbClr val="ED7D31"/>
+      </a:accent2>
+      <a:accent3>
+        <a:srgbClr val="A5A5A5"/>
+      </a:accent3>
+      <a:accent4>
+        <a:srgbClr val="FFC000"/>
+      </a:accent4>
+      <a:accent5>
+        <a:srgbClr val="5B9BD5"/>
+      </a:accent5>
+      <a:accent6>
+        <a:srgbClr val="70AD47"/>
+      </a:accent6>
+      <a:hlink>
+        <a:srgbClr val="0563C1"/>
+      </a:hlink>
+      <a:folHlink>
+        <a:srgbClr val="954F72"/>
+      </a:folHlink>
+    </a:clrScheme>
+    <a:fontScheme name="Office">
+      <a:majorFont>
+        <a:latin typeface="Calibri Light" panose="020F0302020204030204"/>
+        <a:ea typeface=""/>
+        <a:cs typeface=""/>
+        <a:font script="Jpan" typeface="游ゴシック Light"/>
+        <a:font script="Hang" typeface="맑은 고딕"/>
+        <a:font script="Hans" typeface="等线 Light"/>
+        <a:font script="Hant" typeface="新細明體"/>
+        <a:font script="Arab" typeface="Times New Roman"/>
+        <a:font script="Hebr" typeface="Times New Roman"/>
+        <a:font script="Thai" typeface="Angsana New"/>
+        <a:font script="Ethi" typeface="Nyala"/>
+        <a:font script="Beng" typeface="Vrinda"/>
+        <a:font script="Gujr" typeface="Shruti"/>
+        <a:font script="Khmr" typeface="MoolBoran"/>
+        <a:font script="Knda" typeface="Tunga"/>
+        <a:font script="Guru" typeface="Raavi"/>
+        <a:font script="Cans" typeface="Euphemia"/>
+        <a:font script="Cher" typeface="Plantagenet Cherokee"/>
+        <a:font script="Yiii" typeface="Microsoft Yi Baiti"/>
+        <a:font script="Tibt" typeface="Microsoft Himalaya"/>
+        <a:font script="Thaa" typeface="MV Boli"/>
+        <a:font script="Deva" typeface="Mangal"/>
+        <a:font script="Telu" typeface="Gautami"/>
+        <a:font script="Taml" typeface="Latha"/>
+        <a:font script="Syrc" typeface="Estrangelo Edessa"/>
+        <a:font script="Orya" typeface="Kalinga"/>
+        <a:font script="Mlym" typeface="Kartika"/>
+        <a:font script="Laoo" typeface="DokChampa"/>
+        <a:font script="Sinh" typeface="Iskoola Pota"/>
+        <a:font script="Mong" typeface="Mongolian Baiti"/>
+        <a:font script="Viet" typeface="Times New Roman"/>
+        <a:font script="Uigh" typeface="Microsoft Uighur"/>
+        <a:font script="Geor" typeface="Sylfaen"/>
+        <a:font script="Armn" typeface="Arial"/>
+        <a:font script="Bugi" typeface="Leelawadee UI"/>
+        <a:font script="Bopo" typeface="Microsoft JhengHei"/>
+        <a:font script="Java" typeface="Javanese Text"/>
+        <a:font script="Lisu" typeface="Segoe UI"/>
+        <a:font script="Mymr" typeface="Myanmar Text"/>
+        <a:font script="Nkoo" typeface="Ebrima"/>
+        <a:font script="Olck" typeface="Nirmala UI"/>
+        <a:font script="Osma" typeface="Ebrima"/>
+        <a:font script="Phag" typeface="Phagspa"/>
+        <a:font script="Syrn" typeface="Estrangelo Edessa"/>
+        <a:font script="Syrj" typeface="Estrangelo Edessa"/>
+        <a:font script="Syre" typeface="Estrangelo Edessa"/>
+        <a:font script="Sora" typeface="Nirmala UI"/>
+        <a:font script="Tale" typeface="Microsoft Tai Le"/>
+        <a:font script="Talu" typeface="Microsoft New Tai Lue"/>
+        <a:font script="Tfng" typeface="Ebrima"/>
+      </a:majorFont>
+      <a:minorFont>
+        <a:latin typeface="Calibri" panose="020F0502020204030204"/>
+        <a:ea typeface=""/>
+        <a:cs typeface=""/>
+        <a:font script="Jpan" typeface="游ゴシック"/>
+        <a:font script="Hang" typeface="맑은 고딕"/>
+        <a:font script="Hans" typeface="等线"/>
+        <a:font script="Hant" typeface="新細明體"/>
+        <a:font script="Arab" typeface="Arial"/>
+        <a:font script="Hebr" typeface="Arial"/>
+        <a:font script="Thai" typeface="Cordia New"/>
+        <a:font script="Ethi" typeface="Nyala"/>
+        <a:font script="Beng" typeface="Vrinda"/>
+        <a:font script="Gujr" typeface="Shruti"/>
+        <a:font script="Khmr" typeface="DaunPenh"/>
+        <a:font script="Knda" typeface="Tunga"/>
+        <a:font script="Guru" typeface="Raavi"/>
+        <a:font script="Cans" typeface="Euphemia"/>
+        <a:font script="Cher" typeface="Plantagenet Cherokee"/>
+        <a:font script="Yiii" typeface="Microsoft Yi Baiti"/>
+        <a:font script="Tibt" typeface="Microsoft Himalaya"/>
+        <a:font script="Thaa" typeface="MV Boli"/>
+        <a:font script="Deva" typeface="Mangal"/>
+        <a:font script="Telu" typeface="Gautami"/>
+        <a:font script="Taml" typeface="Latha"/>
+        <a:font script="Syrc" typeface="Estrangelo Edessa"/>
+        <a:font script="Orya" typeface="Kalinga"/>
+        <a:font script="Mlym" typeface="Kartika"/>
+        <a:font script="Laoo" typeface="DokChampa"/>
+        <a:font script="Sinh" typeface="Iskoola Pota"/>
+        <a:font script="Mong" typeface="Mongolian Baiti"/>
+        <a:font script="Viet" typeface="Arial"/>
+        <a:font script="Uigh" typeface="Microsoft Uighur"/>
+        <a:font script="Geor" typeface="Sylfaen"/>
+        <a:font script="Armn" typeface="Arial"/>
+        <a:font script="Bugi" typeface="Leelawadee UI"/>
+        <a:font script="Bopo" typeface="Microsoft JhengHei"/>
+        <a:font script="Java" typeface="Javanese Text"/>
+        <a:font script="Lisu" typeface="Segoe UI"/>
+        <a:font script="Mymr" typeface="Myanmar Text"/>
+        <a:font script="Nkoo" typeface="Ebrima"/>
+        <a:font script="Olck" typeface="Nirmala UI"/>
+        <a:font script="Osma" typeface="Ebrima"/>
+        <a:font script="Phag" typeface="Phagspa"/>
+        <a:font script="Syrn" typeface="Estrangelo Edessa"/>
+        <a:font script="Syrj" typeface="Estrangelo Edessa"/>
+        <a:font script="Syre" typeface="Estrangelo Edessa"/>
+        <a:font script="Sora" typeface="Nirmala UI"/>
+        <a:font script="Tale" typeface="Microsoft Tai Le"/>
+        <a:font script="Talu" typeface="Microsoft New Tai Lue"/>
+        <a:font script="Tfng" typeface="Ebrima"/>
+      </a:minorFont>
+    </a:fontScheme>
+    <a:fmtScheme name="Office">
+      <a:fillStyleLst>
+        <a:solidFill>
+          <a:schemeClr val="phClr"/>
+        </a:solidFill>
+        <a:gradFill rotWithShape="1">
+          <a:gsLst>
+            <a:gs pos="0">
+              <a:schemeClr val="phClr">
+                <a:lumMod val="110000"/>
+                <a:satMod val="105000"/>
+                <a:tint val="67000"/>
+              </a:schemeClr>
+            </a:gs>
+            <a:gs pos="50000">
+              <a:schemeClr val="phClr">
+                <a:lumMod val="105000"/>
+                <a:satMod val="103000"/>
+                <a:tint val="73000"/>
+              </a:schemeClr>
+            </a:gs>
+            <a:gs pos="100000">
+              <a:schemeClr val="phClr">
+                <a:lumMod val="105000"/>
+                <a:satMod val="109000"/>
+                <a:tint val="81000"/>
+              </a:schemeClr>
+            </a:gs>
+          </a:gsLst>
+          <a:lin ang="5400000" scaled="0"/>
+        </a:gradFill>
+        <a:gradFill rotWithShape="1">
+          <a:gsLst>
+            <a:gs pos="0">
+              <a:schemeClr val="phClr">
+                <a:satMod val="103000"/>
+                <a:lumMod val="102000"/>
+                <a:tint val="94000"/>
+              </a:schemeClr>
+            </a:gs>
+            <a:gs pos="50000">
+              <a:schemeClr val="phClr">
+                <a:satMod val="110000"/>
+                <a:lumMod val="100000"/>
+                <a:shade val="100000"/>
+              </a:schemeClr>
+            </a:gs>
+            <a:gs pos="100000">
+              <a:schemeClr val="phClr">
+                <a:lumMod val="99000"/>
+                <a:satMod val="120000"/>
+                <a:shade val="78000"/>
+              </a:schemeClr>
+            </a:gs>
+          </a:gsLst>
+          <a:lin ang="5400000" scaled="0"/>
+        </a:gradFill>
+      </a:fillStyleLst>
+      <a:lnStyleLst>
+        <a:ln w="6350" cap="flat" cmpd="sng" algn="ctr">
+          <a:solidFill>
+            <a:schemeClr val="phClr"/>
+          </a:solidFill>
+          <a:prstDash val="solid"/>
+          <a:miter lim="800000"/>
+        </a:ln>
+        <a:ln w="12700" cap="flat" cmpd="sng" algn="ctr">
+          <a:solidFill>
+            <a:schemeClr val="phClr"/>
+          </a:solidFill>
+          <a:prstDash val="solid"/>
+          <a:miter lim="800000"/>
+        </a:ln>
+        <a:ln w="19050" cap="flat" cmpd="sng" algn="ctr">
+          <a:solidFill>
+            <a:schemeClr val="phClr"/>
+          </a:solidFill>
+          <a:prstDash val="solid"/>
+          <a:miter lim="800000"/>
+        </a:ln>
+      </a:lnStyleLst>
+      <a:effectStyleLst>
+        <a:effectStyle>
+          <a:effectLst/>
+        </a:effectStyle>
+        <a:effectStyle>
+          <a:effectLst/>
+        </a:effectStyle>
+        <a:effectStyle>
+          <a:effectLst>
+            <a:outerShdw blurRad="57150" dist="19050" dir="5400000" algn="ctr" rotWithShape="0">
+              <a:srgbClr val="000000">
+                <a:alpha val="63000"/>
+              </a:srgbClr>
+            </a:outerShdw>
+          </a:effectLst>
+        </a:effectStyle>
+      </a:effectStyleLst>
+      <a:bgFillStyleLst>
+        <a:solidFill>
+          <a:schemeClr val="phClr"/>
+        </a:solidFill>
+        <a:solidFill>
+          <a:schemeClr val="phClr">
+            <a:tint val="95000"/>
+            <a:satMod val="170000"/>
+          </a:schemeClr>
+        </a:solidFill>
+        <a:gradFill rotWithShape="1">
+          <a:gsLst>
+            <a:gs pos="0">
+              <a:schemeClr val="phClr">
+                <a:tint val="93000"/>
+                <a:satMod val="150000"/>
+                <a:shade val="98000"/>
+                <a:lumMod val="102000"/>
+              </a:schemeClr>
+            </a:gs>
+            <a:gs pos="50000">
+              <a:schemeClr val="phClr">
+                <a:tint val="98000"/>
+                <a:satMod val="130000"/>
+                <a:shade val="90000"/>
+                <a:lumMod val="103000"/>
+              </a:schemeClr>
+            </a:gs>
+            <a:gs pos="100000">
+              <a:schemeClr val="phClr">
+                <a:shade val="63000"/>
+                <a:satMod val="120000"/>
+              </a:schemeClr>
+            </a:gs>
+          </a:gsLst>
+          <a:lin ang="5400000" scaled="0"/>
+        </a:gradFill>
+      </a:bgFillStyleLst>
+    </a:fmtScheme>
+  </a:themeElements>
+  <a:objectDefaults/>
+  <a:extraClrSchemeLst/>
+  <a:extLst>
+    <a:ext uri="{05A4C25C-085E-4340-85A3-A5531E510DB2}">
+      <thm15:themeFamily xmlns:thm15="http://schemas.microsoft.com/office/thememl/2012/main" name="Office Theme" id="{62F939B6-93AF-4DB8-9C6B-D6C7DFDC589F}" vid="{4A3C46E8-61CC-4603-A589-7422A47A8E4A}"/>
+    </a:ext>
+  </a:extLst>
+</a:theme>
 </file>
--- a/outputs/paparan_ispu_dki_jakarta.pptx
+++ b/outputs/paparan_ispu_dki_jakarta.pptx
@@ -1987,7 +1987,7 @@
           </a:prstGeom>
           <a:extLst>
             <a:ext uri="{C572A759-6A51-4108-AA02-DFA0A04FC94B}">
-              <ma14:wrappingTextBoxFlag xmlns:ma14="http://schemas.microsoft.com/office/mac/drawingml/2011/main" xmlns="" val="0"/>
+              <ma14:wrappingTextBoxFlag xmlns="" xmlns:ma14="http://schemas.microsoft.com/office/mac/drawingml/2011/main" val="0"/>
             </a:ext>
           </a:extLst>
         </p:spPr>
@@ -2065,7 +2065,7 @@
           </a:prstGeom>
           <a:extLst>
             <a:ext uri="{C572A759-6A51-4108-AA02-DFA0A04FC94B}">
-              <ma14:wrappingTextBoxFlag xmlns:ma14="http://schemas.microsoft.com/office/mac/drawingml/2011/main" xmlns="" val="0"/>
+              <ma14:wrappingTextBoxFlag xmlns="" xmlns:ma14="http://schemas.microsoft.com/office/mac/drawingml/2011/main" val="0"/>
             </a:ext>
           </a:extLst>
         </p:spPr>
@@ -3211,7 +3211,7 @@
                 <a:ea typeface="Aptos Display" pitchFamily="34" charset="-122"/>
                 <a:cs typeface="Aptos Display" pitchFamily="34" charset="-120"/>
               </a:rPr>
-              <a:t>17.6%</a:t>
+              <a:t>18.4%</a:t>
             </a:r>
             <a:endParaRPr lang="en-US" sz="2400" dirty="0"/>
           </a:p>
@@ -3368,7 +3368,7 @@
                 <a:ea typeface="Aptos Display" pitchFamily="34" charset="-122"/>
                 <a:cs typeface="Aptos Display" pitchFamily="34" charset="-120"/>
               </a:rPr>
-              <a:t>88.2</a:t>
+              <a:t>90.1</a:t>
             </a:r>
             <a:endParaRPr lang="en-US" sz="2400" dirty="0"/>
           </a:p>
@@ -3525,7 +3525,7 @@
                 <a:ea typeface="Aptos Display" pitchFamily="34" charset="-122"/>
                 <a:cs typeface="Aptos Display" pitchFamily="34" charset="-120"/>
               </a:rPr>
-              <a:t>89.7</a:t>
+              <a:t>90.1</a:t>
             </a:r>
             <a:endParaRPr lang="en-US" sz="2400" dirty="0"/>
           </a:p>
@@ -3726,7 +3726,7 @@
                 <a:ea typeface="Aptos Display" pitchFamily="34" charset="-122"/>
                 <a:cs typeface="Aptos Display" pitchFamily="34" charset="-120"/>
               </a:rPr>
-              <a:t>44.3%</a:t>
+              <a:t>46.7%</a:t>
             </a:r>
             <a:endParaRPr lang="en-US" sz="2400" dirty="0"/>
           </a:p>
@@ -4708,7 +4708,7 @@
           </a:prstGeom>
           <a:extLst>
             <a:ext uri="{C572A759-6A51-4108-AA02-DFA0A04FC94B}">
-              <ma14:wrappingTextBoxFlag xmlns:ma14="http://schemas.microsoft.com/office/mac/drawingml/2011/main" xmlns="" val="0"/>
+              <ma14:wrappingTextBoxFlag xmlns="" xmlns:ma14="http://schemas.microsoft.com/office/mac/drawingml/2011/main" val="0"/>
             </a:ext>
           </a:extLst>
         </p:spPr>
@@ -5431,7 +5431,7 @@
         </p:spPr>
         <p:txBody>
           <a:bodyPr wrap="square" lIns="254" tIns="254" rIns="254" bIns="254" rtlCol="0" anchor="ctr">
-            <a:normAutofit/>
+            <a:normAutofit lnSpcReduction="10000"/>
           </a:bodyPr>
           <a:lstStyle/>
           <a:p>
@@ -5447,7 +5447,117 @@
                 <a:ea typeface="Aptos" pitchFamily="34" charset="-122"/>
                 <a:cs typeface="Aptos" pitchFamily="34" charset="-120"/>
               </a:rPr>
-              <a:t>Kepala Dinas LH DKI Jakarta, bidang pengendalian pencemaran udara, pengelola SPKU, serta unit data/dashboard.</a:t>
+              <a:t>Kepala Dinas LH DKI Jakarta, </a:t>
+            </a:r>
+            <a:r>
+              <a:rPr lang="en-US" sz="1100" dirty="0" err="1">
+                <a:solidFill>
+                  <a:srgbClr val="58706A"/>
+                </a:solidFill>
+                <a:latin typeface="Aptos" pitchFamily="34" charset="0"/>
+                <a:ea typeface="Aptos" pitchFamily="34" charset="-122"/>
+                <a:cs typeface="Aptos" pitchFamily="34" charset="-120"/>
+              </a:rPr>
+              <a:t>Kepala</a:t>
+            </a:r>
+            <a:r>
+              <a:rPr lang="en-US" sz="1100" dirty="0">
+                <a:solidFill>
+                  <a:srgbClr val="58706A"/>
+                </a:solidFill>
+                <a:latin typeface="Aptos" pitchFamily="34" charset="0"/>
+                <a:ea typeface="Aptos" pitchFamily="34" charset="-122"/>
+                <a:cs typeface="Aptos" pitchFamily="34" charset="-120"/>
+              </a:rPr>
+              <a:t> </a:t>
+            </a:r>
+            <a:r>
+              <a:rPr lang="en-US" sz="1100" dirty="0" err="1">
+                <a:solidFill>
+                  <a:srgbClr val="58706A"/>
+                </a:solidFill>
+                <a:latin typeface="Aptos" pitchFamily="34" charset="0"/>
+                <a:ea typeface="Aptos" pitchFamily="34" charset="-122"/>
+                <a:cs typeface="Aptos" pitchFamily="34" charset="-120"/>
+              </a:rPr>
+              <a:t>Bidang</a:t>
+            </a:r>
+            <a:r>
+              <a:rPr lang="en-US" sz="1100" dirty="0">
+                <a:solidFill>
+                  <a:srgbClr val="58706A"/>
+                </a:solidFill>
+                <a:latin typeface="Aptos" pitchFamily="34" charset="0"/>
+                <a:ea typeface="Aptos" pitchFamily="34" charset="-122"/>
+                <a:cs typeface="Aptos" pitchFamily="34" charset="-120"/>
+              </a:rPr>
+              <a:t> </a:t>
+            </a:r>
+            <a:r>
+              <a:rPr lang="en-US" sz="1100" dirty="0" err="1">
+                <a:solidFill>
+                  <a:srgbClr val="58706A"/>
+                </a:solidFill>
+                <a:latin typeface="Aptos" pitchFamily="34" charset="0"/>
+                <a:ea typeface="Aptos" pitchFamily="34" charset="-122"/>
+                <a:cs typeface="Aptos" pitchFamily="34" charset="-120"/>
+              </a:rPr>
+              <a:t>Pengendalian</a:t>
+            </a:r>
+            <a:r>
+              <a:rPr lang="en-US" sz="1100" dirty="0">
+                <a:solidFill>
+                  <a:srgbClr val="58706A"/>
+                </a:solidFill>
+                <a:latin typeface="Aptos" pitchFamily="34" charset="0"/>
+                <a:ea typeface="Aptos" pitchFamily="34" charset="-122"/>
+                <a:cs typeface="Aptos" pitchFamily="34" charset="-120"/>
+              </a:rPr>
+              <a:t> </a:t>
+            </a:r>
+            <a:r>
+              <a:rPr lang="en-US" sz="1100" dirty="0" err="1">
+                <a:solidFill>
+                  <a:srgbClr val="58706A"/>
+                </a:solidFill>
+                <a:latin typeface="Aptos" pitchFamily="34" charset="0"/>
+                <a:ea typeface="Aptos" pitchFamily="34" charset="-122"/>
+                <a:cs typeface="Aptos" pitchFamily="34" charset="-120"/>
+              </a:rPr>
+              <a:t>Pencemaran</a:t>
+            </a:r>
+            <a:r>
+              <a:rPr lang="en-US" sz="1100" dirty="0">
+                <a:solidFill>
+                  <a:srgbClr val="58706A"/>
+                </a:solidFill>
+                <a:latin typeface="Aptos" pitchFamily="34" charset="0"/>
+                <a:ea typeface="Aptos" pitchFamily="34" charset="-122"/>
+                <a:cs typeface="Aptos" pitchFamily="34" charset="-120"/>
+              </a:rPr>
+              <a:t> Udara, pengelola SPKU, </a:t>
+            </a:r>
+            <a:r>
+              <a:rPr lang="en-US" sz="1100" dirty="0" err="1">
+                <a:solidFill>
+                  <a:srgbClr val="58706A"/>
+                </a:solidFill>
+                <a:latin typeface="Aptos" pitchFamily="34" charset="0"/>
+                <a:ea typeface="Aptos" pitchFamily="34" charset="-122"/>
+                <a:cs typeface="Aptos" pitchFamily="34" charset="-120"/>
+              </a:rPr>
+              <a:t>serta</a:t>
+            </a:r>
+            <a:r>
+              <a:rPr lang="en-US" sz="1100" dirty="0">
+                <a:solidFill>
+                  <a:srgbClr val="58706A"/>
+                </a:solidFill>
+                <a:latin typeface="Aptos" pitchFamily="34" charset="0"/>
+                <a:ea typeface="Aptos" pitchFamily="34" charset="-122"/>
+                <a:cs typeface="Aptos" pitchFamily="34" charset="-120"/>
+              </a:rPr>
+              <a:t> operator data/dashboard.</a:t>
             </a:r>
             <a:endParaRPr lang="en-US" sz="1100" dirty="0"/>
           </a:p>
@@ -5935,10 +6045,10 @@
                 <a:ea typeface="Aptos" pitchFamily="34" charset="-122"/>
                 <a:cs typeface="Aptos" pitchFamily="34" charset="-120"/>
               </a:rPr>
-              <a:t> data. </a:t>
-            </a:r>
-            <a:r>
-              <a:rPr lang="en-US" sz="1100" dirty="0" err="1">
+              <a:t> </a:t>
+            </a:r>
+            <a:r>
+              <a:rPr lang="en-US" sz="1100">
                 <a:solidFill>
                   <a:srgbClr val="14342C"/>
                 </a:solidFill>
@@ -5946,18 +6056,7 @@
                 <a:ea typeface="Aptos" pitchFamily="34" charset="-122"/>
                 <a:cs typeface="Aptos" pitchFamily="34" charset="-120"/>
               </a:rPr>
-              <a:t>Bukan</a:t>
-            </a:r>
-            <a:r>
-              <a:rPr lang="en-US" sz="1100" dirty="0">
-                <a:solidFill>
-                  <a:srgbClr val="14342C"/>
-                </a:solidFill>
-                <a:latin typeface="Aptos" pitchFamily="34" charset="0"/>
-                <a:ea typeface="Aptos" pitchFamily="34" charset="-122"/>
-                <a:cs typeface="Aptos" pitchFamily="34" charset="-120"/>
-              </a:rPr>
-              <a:t> keputusan umum tanpa prioritas.</a:t>
+              <a:t>data.</a:t>
             </a:r>
             <a:endParaRPr lang="en-US" sz="1100" dirty="0"/>
           </a:p>
@@ -5983,7 +6082,7 @@
           </a:prstGeom>
           <a:extLst>
             <a:ext uri="{C572A759-6A51-4108-AA02-DFA0A04FC94B}">
-              <ma14:wrappingTextBoxFlag xmlns:ma14="http://schemas.microsoft.com/office/mac/drawingml/2011/main" xmlns="" val="0"/>
+              <ma14:wrappingTextBoxFlag xmlns="" xmlns:ma14="http://schemas.microsoft.com/office/mac/drawingml/2011/main" val="0"/>
             </a:ext>
           </a:extLst>
         </p:spPr>
@@ -7730,7 +7829,7 @@
           </a:prstGeom>
           <a:extLst>
             <a:ext uri="{C572A759-6A51-4108-AA02-DFA0A04FC94B}">
-              <ma14:wrappingTextBoxFlag xmlns:ma14="http://schemas.microsoft.com/office/mac/drawingml/2011/main" xmlns="" val="0"/>
+              <ma14:wrappingTextBoxFlag xmlns="" xmlns:ma14="http://schemas.microsoft.com/office/mac/drawingml/2011/main" val="0"/>
             </a:ext>
           </a:extLst>
         </p:spPr>
@@ -9451,7 +9550,7 @@
           </a:prstGeom>
           <a:extLst>
             <a:ext uri="{C572A759-6A51-4108-AA02-DFA0A04FC94B}">
-              <ma14:wrappingTextBoxFlag xmlns:ma14="http://schemas.microsoft.com/office/mac/drawingml/2011/main" xmlns="" val="0"/>
+              <ma14:wrappingTextBoxFlag xmlns="" xmlns:ma14="http://schemas.microsoft.com/office/mac/drawingml/2011/main" val="0"/>
             </a:ext>
           </a:extLst>
         </p:spPr>
@@ -9816,7 +9915,51 @@
                 <a:ea typeface="Aptos" pitchFamily="34" charset="-122"/>
                 <a:cs typeface="Aptos" pitchFamily="34" charset="-120"/>
               </a:rPr>
-              <a:t>Rata-rata ISPU seluruh data adalah 79.2, dengan 17.6% hari masuk TIDAK SEHAT atau lebih buruk. Parameter pencemar dominan terbanyak adalah O3 (44.3%).</a:t>
+              <a:t>Rata-rata ISPU seluruh data </a:t>
+            </a:r>
+            <a:r>
+              <a:rPr lang="en-US" sz="1400" dirty="0" err="1">
+                <a:solidFill>
+                  <a:srgbClr val="14342C"/>
+                </a:solidFill>
+                <a:latin typeface="Aptos" pitchFamily="34" charset="0"/>
+                <a:ea typeface="Aptos" pitchFamily="34" charset="-122"/>
+                <a:cs typeface="Aptos" pitchFamily="34" charset="-120"/>
+              </a:rPr>
+              <a:t>adalah</a:t>
+            </a:r>
+            <a:r>
+              <a:rPr lang="en-US" sz="1400" dirty="0">
+                <a:solidFill>
+                  <a:srgbClr val="14342C"/>
+                </a:solidFill>
+                <a:latin typeface="Aptos" pitchFamily="34" charset="0"/>
+                <a:ea typeface="Aptos" pitchFamily="34" charset="-122"/>
+                <a:cs typeface="Aptos" pitchFamily="34" charset="-120"/>
+              </a:rPr>
+              <a:t> 79.9, </a:t>
+            </a:r>
+            <a:r>
+              <a:rPr lang="en-US" sz="1400" dirty="0" err="1">
+                <a:solidFill>
+                  <a:srgbClr val="14342C"/>
+                </a:solidFill>
+                <a:latin typeface="Aptos" pitchFamily="34" charset="0"/>
+                <a:ea typeface="Aptos" pitchFamily="34" charset="-122"/>
+                <a:cs typeface="Aptos" pitchFamily="34" charset="-120"/>
+              </a:rPr>
+              <a:t>dengan</a:t>
+            </a:r>
+            <a:r>
+              <a:rPr lang="en-US" sz="1400" dirty="0">
+                <a:solidFill>
+                  <a:srgbClr val="14342C"/>
+                </a:solidFill>
+                <a:latin typeface="Aptos" pitchFamily="34" charset="0"/>
+                <a:ea typeface="Aptos" pitchFamily="34" charset="-122"/>
+                <a:cs typeface="Aptos" pitchFamily="34" charset="-120"/>
+              </a:rPr>
+              <a:t> 18.4% hari masuk TIDAK SEHAT atau lebih buruk. Parameter pencemar dominan terbanyak adalah O3 (46.7%).</a:t>
             </a:r>
             <a:endParaRPr lang="en-US" sz="1400" dirty="0"/>
           </a:p>
@@ -9992,7 +10135,7 @@
           </a:prstGeom>
           <a:extLst>
             <a:ext uri="{C572A759-6A51-4108-AA02-DFA0A04FC94B}">
-              <ma14:wrappingTextBoxFlag xmlns:ma14="http://schemas.microsoft.com/office/mac/drawingml/2011/main" xmlns="" val="0"/>
+              <ma14:wrappingTextBoxFlag xmlns="" xmlns:ma14="http://schemas.microsoft.com/office/mac/drawingml/2011/main" val="0"/>
             </a:ext>
           </a:extLst>
         </p:spPr>
@@ -10357,7 +10500,7 @@
                 <a:ea typeface="Aptos" pitchFamily="34" charset="-122"/>
                 <a:cs typeface="Aptos" pitchFamily="34" charset="-120"/>
               </a:rPr>
-              <a:t>Tahun terbaik adalah 2010 dengan rata-rata ISPU 60.8; tahun terburuk adalah 2018 dengan rata-rata ISPU 120.4. Tren menunjukkan fluktuasi antar tahun sehingga evaluasi perlu memperhatikan konteks data dan jumlah observasi.</a:t>
+              <a:t>Tahun terbaik adalah 2010 dengan rata-rata ISPU 60.7; tahun terburuk adalah 2018 dengan rata-rata ISPU 120.4. Tren menunjukkan fluktuasi antar tahun sehingga evaluasi perlu memperhatikan konteks data dan jumlah observasi.</a:t>
             </a:r>
             <a:endParaRPr lang="en-US" sz="1400" dirty="0"/>
           </a:p>
@@ -10533,7 +10676,7 @@
           </a:prstGeom>
           <a:extLst>
             <a:ext uri="{C572A759-6A51-4108-AA02-DFA0A04FC94B}">
-              <ma14:wrappingTextBoxFlag xmlns:ma14="http://schemas.microsoft.com/office/mac/drawingml/2011/main" xmlns="" val="0"/>
+              <ma14:wrappingTextBoxFlag xmlns="" xmlns:ma14="http://schemas.microsoft.com/office/mac/drawingml/2011/main" val="0"/>
             </a:ext>
           </a:extLst>
         </p:spPr>
@@ -10898,7 +11041,7 @@
                 <a:ea typeface="Aptos" pitchFamily="34" charset="-122"/>
                 <a:cs typeface="Aptos" pitchFamily="34" charset="-120"/>
               </a:rPr>
-              <a:t>Stasiun dengan rata-rata ISPU tertinggi adalah DKI2 Kelapa Gading (88.2), sedangkan terendah DKI1 Bunderan HI (65). DKI4 Lubang Buaya memiliki proporsi hari tidak sehat tertinggi (23.1%).</a:t>
+              <a:t>Stasiun dengan rata-rata ISPU tertinggi adalah DKI2 Kelapa Gading (90.1), sedangkan terendah DKI1 Bunderan HI (65). DKI4 Lubang Buaya memiliki proporsi hari tidak sehat tertinggi (24.7%).</a:t>
             </a:r>
             <a:endParaRPr lang="en-US" sz="1400" dirty="0"/>
           </a:p>
@@ -11074,7 +11217,7 @@
           </a:prstGeom>
           <a:extLst>
             <a:ext uri="{C572A759-6A51-4108-AA02-DFA0A04FC94B}">
-              <ma14:wrappingTextBoxFlag xmlns:ma14="http://schemas.microsoft.com/office/mac/drawingml/2011/main" xmlns="" val="0"/>
+              <ma14:wrappingTextBoxFlag xmlns="" xmlns:ma14="http://schemas.microsoft.com/office/mac/drawingml/2011/main" val="0"/>
             </a:ext>
           </a:extLst>
         </p:spPr>
@@ -11439,7 +11582,7 @@
                 <a:ea typeface="Aptos" pitchFamily="34" charset="-122"/>
                 <a:cs typeface="Aptos" pitchFamily="34" charset="-120"/>
               </a:rPr>
-              <a:t>O3 paling sering menjadi pencemar dominan (44.3%), diikuti PM2.5 (29.3%) dan PM10 (22.7%). Namun PM2.5 harus dibaca bersama coverage karena 62.2% datanya missing.</a:t>
+              <a:t>O3 paling sering menjadi pencemar dominan (46.7%), diikuti PM2.5 (26.0%) dan PM10 (23.8%). Namun PM2.5 harus dibaca bersama coverage karena 62.2% datanya missing.</a:t>
             </a:r>
             <a:endParaRPr lang="en-US" sz="1400" dirty="0"/>
           </a:p>
@@ -11615,7 +11758,7 @@
           </a:prstGeom>
           <a:extLst>
             <a:ext uri="{C572A759-6A51-4108-AA02-DFA0A04FC94B}">
-              <ma14:wrappingTextBoxFlag xmlns:ma14="http://schemas.microsoft.com/office/mac/drawingml/2011/main" xmlns="" val="0"/>
+              <ma14:wrappingTextBoxFlag xmlns="" xmlns:ma14="http://schemas.microsoft.com/office/mac/drawingml/2011/main" val="0"/>
             </a:ext>
           </a:extLst>
         </p:spPr>
@@ -11980,7 +12123,51 @@
                 <a:ea typeface="Aptos" pitchFamily="34" charset="-122"/>
                 <a:cs typeface="Aptos" pitchFamily="34" charset="-120"/>
               </a:rPr>
-              <a:t>Rata-rata ISPU tertinggi terjadi pada bulan Okt (89.7) dengan 25.4% hari tidak sehat. Bulan dengan rata-rata terendah adalah Jan (62.6).</a:t>
+              <a:t>Rata-rata ISPU tertinggi terjadi pada bulan </a:t>
+            </a:r>
+            <a:r>
+              <a:rPr lang="en-US" sz="1400" dirty="0" err="1">
+                <a:solidFill>
+                  <a:srgbClr val="14342C"/>
+                </a:solidFill>
+                <a:latin typeface="Aptos" pitchFamily="34" charset="0"/>
+                <a:ea typeface="Aptos" pitchFamily="34" charset="-122"/>
+                <a:cs typeface="Aptos" pitchFamily="34" charset="-120"/>
+              </a:rPr>
+              <a:t>Okt</a:t>
+            </a:r>
+            <a:r>
+              <a:rPr lang="en-US" sz="1400" dirty="0">
+                <a:solidFill>
+                  <a:srgbClr val="14342C"/>
+                </a:solidFill>
+                <a:latin typeface="Aptos" pitchFamily="34" charset="0"/>
+                <a:ea typeface="Aptos" pitchFamily="34" charset="-122"/>
+                <a:cs typeface="Aptos" pitchFamily="34" charset="-120"/>
+              </a:rPr>
+              <a:t> (90.1) </a:t>
+            </a:r>
+            <a:r>
+              <a:rPr lang="en-US" sz="1400" dirty="0" err="1">
+                <a:solidFill>
+                  <a:srgbClr val="14342C"/>
+                </a:solidFill>
+                <a:latin typeface="Aptos" pitchFamily="34" charset="0"/>
+                <a:ea typeface="Aptos" pitchFamily="34" charset="-122"/>
+                <a:cs typeface="Aptos" pitchFamily="34" charset="-120"/>
+              </a:rPr>
+              <a:t>dengan</a:t>
+            </a:r>
+            <a:r>
+              <a:rPr lang="en-US" sz="1400" dirty="0">
+                <a:solidFill>
+                  <a:srgbClr val="14342C"/>
+                </a:solidFill>
+                <a:latin typeface="Aptos" pitchFamily="34" charset="0"/>
+                <a:ea typeface="Aptos" pitchFamily="34" charset="-122"/>
+                <a:cs typeface="Aptos" pitchFamily="34" charset="-120"/>
+              </a:rPr>
+              <a:t> 25.3% hari tidak sehat. Bulan dengan rata-rata terendah adalah Jan (61.3).</a:t>
             </a:r>
             <a:endParaRPr lang="en-US" sz="1400" dirty="0"/>
           </a:p>
@@ -12156,7 +12343,7 @@
           </a:prstGeom>
           <a:extLst>
             <a:ext uri="{C572A759-6A51-4108-AA02-DFA0A04FC94B}">
-              <ma14:wrappingTextBoxFlag xmlns:ma14="http://schemas.microsoft.com/office/mac/drawingml/2011/main" xmlns="" val="0"/>
+              <ma14:wrappingTextBoxFlag xmlns="" xmlns:ma14="http://schemas.microsoft.com/office/mac/drawingml/2011/main" val="0"/>
             </a:ext>
           </a:extLst>
         </p:spPr>
